--- a/docs/Elephant_Guard_SIH26043_Winning_Presentation.pptx
+++ b/docs/Elephant_Guard_SIH26043_Winning_Presentation.pptx
@@ -6042,8 +6042,8 @@
         </p:nvSpPr>
         <p:spPr>
           <a:xfrm>
-            <a:off x="331286" y="1405502"/>
-            <a:ext cx="7412330" cy="5425331"/>
+            <a:off x="274320" y="1234440"/>
+            <a:ext cx="6858000" cy="5486400"/>
           </a:xfrm>
           <a:prstGeom prst="rect">
             <a:avLst/>
@@ -6058,9 +6058,9 @@
           <a:p>
             <a:pPr>
               <a:spcAft>
-                <a:spcPts val="400"/>
+                <a:spcPts val="600"/>
               </a:spcAft>
-              <a:defRPr sz="1350" b="1">
+              <a:defRPr sz="1700" b="1">
                 <a:solidFill>
                   <a:srgbClr val="1F497D"/>
                 </a:solidFill>
@@ -6071,7 +6071,7 @@
               <a:t>•  Problem Statement ID – </a:t>
             </a:r>
             <a:r>
-              <a:rPr sz="1300" b="1">
+              <a:rPr sz="1700" b="1">
                 <a:solidFill>
                   <a:srgbClr val="1F497D"/>
                 </a:solidFill>
@@ -6084,9 +6084,9 @@
           <a:p>
             <a:pPr>
               <a:spcAft>
-                <a:spcPts val="400"/>
+                <a:spcPts val="600"/>
               </a:spcAft>
-              <a:defRPr sz="1350" b="1">
+              <a:defRPr sz="1700" b="1">
                 <a:solidFill>
                   <a:srgbClr val="1F497D"/>
                 </a:solidFill>
@@ -6097,9 +6097,9 @@
               <a:t>•  Problem Statement Title – </a:t>
             </a:r>
             <a:r>
-              <a:rPr sz="1300" b="1">
-                <a:solidFill>
-                  <a:srgbClr val="010000"/>
+              <a:rPr sz="1700" b="1">
+                <a:solidFill>
+                  <a:srgbClr val="0F172A"/>
                 </a:solidFill>
                 <a:latin typeface="Arial"/>
               </a:rPr>
@@ -6109,11 +6109,11 @@
           <a:p>
             <a:pPr>
               <a:spcAft>
-                <a:spcPts val="400"/>
+                <a:spcPts val="600"/>
               </a:spcAft>
-              <a:defRPr sz="1350" b="1">
-                <a:solidFill>
-                  <a:srgbClr val="010000"/>
+              <a:defRPr sz="1700" b="1">
+                <a:solidFill>
+                  <a:srgbClr val="0F172A"/>
                 </a:solidFill>
                 <a:latin typeface="Arial"/>
               </a:defRPr>
@@ -6122,9 +6122,9 @@
               <a:t>•  Theme – </a:t>
             </a:r>
             <a:r>
-              <a:rPr sz="1300" b="0">
-                <a:solidFill>
-                  <a:srgbClr val="334155"/>
+              <a:rPr sz="1700" b="0">
+                <a:solidFill>
+                  <a:srgbClr val="0F172A"/>
                 </a:solidFill>
                 <a:latin typeface="Arial"/>
               </a:rPr>
@@ -6134,11 +6134,11 @@
           <a:p>
             <a:pPr>
               <a:spcAft>
-                <a:spcPts val="400"/>
+                <a:spcPts val="600"/>
               </a:spcAft>
-              <a:defRPr sz="1350" b="1">
-                <a:solidFill>
-                  <a:srgbClr val="010000"/>
+              <a:defRPr sz="1700" b="1">
+                <a:solidFill>
+                  <a:srgbClr val="0F172A"/>
                 </a:solidFill>
                 <a:latin typeface="Arial"/>
               </a:defRPr>
@@ -6147,9 +6147,9 @@
               <a:t>•  PS Category – </a:t>
             </a:r>
             <a:r>
-              <a:rPr sz="1300" b="1">
-                <a:solidFill>
-                  <a:srgbClr val="010000"/>
+              <a:rPr sz="1700" b="1">
+                <a:solidFill>
+                  <a:srgbClr val="0F172A"/>
                 </a:solidFill>
                 <a:latin typeface="Arial"/>
               </a:rPr>
@@ -6159,9 +6159,9 @@
           <a:p>
             <a:pPr>
               <a:spcAft>
-                <a:spcPts val="400"/>
+                <a:spcPts val="600"/>
               </a:spcAft>
-              <a:defRPr sz="1350" b="1">
+              <a:defRPr sz="1700" b="1">
                 <a:solidFill>
                   <a:srgbClr val="1F497D"/>
                 </a:solidFill>
@@ -6172,9 +6172,9 @@
               <a:t>•  Team ID – </a:t>
             </a:r>
             <a:r>
-              <a:rPr sz="1300" b="0">
-                <a:solidFill>
-                  <a:srgbClr val="334155"/>
+              <a:rPr sz="1700" b="0">
+                <a:solidFill>
+                  <a:srgbClr val="0F172A"/>
                 </a:solidFill>
                 <a:latin typeface="Arial"/>
               </a:rPr>
@@ -6184,9 +6184,9 @@
           <a:p>
             <a:pPr>
               <a:spcAft>
-                <a:spcPts val="400"/>
+                <a:spcPts val="600"/>
               </a:spcAft>
-              <a:defRPr sz="1350" b="1">
+              <a:defRPr sz="1700" b="1">
                 <a:solidFill>
                   <a:srgbClr val="1F497D"/>
                 </a:solidFill>
@@ -6194,10 +6194,10 @@
               </a:defRPr>
             </a:pPr>
             <a:r>
-              <a:t>•  Team Name (Registered on portal) – </a:t>
-            </a:r>
-            <a:r>
-              <a:rPr sz="1300" b="1">
+              <a:t>•  Team Name – </a:t>
+            </a:r>
+            <a:r>
+              <a:rPr sz="1700" b="1">
                 <a:solidFill>
                   <a:srgbClr val="1F497D"/>
                 </a:solidFill>
@@ -6209,9 +6209,9 @@
           <a:p>
             <a:pPr>
               <a:spcAft>
-                <a:spcPts val="400"/>
+                <a:spcPts val="600"/>
               </a:spcAft>
-              <a:defRPr sz="1350" b="1">
+              <a:defRPr sz="1700" b="1">
                 <a:solidFill>
                   <a:srgbClr val="1F497D"/>
                 </a:solidFill>
@@ -6222,7 +6222,7 @@
               <a:t>•  Project Title – </a:t>
             </a:r>
             <a:r>
-              <a:rPr sz="1300" b="1">
+              <a:rPr sz="1700" b="1">
                 <a:solidFill>
                   <a:srgbClr val="064E3B"/>
                 </a:solidFill>
@@ -6234,11 +6234,11 @@
           <a:p>
             <a:pPr>
               <a:spcAft>
-                <a:spcPts val="400"/>
+                <a:spcPts val="600"/>
               </a:spcAft>
-              <a:defRPr sz="1350" b="1">
-                <a:solidFill>
-                  <a:srgbClr val="010000"/>
+              <a:defRPr sz="1700" b="1">
+                <a:solidFill>
+                  <a:srgbClr val="0F172A"/>
                 </a:solidFill>
                 <a:latin typeface="Arial"/>
               </a:defRPr>
@@ -6247,9 +6247,9 @@
               <a:t>•  Subtitle – </a:t>
             </a:r>
             <a:r>
-              <a:rPr sz="1300" b="0">
-                <a:solidFill>
-                  <a:srgbClr val="334155"/>
+              <a:rPr sz="1700" b="0">
+                <a:solidFill>
+                  <a:srgbClr val="0F172A"/>
                 </a:solidFill>
                 <a:latin typeface="Arial"/>
               </a:rPr>
@@ -6356,7 +6356,7 @@
         <p:spPr bwMode="auto">
           <a:xfrm>
             <a:off x="365760" y="1051560"/>
-            <a:ext cx="6858000" cy="5120640"/>
+            <a:ext cx="6858000" cy="5303520"/>
           </a:xfrm>
           <a:prstGeom prst="rect">
             <a:avLst/>
@@ -6377,11 +6377,11 @@
           <a:p>
             <a:pPr marL="342900" indent="-342900">
               <a:spcAft>
-                <a:spcPts val="600"/>
+                <a:spcPts val="800"/>
               </a:spcAft>
               <a:buFont typeface="Wingdings" panose="05000000000000000000" pitchFamily="2" charset="2"/>
               <a:buChar char="v"/>
-              <a:defRPr sz="2200" b="1">
+              <a:defRPr sz="2400" b="1">
                 <a:solidFill>
                   <a:srgbClr val="1F497D"/>
                 </a:solidFill>
@@ -6395,9 +6395,9 @@
           <a:p>
             <a:pPr>
               <a:spcBef>
-                <a:spcPts val="300"/>
+                <a:spcPts val="400"/>
               </a:spcBef>
-              <a:defRPr sz="1000" b="1">
+              <a:defRPr sz="1700" b="1">
                 <a:solidFill>
                   <a:srgbClr val="1F497D"/>
                 </a:solidFill>
@@ -6405,24 +6405,24 @@
               </a:defRPr>
             </a:pPr>
             <a:r>
-              <a:t>1. AI-BASED EARLY WARNING: </a:t>
-            </a:r>
-            <a:r>
-              <a:rPr sz="900" b="0">
-                <a:solidFill>
-                  <a:srgbClr val="010000"/>
+              <a:t>•  1. AI Early Warning: </a:t>
+            </a:r>
+            <a:r>
+              <a:rPr sz="1650" b="0">
+                <a:solidFill>
+                  <a:srgbClr val="0F172A"/>
                 </a:solidFill>
                 <a:latin typeface="Arial"/>
               </a:rPr>
-              <a:t>On-device computer vision detects elephants from live camera feeds and calculates an estimated detection location using device GPS.</a:t>
+              <a:t>On-device CV detects elephants with estimated GPS location.</a:t>
             </a:r>
           </a:p>
           <a:p>
             <a:pPr>
               <a:spcBef>
-                <a:spcPts val="300"/>
+                <a:spcPts val="400"/>
               </a:spcBef>
-              <a:defRPr sz="1000" b="1">
+              <a:defRPr sz="1700" b="1">
                 <a:solidFill>
                   <a:srgbClr val="1F497D"/>
                 </a:solidFill>
@@ -6430,24 +6430,24 @@
               </a:defRPr>
             </a:pPr>
             <a:r>
-              <a:t>2. TEMPORAL VALIDATION: </a:t>
-            </a:r>
-            <a:r>
-              <a:rPr sz="900" b="0">
-                <a:solidFill>
-                  <a:srgbClr val="010000"/>
+              <a:t>•  2. Temporal Validation: </a:t>
+            </a:r>
+            <a:r>
+              <a:rPr sz="1650" b="0">
+                <a:solidFill>
+                  <a:srgbClr val="0F172A"/>
                 </a:solidFill>
                 <a:latin typeface="Arial"/>
               </a:rPr>
-              <a:t>Multiple recent detections are validated (3-of-5 queue) before alert escalation, eliminating single-frame false positives.</a:t>
+              <a:t>3-of-5 frame queue validates detection to eliminate false alarms.</a:t>
             </a:r>
           </a:p>
           <a:p>
             <a:pPr>
               <a:spcBef>
-                <a:spcPts val="300"/>
+                <a:spcPts val="400"/>
               </a:spcBef>
-              <a:defRPr sz="1000" b="1">
+              <a:defRPr sz="1700" b="1">
                 <a:solidFill>
                   <a:srgbClr val="1F497D"/>
                 </a:solidFill>
@@ -6455,24 +6455,24 @@
               </a:defRPr>
             </a:pPr>
             <a:r>
-              <a:t>3. DYNAMIC RISK ASSESSMENT (DMRS): </a:t>
-            </a:r>
-            <a:r>
-              <a:rPr sz="900" b="0">
-                <a:solidFill>
-                  <a:srgbClr val="010000"/>
+              <a:t>•  3. Dynamic Risk (DMRS): </a:t>
+            </a:r>
+            <a:r>
+              <a:rPr sz="1650" b="0">
+                <a:solidFill>
+                  <a:srgbClr val="0F172A"/>
                 </a:solidFill>
                 <a:latin typeface="Arial"/>
               </a:rPr>
-              <a:t>Risk is calculated using detection confidence, proximity, movement direction, time-to-collision, time of day and historical hotspot records.</a:t>
+              <a:t>Multi-factor score: proximity, confidence, direction &amp; time.</a:t>
             </a:r>
           </a:p>
           <a:p>
             <a:pPr>
               <a:spcBef>
-                <a:spcPts val="300"/>
+                <a:spcPts val="400"/>
               </a:spcBef>
-              <a:defRPr sz="1000" b="1">
+              <a:defRPr sz="1700" b="1">
                 <a:solidFill>
                   <a:srgbClr val="1F497D"/>
                 </a:solidFill>
@@ -6480,26 +6480,24 @@
               </a:defRPr>
             </a:pPr>
             <a:r>
-              <a:t>4. PROXIMITY-BASED ALERTS: </a:t>
-            </a:r>
-            <a:r>
-              <a:rPr sz="900" b="0">
-                <a:solidFill>
-                  <a:srgbClr val="010000"/>
+              <a:t>•  4. Proximity Alerts: </a:t>
+            </a:r>
+            <a:r>
+              <a:rPr sz="1650" b="0">
+                <a:solidFill>
+                  <a:srgbClr val="0F172A"/>
                 </a:solidFill>
                 <a:latin typeface="Arial"/>
               </a:rPr>
-              <a:t>• 0–1 km: Critical → emergency mobile push + audible siren
-• 1–2.5 km: High/Warning → strong warning notification
-• &gt;2.5 km: Safe buffer monitoring (no emergency siren)</a:t>
+              <a:t>0–1 km: Siren + Critical alert | 1–2.5 km: Warning | &gt;2.5 km: Safe.</a:t>
             </a:r>
           </a:p>
           <a:p>
             <a:pPr>
               <a:spcBef>
-                <a:spcPts val="300"/>
+                <a:spcPts val="400"/>
               </a:spcBef>
-              <a:defRPr sz="1000" b="1">
+              <a:defRPr sz="1700" b="1">
                 <a:solidFill>
                   <a:srgbClr val="1F497D"/>
                 </a:solidFill>
@@ -6507,24 +6505,24 @@
               </a:defRPr>
             </a:pPr>
             <a:r>
-              <a:t>5. FOREST DEPARTMENT RESPONSE: </a:t>
-            </a:r>
-            <a:r>
-              <a:rPr sz="900" b="0">
-                <a:solidFill>
-                  <a:srgbClr val="010000"/>
+              <a:t>•  5. Forest Dept Response: </a:t>
+            </a:r>
+            <a:r>
+              <a:rPr sz="1650" b="0">
+                <a:solidFill>
+                  <a:srgbClr val="0F172A"/>
                 </a:solidFill>
                 <a:latin typeface="Arial"/>
               </a:rPr>
-              <a:t>Real-time tactical map, live incident feed, and QRT dispatch coordination support rapid field officer intervention.</a:t>
+              <a:t>Real-time GIS map, live incident feed &amp; rapid QRT dispatch.</a:t>
             </a:r>
           </a:p>
           <a:p>
             <a:pPr>
               <a:spcBef>
-                <a:spcPts val="300"/>
+                <a:spcPts val="400"/>
               </a:spcBef>
-              <a:defRPr sz="1000" b="1">
+              <a:defRPr sz="1700" b="1">
                 <a:solidFill>
                   <a:srgbClr val="1F497D"/>
                 </a:solidFill>
@@ -6532,16 +6530,16 @@
               </a:defRPr>
             </a:pPr>
             <a:r>
-              <a:t>6. COLLABORATIVE PROBLEM SOLVING: </a:t>
-            </a:r>
-            <a:r>
-              <a:rPr sz="900" b="0">
-                <a:solidFill>
-                  <a:srgbClr val="010000"/>
+              <a:t>•  6. Collaborative SIH Hub: </a:t>
+            </a:r>
+            <a:r>
+              <a:rPr sz="1650" b="0">
+                <a:solidFill>
+                  <a:srgbClr val="0F172A"/>
                 </a:solidFill>
                 <a:latin typeface="Arial"/>
               </a:rPr>
-              <a:t>Verified corridor incidents can be converted into open challenges for universities and industry partners to propose innovative field solutions.</a:t>
+              <a:t>Verified incidents converted to challenges for universities &amp; industry.</a:t>
             </a:r>
           </a:p>
         </p:txBody>
@@ -6706,8 +6704,8 @@
         </p:nvSpPr>
         <p:spPr>
           <a:xfrm>
-            <a:off x="7406640" y="1143000"/>
-            <a:ext cx="4434840" cy="5029200"/>
+            <a:off x="7406640" y="1097280"/>
+            <a:ext cx="4434840" cy="5120640"/>
           </a:xfrm>
           <a:prstGeom prst="roundRect">
             <a:avLst/>
@@ -6715,7 +6713,7 @@
           <a:solidFill>
             <a:srgbClr val="F8FAFC"/>
           </a:solidFill>
-          <a:ln w="12700">
+          <a:ln w="19050">
             <a:solidFill>
               <a:srgbClr val="1F497D"/>
             </a:solidFill>
@@ -6751,8 +6749,8 @@
         </p:nvSpPr>
         <p:spPr>
           <a:xfrm>
-            <a:off x="7452360" y="1188720"/>
-            <a:ext cx="4343400" cy="274320"/>
+            <a:off x="7452360" y="1143000"/>
+            <a:ext cx="4343400" cy="320040"/>
           </a:xfrm>
           <a:prstGeom prst="rect">
             <a:avLst/>
@@ -6766,7 +6764,7 @@
           <a:lstStyle/>
           <a:p>
             <a:pPr algn="ctr">
-              <a:defRPr sz="950" b="1">
+              <a:defRPr sz="1300" b="1">
                 <a:solidFill>
                   <a:srgbClr val="1F497D"/>
                 </a:solidFill>
@@ -6774,7 +6772,7 @@
               </a:defRPr>
             </a:pPr>
             <a:r>
-              <a:t>END-TO-END COLLABORATIVE WORKFLOW</a:t>
+              <a:t>END-TO-END WORKFLOW PIPELINE</a:t>
             </a:r>
           </a:p>
         </p:txBody>
@@ -6788,7 +6786,7 @@
         <p:spPr>
           <a:xfrm>
             <a:off x="7543800" y="1508760"/>
-            <a:ext cx="2240280" cy="438912"/>
+            <a:ext cx="4160520" cy="530352"/>
           </a:xfrm>
           <a:prstGeom prst="roundRect">
             <a:avLst/>
@@ -6796,7 +6794,7 @@
           <a:solidFill>
             <a:srgbClr val="FFFFFF"/>
           </a:solidFill>
-          <a:ln w="12700">
+          <a:ln w="19050">
             <a:solidFill>
               <a:srgbClr val="1F497D"/>
             </a:solidFill>
@@ -6833,7 +6831,7 @@
         <p:spPr>
           <a:xfrm>
             <a:off x="7543800" y="1508760"/>
-            <a:ext cx="2240280" cy="438912"/>
+            <a:ext cx="4160520" cy="530352"/>
           </a:xfrm>
           <a:prstGeom prst="rect">
             <a:avLst/>
@@ -6847,7 +6845,7 @@
           <a:lstStyle/>
           <a:p>
             <a:pPr algn="ctr">
-              <a:defRPr sz="850" b="1">
+              <a:defRPr sz="1100" b="1">
                 <a:solidFill>
                   <a:srgbClr val="1F497D"/>
                 </a:solidFill>
@@ -6855,20 +6853,20 @@
               </a:defRPr>
             </a:pPr>
             <a:r>
-              <a:t>CAMERA SENSING</a:t>
+              <a:t>CAMERA STREAM</a:t>
             </a:r>
           </a:p>
           <a:p>
             <a:pPr algn="ctr">
-              <a:defRPr sz="700">
-                <a:solidFill>
-                  <a:srgbClr val="334155"/>
-                </a:solidFill>
-                <a:latin typeface="Arial"/>
-              </a:defRPr>
-            </a:pPr>
-            <a:r>
-              <a:t>Android CameraX / IR Stream</a:t>
+              <a:defRPr sz="950">
+                <a:solidFill>
+                  <a:srgbClr val="0F172A"/>
+                </a:solidFill>
+                <a:latin typeface="Arial"/>
+              </a:defRPr>
+            </a:pPr>
+            <a:r>
+              <a:t>Android CameraX / IR Feed</a:t>
             </a:r>
           </a:p>
         </p:txBody>
@@ -6881,7 +6879,7 @@
         </p:nvSpPr>
         <p:spPr>
           <a:xfrm>
-            <a:off x="8595360" y="1947672"/>
+            <a:off x="9555480" y="2039112"/>
             <a:ext cx="137160" cy="91440"/>
           </a:xfrm>
           <a:prstGeom prst="downArrow">
@@ -6924,8 +6922,8 @@
         </p:nvSpPr>
         <p:spPr>
           <a:xfrm>
-            <a:off x="7543800" y="2057400"/>
-            <a:ext cx="2240280" cy="438912"/>
+            <a:off x="7543800" y="2148840"/>
+            <a:ext cx="4160520" cy="530352"/>
           </a:xfrm>
           <a:prstGeom prst="roundRect">
             <a:avLst/>
@@ -6933,7 +6931,7 @@
           <a:solidFill>
             <a:srgbClr val="FFFFFF"/>
           </a:solidFill>
-          <a:ln w="12700">
+          <a:ln w="19050">
             <a:solidFill>
               <a:srgbClr val="1F497D"/>
             </a:solidFill>
@@ -6969,8 +6967,8 @@
         </p:nvSpPr>
         <p:spPr>
           <a:xfrm>
-            <a:off x="7543800" y="2057400"/>
-            <a:ext cx="2240280" cy="438912"/>
+            <a:off x="7543800" y="2148840"/>
+            <a:ext cx="4160520" cy="530352"/>
           </a:xfrm>
           <a:prstGeom prst="rect">
             <a:avLst/>
@@ -6984,7 +6982,7 @@
           <a:lstStyle/>
           <a:p>
             <a:pPr algn="ctr">
-              <a:defRPr sz="850" b="1">
+              <a:defRPr sz="1100" b="1">
                 <a:solidFill>
                   <a:srgbClr val="1F497D"/>
                 </a:solidFill>
@@ -6992,20 +6990,20 @@
               </a:defRPr>
             </a:pPr>
             <a:r>
-              <a:t>ON-DEVICE AI DETECTION</a:t>
+              <a:t>ON-DEVICE AI INFERENCE</a:t>
             </a:r>
           </a:p>
           <a:p>
             <a:pPr algn="ctr">
-              <a:defRPr sz="700">
-                <a:solidFill>
-                  <a:srgbClr val="334155"/>
-                </a:solidFill>
-                <a:latin typeface="Arial"/>
-              </a:defRPr>
-            </a:pPr>
-            <a:r>
-              <a:t>EfficientDet-Lite0 TFLite</a:t>
+              <a:defRPr sz="950">
+                <a:solidFill>
+                  <a:srgbClr val="0F172A"/>
+                </a:solidFill>
+                <a:latin typeface="Arial"/>
+              </a:defRPr>
+            </a:pPr>
+            <a:r>
+              <a:t>EfficientDet-Lite0 TFLite Model</a:t>
             </a:r>
           </a:p>
         </p:txBody>
@@ -7018,7 +7016,7 @@
         </p:nvSpPr>
         <p:spPr>
           <a:xfrm>
-            <a:off x="8595360" y="2496312"/>
+            <a:off x="9555480" y="2679192"/>
             <a:ext cx="137160" cy="91440"/>
           </a:xfrm>
           <a:prstGeom prst="downArrow">
@@ -7061,8 +7059,8 @@
         </p:nvSpPr>
         <p:spPr>
           <a:xfrm>
-            <a:off x="7543800" y="2606040"/>
-            <a:ext cx="2240280" cy="438912"/>
+            <a:off x="7543800" y="2788920"/>
+            <a:ext cx="4160520" cy="530352"/>
           </a:xfrm>
           <a:prstGeom prst="roundRect">
             <a:avLst/>
@@ -7070,7 +7068,7 @@
           <a:solidFill>
             <a:srgbClr val="FFFFFF"/>
           </a:solidFill>
-          <a:ln w="12700">
+          <a:ln w="19050">
             <a:solidFill>
               <a:srgbClr val="1F497D"/>
             </a:solidFill>
@@ -7106,8 +7104,8 @@
         </p:nvSpPr>
         <p:spPr>
           <a:xfrm>
-            <a:off x="7543800" y="2606040"/>
-            <a:ext cx="2240280" cy="438912"/>
+            <a:off x="7543800" y="2788920"/>
+            <a:ext cx="4160520" cy="530352"/>
           </a:xfrm>
           <a:prstGeom prst="rect">
             <a:avLst/>
@@ -7121,7 +7119,7 @@
           <a:lstStyle/>
           <a:p>
             <a:pPr algn="ctr">
-              <a:defRPr sz="850" b="1">
+              <a:defRPr sz="1100" b="1">
                 <a:solidFill>
                   <a:srgbClr val="1F497D"/>
                 </a:solidFill>
@@ -7134,15 +7132,15 @@
           </a:p>
           <a:p>
             <a:pPr algn="ctr">
-              <a:defRPr sz="700">
-                <a:solidFill>
-                  <a:srgbClr val="334155"/>
-                </a:solidFill>
-                <a:latin typeface="Arial"/>
-              </a:defRPr>
-            </a:pPr>
-            <a:r>
-              <a:t>3-of-5 Multi-Frame Filter</a:t>
+              <a:defRPr sz="950">
+                <a:solidFill>
+                  <a:srgbClr val="0F172A"/>
+                </a:solidFill>
+                <a:latin typeface="Arial"/>
+              </a:defRPr>
+            </a:pPr>
+            <a:r>
+              <a:t>3-of-5 Multi-Frame Queue</a:t>
             </a:r>
           </a:p>
         </p:txBody>
@@ -7155,7 +7153,7 @@
         </p:nvSpPr>
         <p:spPr>
           <a:xfrm>
-            <a:off x="8595360" y="3044952"/>
+            <a:off x="9555480" y="3319272"/>
             <a:ext cx="137160" cy="91440"/>
           </a:xfrm>
           <a:prstGeom prst="downArrow">
@@ -7198,8 +7196,8 @@
         </p:nvSpPr>
         <p:spPr>
           <a:xfrm>
-            <a:off x="7543800" y="3154680"/>
-            <a:ext cx="2240280" cy="438912"/>
+            <a:off x="7543800" y="3429000"/>
+            <a:ext cx="4160520" cy="530352"/>
           </a:xfrm>
           <a:prstGeom prst="roundRect">
             <a:avLst/>
@@ -7207,7 +7205,7 @@
           <a:solidFill>
             <a:srgbClr val="FFFFFF"/>
           </a:solidFill>
-          <a:ln w="12700">
+          <a:ln w="19050">
             <a:solidFill>
               <a:srgbClr val="1F497D"/>
             </a:solidFill>
@@ -7243,8 +7241,8 @@
         </p:nvSpPr>
         <p:spPr>
           <a:xfrm>
-            <a:off x="7543800" y="3154680"/>
-            <a:ext cx="2240280" cy="438912"/>
+            <a:off x="7543800" y="3429000"/>
+            <a:ext cx="4160520" cy="530352"/>
           </a:xfrm>
           <a:prstGeom prst="rect">
             <a:avLst/>
@@ -7258,7 +7256,7 @@
           <a:lstStyle/>
           <a:p>
             <a:pPr algn="ctr">
-              <a:defRPr sz="850" b="1">
+              <a:defRPr sz="1100" b="1">
                 <a:solidFill>
                   <a:srgbClr val="1F497D"/>
                 </a:solidFill>
@@ -7271,15 +7269,15 @@
           </a:p>
           <a:p>
             <a:pPr algn="ctr">
-              <a:defRPr sz="700">
-                <a:solidFill>
-                  <a:srgbClr val="334155"/>
-                </a:solidFill>
-                <a:latin typeface="Arial"/>
-              </a:defRPr>
-            </a:pPr>
-            <a:r>
-              <a:t>Distance, Direction &amp; Time</a:t>
+              <a:defRPr sz="950">
+                <a:solidFill>
+                  <a:srgbClr val="0F172A"/>
+                </a:solidFill>
+                <a:latin typeface="Arial"/>
+              </a:defRPr>
+            </a:pPr>
+            <a:r>
+              <a:t>Distance, Direction &amp; Night Weight</a:t>
             </a:r>
           </a:p>
         </p:txBody>
@@ -7292,7 +7290,7 @@
         </p:nvSpPr>
         <p:spPr>
           <a:xfrm>
-            <a:off x="8595360" y="3593592"/>
+            <a:off x="9555480" y="3959352"/>
             <a:ext cx="137160" cy="91440"/>
           </a:xfrm>
           <a:prstGeom prst="downArrow">
@@ -7335,8 +7333,8 @@
         </p:nvSpPr>
         <p:spPr>
           <a:xfrm>
-            <a:off x="7543800" y="3703320"/>
-            <a:ext cx="2240280" cy="438912"/>
+            <a:off x="7543800" y="4069080"/>
+            <a:ext cx="4160520" cy="530352"/>
           </a:xfrm>
           <a:prstGeom prst="roundRect">
             <a:avLst/>
@@ -7344,7 +7342,7 @@
           <a:solidFill>
             <a:srgbClr val="FFFFFF"/>
           </a:solidFill>
-          <a:ln w="12700">
+          <a:ln w="19050">
             <a:solidFill>
               <a:srgbClr val="1F497D"/>
             </a:solidFill>
@@ -7380,8 +7378,8 @@
         </p:nvSpPr>
         <p:spPr>
           <a:xfrm>
-            <a:off x="7543800" y="3703320"/>
-            <a:ext cx="2240280" cy="438912"/>
+            <a:off x="7543800" y="4069080"/>
+            <a:ext cx="4160520" cy="530352"/>
           </a:xfrm>
           <a:prstGeom prst="rect">
             <a:avLst/>
@@ -7395,7 +7393,7 @@
           <a:lstStyle/>
           <a:p>
             <a:pPr algn="ctr">
-              <a:defRPr sz="850" b="1">
+              <a:defRPr sz="1100" b="1">
                 <a:solidFill>
                   <a:srgbClr val="1F497D"/>
                 </a:solidFill>
@@ -7403,20 +7401,20 @@
               </a:defRPr>
             </a:pPr>
             <a:r>
-              <a:t>PROXIMITY THREAT LEVEL</a:t>
+              <a:t>PROXIMITY ALERT ENGINE</a:t>
             </a:r>
           </a:p>
           <a:p>
             <a:pPr algn="ctr">
-              <a:defRPr sz="700">
-                <a:solidFill>
-                  <a:srgbClr val="334155"/>
-                </a:solidFill>
-                <a:latin typeface="Arial"/>
-              </a:defRPr>
-            </a:pPr>
-            <a:r>
-              <a:t>Critical (0-1km) | High (1-2.5km)</a:t>
+              <a:defRPr sz="950">
+                <a:solidFill>
+                  <a:srgbClr val="0F172A"/>
+                </a:solidFill>
+                <a:latin typeface="Arial"/>
+              </a:defRPr>
+            </a:pPr>
+            <a:r>
+              <a:t>0-1km Siren  |  1-2.5km Warning</a:t>
             </a:r>
           </a:p>
         </p:txBody>
@@ -7429,7 +7427,7 @@
         </p:nvSpPr>
         <p:spPr>
           <a:xfrm>
-            <a:off x="8595360" y="4142232"/>
+            <a:off x="9555480" y="4599432"/>
             <a:ext cx="137160" cy="91440"/>
           </a:xfrm>
           <a:prstGeom prst="downArrow">
@@ -7472,8 +7470,8 @@
         </p:nvSpPr>
         <p:spPr>
           <a:xfrm>
-            <a:off x="7543800" y="4251960"/>
-            <a:ext cx="2240280" cy="438912"/>
+            <a:off x="7543800" y="4709160"/>
+            <a:ext cx="4160520" cy="530352"/>
           </a:xfrm>
           <a:prstGeom prst="roundRect">
             <a:avLst/>
@@ -7481,7 +7479,7 @@
           <a:solidFill>
             <a:srgbClr val="FFFFFF"/>
           </a:solidFill>
-          <a:ln w="12700">
+          <a:ln w="19050">
             <a:solidFill>
               <a:srgbClr val="1F497D"/>
             </a:solidFill>
@@ -7517,8 +7515,8 @@
         </p:nvSpPr>
         <p:spPr>
           <a:xfrm>
-            <a:off x="7543800" y="4251960"/>
-            <a:ext cx="2240280" cy="438912"/>
+            <a:off x="7543800" y="4709160"/>
+            <a:ext cx="4160520" cy="530352"/>
           </a:xfrm>
           <a:prstGeom prst="rect">
             <a:avLst/>
@@ -7532,7 +7530,7 @@
           <a:lstStyle/>
           <a:p>
             <a:pPr algn="ctr">
-              <a:defRPr sz="850" b="1">
+              <a:defRPr sz="1100" b="1">
                 <a:solidFill>
                   <a:srgbClr val="1F497D"/>
                 </a:solidFill>
@@ -7540,20 +7538,20 @@
               </a:defRPr>
             </a:pPr>
             <a:r>
-              <a:t>ALERT &amp; SIREN ENGINE</a:t>
+              <a:t>CITIZEN &amp; FOREST DEPT QRT</a:t>
             </a:r>
           </a:p>
           <a:p>
             <a:pPr algn="ctr">
-              <a:defRPr sz="700">
-                <a:solidFill>
-                  <a:srgbClr val="334155"/>
-                </a:solidFill>
-                <a:latin typeface="Arial"/>
-              </a:defRPr>
-            </a:pPr>
-            <a:r>
-              <a:t>Local Siren + Multi-Channel Push</a:t>
+              <a:defRPr sz="950">
+                <a:solidFill>
+                  <a:srgbClr val="0F172A"/>
+                </a:solidFill>
+                <a:latin typeface="Arial"/>
+              </a:defRPr>
+            </a:pPr>
+            <a:r>
+              <a:t>Rapid Evacuation &amp; Field Response</a:t>
             </a:r>
           </a:p>
         </p:txBody>
@@ -7566,7 +7564,7 @@
         </p:nvSpPr>
         <p:spPr>
           <a:xfrm>
-            <a:off x="8595360" y="4690872"/>
+            <a:off x="9555480" y="5239512"/>
             <a:ext cx="137160" cy="91440"/>
           </a:xfrm>
           <a:prstGeom prst="downArrow">
@@ -7609,8 +7607,8 @@
         </p:nvSpPr>
         <p:spPr>
           <a:xfrm>
-            <a:off x="7543800" y="4800600"/>
-            <a:ext cx="2240280" cy="438912"/>
+            <a:off x="7543800" y="5349240"/>
+            <a:ext cx="4160520" cy="530352"/>
           </a:xfrm>
           <a:prstGeom prst="roundRect">
             <a:avLst/>
@@ -7618,7 +7616,7 @@
           <a:solidFill>
             <a:srgbClr val="FFFFFF"/>
           </a:solidFill>
-          <a:ln w="12700">
+          <a:ln w="19050">
             <a:solidFill>
               <a:srgbClr val="1F497D"/>
             </a:solidFill>
@@ -7654,8 +7652,8 @@
         </p:nvSpPr>
         <p:spPr>
           <a:xfrm>
-            <a:off x="7543800" y="4800600"/>
-            <a:ext cx="2240280" cy="438912"/>
+            <a:off x="7543800" y="5349240"/>
+            <a:ext cx="4160520" cy="530352"/>
           </a:xfrm>
           <a:prstGeom prst="rect">
             <a:avLst/>
@@ -7669,7 +7667,7 @@
           <a:lstStyle/>
           <a:p>
             <a:pPr algn="ctr">
-              <a:defRPr sz="850" b="1">
+              <a:defRPr sz="1100" b="1">
                 <a:solidFill>
                   <a:srgbClr val="1F497D"/>
                 </a:solidFill>
@@ -7677,541 +7675,20 @@
               </a:defRPr>
             </a:pPr>
             <a:r>
-              <a:t>CITIZEN + FOREST DEPT QRT</a:t>
+              <a:t>SIH COLLABORATIVE HUB</a:t>
             </a:r>
           </a:p>
           <a:p>
             <a:pPr algn="ctr">
-              <a:defRPr sz="700">
-                <a:solidFill>
-                  <a:srgbClr val="334155"/>
-                </a:solidFill>
-                <a:latin typeface="Arial"/>
-              </a:defRPr>
-            </a:pPr>
-            <a:r>
-              <a:t>Rapid Evacuation &amp; Field Response</a:t>
-            </a:r>
-          </a:p>
-        </p:txBody>
-      </p:sp>
-      <p:sp>
-        <p:nvSpPr>
-          <p:cNvPr id="15385" name="Rounded Rectangle 15384"/>
-          <p:cNvSpPr/>
-          <p:nvPr/>
-        </p:nvSpPr>
-        <p:spPr>
-          <a:xfrm>
-            <a:off x="9921240" y="2057400"/>
-            <a:ext cx="1783080" cy="777240"/>
-          </a:xfrm>
-          <a:prstGeom prst="roundRect">
-            <a:avLst/>
-          </a:prstGeom>
-          <a:solidFill>
-            <a:srgbClr val="F0FDF4"/>
-          </a:solidFill>
-          <a:ln w="12700">
-            <a:solidFill>
-              <a:srgbClr val="064E3B"/>
-            </a:solidFill>
-          </a:ln>
-        </p:spPr>
-        <p:style>
-          <a:lnRef idx="1">
-            <a:schemeClr val="accent1"/>
-          </a:lnRef>
-          <a:fillRef idx="3">
-            <a:schemeClr val="accent1"/>
-          </a:fillRef>
-          <a:effectRef idx="2">
-            <a:schemeClr val="accent1"/>
-          </a:effectRef>
-          <a:fontRef idx="minor">
-            <a:schemeClr val="lt1"/>
-          </a:fontRef>
-        </p:style>
-        <p:txBody>
-          <a:bodyPr rtlCol="0" anchor="ctr"/>
-          <a:lstStyle/>
-          <a:p>
-            <a:pPr algn="ctr"/>
-          </a:p>
-        </p:txBody>
-      </p:sp>
-      <p:sp>
-        <p:nvSpPr>
-          <p:cNvPr id="15386" name="TextBox 15385"/>
-          <p:cNvSpPr txBox="1"/>
-          <p:nvPr/>
-        </p:nvSpPr>
-        <p:spPr>
-          <a:xfrm>
-            <a:off x="9921240" y="2057400"/>
-            <a:ext cx="1783080" cy="777240"/>
-          </a:xfrm>
-          <a:prstGeom prst="rect">
-            <a:avLst/>
-          </a:prstGeom>
-          <a:noFill/>
-        </p:spPr>
-        <p:txBody>
-          <a:bodyPr wrap="square" lIns="36576" tIns="36576" rIns="36576" bIns="36576">
-            <a:spAutoFit/>
-          </a:bodyPr>
-          <a:lstStyle/>
-          <a:p>
-            <a:pPr algn="ctr">
-              <a:defRPr sz="850" b="1">
-                <a:solidFill>
-                  <a:srgbClr val="064E3B"/>
-                </a:solidFill>
-                <a:latin typeface="Arial"/>
-              </a:defRPr>
-            </a:pPr>
-            <a:r>
-              <a:t>INCIDENT DATA</a:t>
-            </a:r>
-          </a:p>
-          <a:p>
-            <a:pPr algn="ctr">
-              <a:defRPr sz="700">
-                <a:solidFill>
-                  <a:srgbClr val="334155"/>
-                </a:solidFill>
-                <a:latin typeface="Arial"/>
-              </a:defRPr>
-            </a:pPr>
-            <a:r>
-              <a:t>Historical Analysis</a:t>
-            </a:r>
-            <a:br/>
-            <a:r>
-              <a:t>→ High-Risk Zones</a:t>
-            </a:r>
-          </a:p>
-        </p:txBody>
-      </p:sp>
-      <p:sp>
-        <p:nvSpPr>
-          <p:cNvPr id="15387" name="Down Arrow 15386"/>
-          <p:cNvSpPr/>
-          <p:nvPr/>
-        </p:nvSpPr>
-        <p:spPr>
-          <a:xfrm>
-            <a:off x="10744200" y="2852928"/>
-            <a:ext cx="137160" cy="91440"/>
-          </a:xfrm>
-          <a:prstGeom prst="downArrow">
-            <a:avLst/>
-          </a:prstGeom>
-          <a:solidFill>
-            <a:srgbClr val="1F497D"/>
-          </a:solidFill>
-          <a:ln>
-            <a:noFill/>
-          </a:ln>
-        </p:spPr>
-        <p:style>
-          <a:lnRef idx="1">
-            <a:schemeClr val="accent1"/>
-          </a:lnRef>
-          <a:fillRef idx="3">
-            <a:schemeClr val="accent1"/>
-          </a:fillRef>
-          <a:effectRef idx="2">
-            <a:schemeClr val="accent1"/>
-          </a:effectRef>
-          <a:fontRef idx="minor">
-            <a:schemeClr val="lt1"/>
-          </a:fontRef>
-        </p:style>
-        <p:txBody>
-          <a:bodyPr rtlCol="0" anchor="ctr"/>
-          <a:lstStyle/>
-          <a:p>
-            <a:pPr algn="ctr"/>
-          </a:p>
-        </p:txBody>
-      </p:sp>
-      <p:sp>
-        <p:nvSpPr>
-          <p:cNvPr id="15388" name="Rounded Rectangle 15387"/>
-          <p:cNvSpPr/>
-          <p:nvPr/>
-        </p:nvSpPr>
-        <p:spPr>
-          <a:xfrm>
-            <a:off x="9921240" y="2971800"/>
-            <a:ext cx="1783080" cy="777240"/>
-          </a:xfrm>
-          <a:prstGeom prst="roundRect">
-            <a:avLst/>
-          </a:prstGeom>
-          <a:solidFill>
-            <a:srgbClr val="FEF3C7"/>
-          </a:solidFill>
-          <a:ln w="12700">
-            <a:solidFill>
-              <a:srgbClr val="D97706"/>
-            </a:solidFill>
-          </a:ln>
-        </p:spPr>
-        <p:style>
-          <a:lnRef idx="1">
-            <a:schemeClr val="accent1"/>
-          </a:lnRef>
-          <a:fillRef idx="3">
-            <a:schemeClr val="accent1"/>
-          </a:fillRef>
-          <a:effectRef idx="2">
-            <a:schemeClr val="accent1"/>
-          </a:effectRef>
-          <a:fontRef idx="minor">
-            <a:schemeClr val="lt1"/>
-          </a:fontRef>
-        </p:style>
-        <p:txBody>
-          <a:bodyPr rtlCol="0" anchor="ctr"/>
-          <a:lstStyle/>
-          <a:p>
-            <a:pPr algn="ctr"/>
-          </a:p>
-        </p:txBody>
-      </p:sp>
-      <p:sp>
-        <p:nvSpPr>
-          <p:cNvPr id="15389" name="TextBox 15388"/>
-          <p:cNvSpPr txBox="1"/>
-          <p:nvPr/>
-        </p:nvSpPr>
-        <p:spPr>
-          <a:xfrm>
-            <a:off x="9921240" y="2971800"/>
-            <a:ext cx="1783080" cy="777240"/>
-          </a:xfrm>
-          <a:prstGeom prst="rect">
-            <a:avLst/>
-          </a:prstGeom>
-          <a:noFill/>
-        </p:spPr>
-        <p:txBody>
-          <a:bodyPr wrap="square" lIns="36576" tIns="36576" rIns="36576" bIns="36576">
-            <a:spAutoFit/>
-          </a:bodyPr>
-          <a:lstStyle/>
-          <a:p>
-            <a:pPr algn="ctr">
-              <a:defRPr sz="850" b="1">
-                <a:solidFill>
-                  <a:srgbClr val="D97706"/>
-                </a:solidFill>
-                <a:latin typeface="Arial"/>
-              </a:defRPr>
-            </a:pPr>
-            <a:r>
-              <a:t>VERIFIED INCIDENT</a:t>
-            </a:r>
-          </a:p>
-          <a:p>
-            <a:pPr algn="ctr">
-              <a:defRPr sz="700">
-                <a:solidFill>
-                  <a:srgbClr val="334155"/>
-                </a:solidFill>
-                <a:latin typeface="Arial"/>
-              </a:defRPr>
-            </a:pPr>
-            <a:r>
-              <a:t>Corridor Hotspot Tagged</a:t>
-            </a:r>
-            <a:br/>
-            <a:r>
-              <a:t>→ Open Challenge</a:t>
-            </a:r>
-          </a:p>
-        </p:txBody>
-      </p:sp>
-      <p:sp>
-        <p:nvSpPr>
-          <p:cNvPr id="15390" name="Down Arrow 15389"/>
-          <p:cNvSpPr/>
-          <p:nvPr/>
-        </p:nvSpPr>
-        <p:spPr>
-          <a:xfrm>
-            <a:off x="10744200" y="3767328"/>
-            <a:ext cx="137160" cy="91440"/>
-          </a:xfrm>
-          <a:prstGeom prst="downArrow">
-            <a:avLst/>
-          </a:prstGeom>
-          <a:solidFill>
-            <a:srgbClr val="1F497D"/>
-          </a:solidFill>
-          <a:ln>
-            <a:noFill/>
-          </a:ln>
-        </p:spPr>
-        <p:style>
-          <a:lnRef idx="1">
-            <a:schemeClr val="accent1"/>
-          </a:lnRef>
-          <a:fillRef idx="3">
-            <a:schemeClr val="accent1"/>
-          </a:fillRef>
-          <a:effectRef idx="2">
-            <a:schemeClr val="accent1"/>
-          </a:effectRef>
-          <a:fontRef idx="minor">
-            <a:schemeClr val="lt1"/>
-          </a:fontRef>
-        </p:style>
-        <p:txBody>
-          <a:bodyPr rtlCol="0" anchor="ctr"/>
-          <a:lstStyle/>
-          <a:p>
-            <a:pPr algn="ctr"/>
-          </a:p>
-        </p:txBody>
-      </p:sp>
-      <p:sp>
-        <p:nvSpPr>
-          <p:cNvPr id="15391" name="Rounded Rectangle 15390"/>
-          <p:cNvSpPr/>
-          <p:nvPr/>
-        </p:nvSpPr>
-        <p:spPr>
-          <a:xfrm>
-            <a:off x="9921240" y="3886200"/>
-            <a:ext cx="1783080" cy="777240"/>
-          </a:xfrm>
-          <a:prstGeom prst="roundRect">
-            <a:avLst/>
-          </a:prstGeom>
-          <a:solidFill>
-            <a:srgbClr val="EEF2FF"/>
-          </a:solidFill>
-          <a:ln w="12700">
-            <a:solidFill>
-              <a:srgbClr val="1F497D"/>
-            </a:solidFill>
-          </a:ln>
-        </p:spPr>
-        <p:style>
-          <a:lnRef idx="1">
-            <a:schemeClr val="accent1"/>
-          </a:lnRef>
-          <a:fillRef idx="3">
-            <a:schemeClr val="accent1"/>
-          </a:fillRef>
-          <a:effectRef idx="2">
-            <a:schemeClr val="accent1"/>
-          </a:effectRef>
-          <a:fontRef idx="minor">
-            <a:schemeClr val="lt1"/>
-          </a:fontRef>
-        </p:style>
-        <p:txBody>
-          <a:bodyPr rtlCol="0" anchor="ctr"/>
-          <a:lstStyle/>
-          <a:p>
-            <a:pPr algn="ctr"/>
-          </a:p>
-        </p:txBody>
-      </p:sp>
-      <p:sp>
-        <p:nvSpPr>
-          <p:cNvPr id="15392" name="TextBox 15391"/>
-          <p:cNvSpPr txBox="1"/>
-          <p:nvPr/>
-        </p:nvSpPr>
-        <p:spPr>
-          <a:xfrm>
-            <a:off x="9921240" y="3886200"/>
-            <a:ext cx="1783080" cy="777240"/>
-          </a:xfrm>
-          <a:prstGeom prst="rect">
-            <a:avLst/>
-          </a:prstGeom>
-          <a:noFill/>
-        </p:spPr>
-        <p:txBody>
-          <a:bodyPr wrap="square" lIns="36576" tIns="36576" rIns="36576" bIns="36576">
-            <a:spAutoFit/>
-          </a:bodyPr>
-          <a:lstStyle/>
-          <a:p>
-            <a:pPr algn="ctr">
-              <a:defRPr sz="850" b="1">
-                <a:solidFill>
-                  <a:srgbClr val="1F497D"/>
-                </a:solidFill>
-                <a:latin typeface="Arial"/>
-              </a:defRPr>
-            </a:pPr>
-            <a:r>
-              <a:t>UNIVERSITY / INDUSTRY</a:t>
-            </a:r>
-          </a:p>
-          <a:p>
-            <a:pPr algn="ctr">
-              <a:defRPr sz="700">
-                <a:solidFill>
-                  <a:srgbClr val="334155"/>
-                </a:solidFill>
-                <a:latin typeface="Arial"/>
-              </a:defRPr>
-            </a:pPr>
-            <a:r>
-              <a:t>Academic &amp; Startup</a:t>
-            </a:r>
-            <a:br/>
-            <a:r>
-              <a:t>Collaborative Solutions</a:t>
-            </a:r>
-          </a:p>
-        </p:txBody>
-      </p:sp>
-      <p:sp>
-        <p:nvSpPr>
-          <p:cNvPr id="15393" name="Down Arrow 15392"/>
-          <p:cNvSpPr/>
-          <p:nvPr/>
-        </p:nvSpPr>
-        <p:spPr>
-          <a:xfrm>
-            <a:off x="10744200" y="4681728"/>
-            <a:ext cx="137160" cy="91440"/>
-          </a:xfrm>
-          <a:prstGeom prst="downArrow">
-            <a:avLst/>
-          </a:prstGeom>
-          <a:solidFill>
-            <a:srgbClr val="1F497D"/>
-          </a:solidFill>
-          <a:ln>
-            <a:noFill/>
-          </a:ln>
-        </p:spPr>
-        <p:style>
-          <a:lnRef idx="1">
-            <a:schemeClr val="accent1"/>
-          </a:lnRef>
-          <a:fillRef idx="3">
-            <a:schemeClr val="accent1"/>
-          </a:fillRef>
-          <a:effectRef idx="2">
-            <a:schemeClr val="accent1"/>
-          </a:effectRef>
-          <a:fontRef idx="minor">
-            <a:schemeClr val="lt1"/>
-          </a:fontRef>
-        </p:style>
-        <p:txBody>
-          <a:bodyPr rtlCol="0" anchor="ctr"/>
-          <a:lstStyle/>
-          <a:p>
-            <a:pPr algn="ctr"/>
-          </a:p>
-        </p:txBody>
-      </p:sp>
-      <p:sp>
-        <p:nvSpPr>
-          <p:cNvPr id="15394" name="Rounded Rectangle 15393"/>
-          <p:cNvSpPr/>
-          <p:nvPr/>
-        </p:nvSpPr>
-        <p:spPr>
-          <a:xfrm>
-            <a:off x="9921240" y="4800600"/>
-            <a:ext cx="1783080" cy="777240"/>
-          </a:xfrm>
-          <a:prstGeom prst="roundRect">
-            <a:avLst/>
-          </a:prstGeom>
-          <a:solidFill>
-            <a:srgbClr val="F0FDF4"/>
-          </a:solidFill>
-          <a:ln w="12700">
-            <a:solidFill>
-              <a:srgbClr val="064E3B"/>
-            </a:solidFill>
-          </a:ln>
-        </p:spPr>
-        <p:style>
-          <a:lnRef idx="1">
-            <a:schemeClr val="accent1"/>
-          </a:lnRef>
-          <a:fillRef idx="3">
-            <a:schemeClr val="accent1"/>
-          </a:fillRef>
-          <a:effectRef idx="2">
-            <a:schemeClr val="accent1"/>
-          </a:effectRef>
-          <a:fontRef idx="minor">
-            <a:schemeClr val="lt1"/>
-          </a:fontRef>
-        </p:style>
-        <p:txBody>
-          <a:bodyPr rtlCol="0" anchor="ctr"/>
-          <a:lstStyle/>
-          <a:p>
-            <a:pPr algn="ctr"/>
-          </a:p>
-        </p:txBody>
-      </p:sp>
-      <p:sp>
-        <p:nvSpPr>
-          <p:cNvPr id="15395" name="TextBox 15394"/>
-          <p:cNvSpPr txBox="1"/>
-          <p:nvPr/>
-        </p:nvSpPr>
-        <p:spPr>
-          <a:xfrm>
-            <a:off x="9921240" y="4800600"/>
-            <a:ext cx="1783080" cy="777240"/>
-          </a:xfrm>
-          <a:prstGeom prst="rect">
-            <a:avLst/>
-          </a:prstGeom>
-          <a:noFill/>
-        </p:spPr>
-        <p:txBody>
-          <a:bodyPr wrap="square" lIns="36576" tIns="36576" rIns="36576" bIns="36576">
-            <a:spAutoFit/>
-          </a:bodyPr>
-          <a:lstStyle/>
-          <a:p>
-            <a:pPr algn="ctr">
-              <a:defRPr sz="850" b="1">
-                <a:solidFill>
-                  <a:srgbClr val="064E3B"/>
-                </a:solidFill>
-                <a:latin typeface="Arial"/>
-              </a:defRPr>
-            </a:pPr>
-            <a:r>
-              <a:t>PROPOSED SOLUTION</a:t>
-            </a:r>
-          </a:p>
-          <a:p>
-            <a:pPr algn="ctr">
-              <a:defRPr sz="700">
-                <a:solidFill>
-                  <a:srgbClr val="334155"/>
-                </a:solidFill>
-                <a:latin typeface="Arial"/>
-              </a:defRPr>
-            </a:pPr>
-            <a:r>
-              <a:t>Field Testing &amp; Pilot</a:t>
-            </a:r>
-            <a:br/>
-            <a:r>
-              <a:t>Corridor Deployment</a:t>
+              <a:defRPr sz="950">
+                <a:solidFill>
+                  <a:srgbClr val="0F172A"/>
+                </a:solidFill>
+                <a:latin typeface="Arial"/>
+              </a:defRPr>
+            </a:pPr>
+            <a:r>
+              <a:t>Universities + Industry Solutions</a:t>
             </a:r>
           </a:p>
         </p:txBody>
@@ -8435,7 +7912,7 @@
         <p:spPr>
           <a:xfrm>
             <a:off x="365760" y="1051560"/>
-            <a:ext cx="6217920" cy="5120640"/>
+            <a:ext cx="6492240" cy="5303520"/>
           </a:xfrm>
           <a:prstGeom prst="rect">
             <a:avLst/>
@@ -8450,9 +7927,9 @@
           <a:p>
             <a:pPr>
               <a:spcAft>
-                <a:spcPts val="600"/>
+                <a:spcPts val="800"/>
               </a:spcAft>
-              <a:defRPr sz="2200" b="1">
+              <a:defRPr sz="2400" b="1">
                 <a:solidFill>
                   <a:srgbClr val="1F497D"/>
                 </a:solidFill>
@@ -8466,9 +7943,9 @@
           <a:p>
             <a:pPr>
               <a:spcBef>
-                <a:spcPts val="300"/>
+                <a:spcPts val="600"/>
               </a:spcBef>
-              <a:defRPr sz="1050" b="1">
+              <a:defRPr sz="1750" b="1">
                 <a:solidFill>
                   <a:srgbClr val="1F497D"/>
                 </a:solidFill>
@@ -8476,36 +7953,24 @@
               </a:defRPr>
             </a:pPr>
             <a:r>
-              <a:t>Frontend / Mobile:</a:t>
-            </a:r>
-          </a:p>
-          <a:p>
-            <a:pPr>
-              <a:defRPr sz="900">
-                <a:solidFill>
-                  <a:srgbClr val="010000"/>
-                </a:solidFill>
-                <a:latin typeface="Arial"/>
-              </a:defRPr>
-            </a:pPr>
-            <a:r>
-              <a:t>• Android Native (Kotlin 2.0 + Jetpack Compose)</a:t>
-            </a:r>
-            <a:br/>
-            <a:r>
-              <a:t>• CameraX API for real-time video stream capture</a:t>
-            </a:r>
-            <a:br/>
-            <a:r>
-              <a:t>• OpenStreetMap (osmdroid) for local offline GIS mapping</a:t>
+              <a:t>•  Frontend / Mobile: </a:t>
+            </a:r>
+            <a:r>
+              <a:rPr sz="1650" b="0">
+                <a:solidFill>
+                  <a:srgbClr val="0F172A"/>
+                </a:solidFill>
+                <a:latin typeface="Arial"/>
+              </a:rPr>
+              <a:t>Android Native (Kotlin, Jetpack Compose, CameraX, osmdroid).</a:t>
             </a:r>
           </a:p>
           <a:p>
             <a:pPr>
               <a:spcBef>
-                <a:spcPts val="300"/>
+                <a:spcPts val="600"/>
               </a:spcBef>
-              <a:defRPr sz="1050" b="1">
+              <a:defRPr sz="1750" b="1">
                 <a:solidFill>
                   <a:srgbClr val="1F497D"/>
                 </a:solidFill>
@@ -8513,36 +7978,24 @@
               </a:defRPr>
             </a:pPr>
             <a:r>
-              <a:t>AI / ML Pipeline:</a:t>
-            </a:r>
-          </a:p>
-          <a:p>
-            <a:pPr>
-              <a:defRPr sz="900">
-                <a:solidFill>
-                  <a:srgbClr val="010000"/>
-                </a:solidFill>
-                <a:latin typeface="Arial"/>
-              </a:defRPr>
-            </a:pPr>
-            <a:r>
-              <a:t>• TensorFlow Lite on-device inference engine</a:t>
-            </a:r>
-            <a:br/>
-            <a:r>
-              <a:t>• Quantized EfficientDet-Lite0 object detection model</a:t>
-            </a:r>
-            <a:br/>
-            <a:r>
-              <a:t>• Multi-frame temporal validation queue &amp; confidence filter</a:t>
+              <a:t>•  AI / ML Pipeline: </a:t>
+            </a:r>
+            <a:r>
+              <a:rPr sz="1650" b="0">
+                <a:solidFill>
+                  <a:srgbClr val="0F172A"/>
+                </a:solidFill>
+                <a:latin typeface="Arial"/>
+              </a:rPr>
+              <a:t>TensorFlow Lite, EfficientDet-Lite0 on-device, Temporal Validation.</a:t>
             </a:r>
           </a:p>
           <a:p>
             <a:pPr>
               <a:spcBef>
-                <a:spcPts val="300"/>
+                <a:spcPts val="600"/>
               </a:spcBef>
-              <a:defRPr sz="1050" b="1">
+              <a:defRPr sz="1750" b="1">
                 <a:solidFill>
                   <a:srgbClr val="1F497D"/>
                 </a:solidFill>
@@ -8550,36 +8003,24 @@
               </a:defRPr>
             </a:pPr>
             <a:r>
-              <a:t>Backend Architecture:</a:t>
-            </a:r>
-          </a:p>
-          <a:p>
-            <a:pPr>
-              <a:defRPr sz="900">
-                <a:solidFill>
-                  <a:srgbClr val="010000"/>
-                </a:solidFill>
-                <a:latin typeface="Arial"/>
-              </a:defRPr>
-            </a:pPr>
-            <a:r>
-              <a:t>• FastAPI (Python 3.11) high-throughput asynchronous server</a:t>
-            </a:r>
-            <a:br/>
-            <a:r>
-              <a:t>• RESTful API endpoints for telemetry and incident intake</a:t>
-            </a:r>
-            <a:br/>
-            <a:r>
-              <a:t>• WebSocket &amp; SSE event bus for real-time alert streaming</a:t>
+              <a:t>•  Backend Engine: </a:t>
+            </a:r>
+            <a:r>
+              <a:rPr sz="1650" b="0">
+                <a:solidFill>
+                  <a:srgbClr val="0F172A"/>
+                </a:solidFill>
+                <a:latin typeface="Arial"/>
+              </a:rPr>
+              <a:t>FastAPI (Python 3.11), REST APIs, Asynchronous WebSockets.</a:t>
             </a:r>
           </a:p>
           <a:p>
             <a:pPr>
               <a:spcBef>
-                <a:spcPts val="300"/>
+                <a:spcPts val="600"/>
               </a:spcBef>
-              <a:defRPr sz="1050" b="1">
+              <a:defRPr sz="1750" b="1">
                 <a:solidFill>
                   <a:srgbClr val="1F497D"/>
                 </a:solidFill>
@@ -8587,36 +8028,24 @@
               </a:defRPr>
             </a:pPr>
             <a:r>
-              <a:t>API &amp; Synchronization:</a:t>
-            </a:r>
-          </a:p>
-          <a:p>
-            <a:pPr>
-              <a:defRPr sz="900">
-                <a:solidFill>
-                  <a:srgbClr val="010000"/>
-                </a:solidFill>
-                <a:latin typeface="Arial"/>
-              </a:defRPr>
-            </a:pPr>
-            <a:r>
-              <a:t>• Telemetry reporting &amp; incident/alert synchronization</a:t>
-            </a:r>
-            <a:br/>
-            <a:r>
-              <a:t>• Bi-directional sync (Android ↔ Backend ↔ Admin Dashboard)</a:t>
-            </a:r>
-            <a:br/>
-            <a:r>
-              <a:t>• Offline queue with automated background sync via WorkManager</a:t>
+              <a:t>•  API / Sync Bus: </a:t>
+            </a:r>
+            <a:r>
+              <a:rPr sz="1650" b="0">
+                <a:solidFill>
+                  <a:srgbClr val="0F172A"/>
+                </a:solidFill>
+                <a:latin typeface="Arial"/>
+              </a:rPr>
+              <a:t>Telemetry intake, Incident sync, Offline queue via WorkManager.</a:t>
             </a:r>
           </a:p>
           <a:p>
             <a:pPr>
               <a:spcBef>
-                <a:spcPts val="300"/>
+                <a:spcPts val="600"/>
               </a:spcBef>
-              <a:defRPr sz="1050" b="1">
+              <a:defRPr sz="1750" b="1">
                 <a:solidFill>
                   <a:srgbClr val="1F497D"/>
                 </a:solidFill>
@@ -8624,28 +8053,16 @@
               </a:defRPr>
             </a:pPr>
             <a:r>
-              <a:t>Database &amp; Governance:</a:t>
-            </a:r>
-          </a:p>
-          <a:p>
-            <a:pPr>
-              <a:defRPr sz="900">
-                <a:solidFill>
-                  <a:srgbClr val="010000"/>
-                </a:solidFill>
-                <a:latin typeface="Arial"/>
-              </a:defRPr>
-            </a:pPr>
-            <a:r>
-              <a:t>• SQLite / Relational database for prototype backend</a:t>
-            </a:r>
-            <a:br/>
-            <a:r>
-              <a:t>• Tables: Users, Incidents, Alerts, Challenges, Solutions, Audit Logs</a:t>
-            </a:r>
-            <a:br/>
-            <a:r>
-              <a:t>• Parameterized queries and role-based access control (RBAC)</a:t>
+              <a:t>•  Database: </a:t>
+            </a:r>
+            <a:r>
+              <a:rPr sz="1650" b="0">
+                <a:solidFill>
+                  <a:srgbClr val="0F172A"/>
+                </a:solidFill>
+                <a:latin typeface="Arial"/>
+              </a:rPr>
+              <a:t>SQLite relational schema: Users, Incidents, Alerts, Challenges, Logs.</a:t>
             </a:r>
           </a:p>
         </p:txBody>
@@ -8658,8 +8075,8 @@
         </p:nvSpPr>
         <p:spPr>
           <a:xfrm>
-            <a:off x="6766560" y="1143000"/>
-            <a:ext cx="5029200" cy="5029200"/>
+            <a:off x="7040880" y="1097280"/>
+            <a:ext cx="4754880" cy="5120640"/>
           </a:xfrm>
           <a:prstGeom prst="roundRect">
             <a:avLst/>
@@ -8667,7 +8084,7 @@
           <a:solidFill>
             <a:srgbClr val="F8FAFC"/>
           </a:solidFill>
-          <a:ln w="12700">
+          <a:ln w="19050">
             <a:solidFill>
               <a:srgbClr val="1F497D"/>
             </a:solidFill>
@@ -8703,8 +8120,8 @@
         </p:nvSpPr>
         <p:spPr>
           <a:xfrm>
-            <a:off x="6812280" y="1188720"/>
-            <a:ext cx="4937760" cy="274320"/>
+            <a:off x="7086600" y="1143000"/>
+            <a:ext cx="4663440" cy="320040"/>
           </a:xfrm>
           <a:prstGeom prst="rect">
             <a:avLst/>
@@ -8718,7 +8135,7 @@
           <a:lstStyle/>
           <a:p>
             <a:pPr algn="ctr">
-              <a:defRPr sz="1000" b="1">
+              <a:defRPr sz="1300" b="1">
                 <a:solidFill>
                   <a:srgbClr val="1F497D"/>
                 </a:solidFill>
@@ -8726,7 +8143,7 @@
               </a:defRPr>
             </a:pPr>
             <a:r>
-              <a:t>TECHNICAL ARCHITECTURE</a:t>
+              <a:t>SYSTEM ARCHITECTURE</a:t>
             </a:r>
           </a:p>
         </p:txBody>
@@ -8739,8 +8156,8 @@
         </p:nvSpPr>
         <p:spPr>
           <a:xfrm>
-            <a:off x="7680960" y="1508760"/>
-            <a:ext cx="3200400" cy="594360"/>
+            <a:off x="7178040" y="1508760"/>
+            <a:ext cx="4480560" cy="594360"/>
           </a:xfrm>
           <a:prstGeom prst="roundRect">
             <a:avLst/>
@@ -8748,7 +8165,7 @@
           <a:solidFill>
             <a:srgbClr val="FFFFFF"/>
           </a:solidFill>
-          <a:ln w="12700">
+          <a:ln w="19050">
             <a:solidFill>
               <a:srgbClr val="1F497D"/>
             </a:solidFill>
@@ -8784,8 +8201,8 @@
         </p:nvSpPr>
         <p:spPr>
           <a:xfrm>
-            <a:off x="7680960" y="1508760"/>
-            <a:ext cx="3200400" cy="594360"/>
+            <a:off x="7178040" y="1508760"/>
+            <a:ext cx="4480560" cy="594360"/>
           </a:xfrm>
           <a:prstGeom prst="rect">
             <a:avLst/>
@@ -8799,7 +8216,7 @@
           <a:lstStyle/>
           <a:p>
             <a:pPr algn="ctr">
-              <a:defRPr sz="850" b="1">
+              <a:defRPr sz="1150" b="1">
                 <a:solidFill>
                   <a:srgbClr val="1F497D"/>
                 </a:solidFill>
@@ -8812,15 +8229,15 @@
           </a:p>
           <a:p>
             <a:pPr algn="ctr">
-              <a:defRPr sz="700">
-                <a:solidFill>
-                  <a:srgbClr val="334155"/>
-                </a:solidFill>
-                <a:latin typeface="Arial"/>
-              </a:defRPr>
-            </a:pPr>
-            <a:r>
-              <a:t>Kotlin + Compose  |  CameraX + GPS Location</a:t>
+              <a:defRPr sz="950">
+                <a:solidFill>
+                  <a:srgbClr val="0F172A"/>
+                </a:solidFill>
+                <a:latin typeface="Arial"/>
+              </a:defRPr>
+            </a:pPr>
+            <a:r>
+              <a:t>Kotlin + Jetpack Compose  |  CameraX + GPS</a:t>
             </a:r>
           </a:p>
         </p:txBody>
@@ -8833,7 +8250,7 @@
         </p:nvSpPr>
         <p:spPr>
           <a:xfrm>
-            <a:off x="9189720" y="2121408"/>
+            <a:off x="9372600" y="2103120"/>
             <a:ext cx="137160" cy="91440"/>
           </a:xfrm>
           <a:prstGeom prst="downArrow">
@@ -8876,18 +8293,18 @@
         </p:nvSpPr>
         <p:spPr>
           <a:xfrm>
-            <a:off x="7680960" y="2240280"/>
-            <a:ext cx="3200400" cy="594360"/>
+            <a:off x="7178040" y="2240280"/>
+            <a:ext cx="4480560" cy="594360"/>
           </a:xfrm>
           <a:prstGeom prst="roundRect">
             <a:avLst/>
           </a:prstGeom>
           <a:solidFill>
-            <a:srgbClr val="F0FDF4"/>
+            <a:srgbClr val="FFFFFF"/>
           </a:solidFill>
-          <a:ln w="12700">
+          <a:ln w="19050">
             <a:solidFill>
-              <a:srgbClr val="064E3B"/>
+              <a:srgbClr val="1F497D"/>
             </a:solidFill>
           </a:ln>
         </p:spPr>
@@ -8921,8 +8338,8 @@
         </p:nvSpPr>
         <p:spPr>
           <a:xfrm>
-            <a:off x="7680960" y="2240280"/>
-            <a:ext cx="3200400" cy="594360"/>
+            <a:off x="7178040" y="2240280"/>
+            <a:ext cx="4480560" cy="594360"/>
           </a:xfrm>
           <a:prstGeom prst="rect">
             <a:avLst/>
@@ -8936,9 +8353,9 @@
           <a:lstStyle/>
           <a:p>
             <a:pPr algn="ctr">
-              <a:defRPr sz="850" b="1">
-                <a:solidFill>
-                  <a:srgbClr val="064E3B"/>
+              <a:defRPr sz="1150" b="1">
+                <a:solidFill>
+                  <a:srgbClr val="1F497D"/>
                 </a:solidFill>
                 <a:latin typeface="Arial"/>
               </a:defRPr>
@@ -8949,15 +8366,15 @@
           </a:p>
           <a:p>
             <a:pPr algn="ctr">
-              <a:defRPr sz="700">
-                <a:solidFill>
-                  <a:srgbClr val="334155"/>
-                </a:solidFill>
-                <a:latin typeface="Arial"/>
-              </a:defRPr>
-            </a:pPr>
-            <a:r>
-              <a:t>EfficientDet-Lite0 TFLite  |  Elephant Detection</a:t>
+              <a:defRPr sz="950">
+                <a:solidFill>
+                  <a:srgbClr val="0F172A"/>
+                </a:solidFill>
+                <a:latin typeface="Arial"/>
+              </a:defRPr>
+            </a:pPr>
+            <a:r>
+              <a:t>EfficientDet-Lite0 TFLite Model</a:t>
             </a:r>
           </a:p>
         </p:txBody>
@@ -8970,7 +8387,7 @@
         </p:nvSpPr>
         <p:spPr>
           <a:xfrm>
-            <a:off x="9189720" y="2852928"/>
+            <a:off x="9372600" y="2834640"/>
             <a:ext cx="137160" cy="91440"/>
           </a:xfrm>
           <a:prstGeom prst="downArrow">
@@ -9013,18 +8430,18 @@
         </p:nvSpPr>
         <p:spPr>
           <a:xfrm>
-            <a:off x="7680960" y="2971800"/>
-            <a:ext cx="3200400" cy="594360"/>
+            <a:off x="7178040" y="2971800"/>
+            <a:ext cx="4480560" cy="594360"/>
           </a:xfrm>
           <a:prstGeom prst="roundRect">
             <a:avLst/>
           </a:prstGeom>
           <a:solidFill>
-            <a:srgbClr val="FEF3C7"/>
+            <a:srgbClr val="FFFFFF"/>
           </a:solidFill>
-          <a:ln w="12700">
+          <a:ln w="19050">
             <a:solidFill>
-              <a:srgbClr val="D97706"/>
+              <a:srgbClr val="1F497D"/>
             </a:solidFill>
           </a:ln>
         </p:spPr>
@@ -9058,8 +8475,8 @@
         </p:nvSpPr>
         <p:spPr>
           <a:xfrm>
-            <a:off x="7680960" y="2971800"/>
-            <a:ext cx="3200400" cy="594360"/>
+            <a:off x="7178040" y="2971800"/>
+            <a:ext cx="4480560" cy="594360"/>
           </a:xfrm>
           <a:prstGeom prst="rect">
             <a:avLst/>
@@ -9073,28 +8490,28 @@
           <a:lstStyle/>
           <a:p>
             <a:pPr algn="ctr">
-              <a:defRPr sz="850" b="1">
-                <a:solidFill>
-                  <a:srgbClr val="D97706"/>
-                </a:solidFill>
-                <a:latin typeface="Arial"/>
-              </a:defRPr>
-            </a:pPr>
-            <a:r>
-              <a:t>VALIDATION + DMRS RISK ENGINE</a:t>
+              <a:defRPr sz="1150" b="1">
+                <a:solidFill>
+                  <a:srgbClr val="1F497D"/>
+                </a:solidFill>
+                <a:latin typeface="Arial"/>
+              </a:defRPr>
+            </a:pPr>
+            <a:r>
+              <a:t>VALIDATION &amp; DMRS RISK</a:t>
             </a:r>
           </a:p>
           <a:p>
             <a:pPr algn="ctr">
-              <a:defRPr sz="700">
-                <a:solidFill>
-                  <a:srgbClr val="334155"/>
-                </a:solidFill>
-                <a:latin typeface="Arial"/>
-              </a:defRPr>
-            </a:pPr>
-            <a:r>
-              <a:t>Confidence + Distance  |  Movement + Historical Risk</a:t>
+              <a:defRPr sz="950">
+                <a:solidFill>
+                  <a:srgbClr val="0F172A"/>
+                </a:solidFill>
+                <a:latin typeface="Arial"/>
+              </a:defRPr>
+            </a:pPr>
+            <a:r>
+              <a:t>Confidence + Distance + Historical Risk</a:t>
             </a:r>
           </a:p>
         </p:txBody>
@@ -9107,7 +8524,7 @@
         </p:nvSpPr>
         <p:spPr>
           <a:xfrm>
-            <a:off x="9189720" y="3584448"/>
+            <a:off x="9372600" y="3566160"/>
             <a:ext cx="137160" cy="91440"/>
           </a:xfrm>
           <a:prstGeom prst="downArrow">
@@ -9150,8 +8567,8 @@
         </p:nvSpPr>
         <p:spPr>
           <a:xfrm>
-            <a:off x="6949440" y="3703320"/>
-            <a:ext cx="2194560" cy="502920"/>
+            <a:off x="7178040" y="3703320"/>
+            <a:ext cx="4480560" cy="594360"/>
           </a:xfrm>
           <a:prstGeom prst="roundRect">
             <a:avLst/>
@@ -9159,9 +8576,9 @@
           <a:solidFill>
             <a:srgbClr val="FFFFFF"/>
           </a:solidFill>
-          <a:ln w="12700">
+          <a:ln w="19050">
             <a:solidFill>
-              <a:srgbClr val="C00000"/>
+              <a:srgbClr val="1F497D"/>
             </a:solidFill>
           </a:ln>
         </p:spPr>
@@ -9195,8 +8612,8 @@
         </p:nvSpPr>
         <p:spPr>
           <a:xfrm>
-            <a:off x="6949440" y="3703320"/>
-            <a:ext cx="2194560" cy="502920"/>
+            <a:off x="7178040" y="3703320"/>
+            <a:ext cx="4480560" cy="594360"/>
           </a:xfrm>
           <a:prstGeom prst="rect">
             <a:avLst/>
@@ -9210,135 +8627,41 @@
           <a:lstStyle/>
           <a:p>
             <a:pPr algn="ctr">
-              <a:defRPr sz="850" b="1">
-                <a:solidFill>
-                  <a:srgbClr val="C00000"/>
-                </a:solidFill>
-                <a:latin typeface="Arial"/>
-              </a:defRPr>
-            </a:pPr>
-            <a:r>
-              <a:t>ALERT ENGINE</a:t>
+              <a:defRPr sz="1150" b="1">
+                <a:solidFill>
+                  <a:srgbClr val="1F497D"/>
+                </a:solidFill>
+                <a:latin typeface="Arial"/>
+              </a:defRPr>
+            </a:pPr>
+            <a:r>
+              <a:t>FASTAPI BACKEND &amp; DB</a:t>
             </a:r>
           </a:p>
           <a:p>
             <a:pPr algn="ctr">
-              <a:defRPr sz="700">
-                <a:solidFill>
-                  <a:srgbClr val="334155"/>
-                </a:solidFill>
-                <a:latin typeface="Arial"/>
-              </a:defRPr>
-            </a:pPr>
-            <a:r>
-              <a:t>Audible Siren / Notifications</a:t>
-            </a:r>
-          </a:p>
-        </p:txBody>
-      </p:sp>
-      <p:sp>
-        <p:nvSpPr>
-          <p:cNvPr id="17423" name="Rounded Rectangle 17422"/>
+              <a:defRPr sz="950">
+                <a:solidFill>
+                  <a:srgbClr val="0F172A"/>
+                </a:solidFill>
+                <a:latin typeface="Arial"/>
+              </a:defRPr>
+            </a:pPr>
+            <a:r>
+              <a:t>REST APIs  |  SQLite Relational Database</a:t>
+            </a:r>
+          </a:p>
+        </p:txBody>
+      </p:sp>
+      <p:sp>
+        <p:nvSpPr>
+          <p:cNvPr id="17423" name="Down Arrow 17422"/>
           <p:cNvSpPr/>
           <p:nvPr/>
         </p:nvSpPr>
         <p:spPr>
           <a:xfrm>
-            <a:off x="9418320" y="3703320"/>
-            <a:ext cx="2194560" cy="502920"/>
-          </a:xfrm>
-          <a:prstGeom prst="roundRect">
-            <a:avLst/>
-          </a:prstGeom>
-          <a:solidFill>
-            <a:srgbClr val="FFFFFF"/>
-          </a:solidFill>
-          <a:ln w="12700">
-            <a:solidFill>
-              <a:srgbClr val="1F497D"/>
-            </a:solidFill>
-          </a:ln>
-        </p:spPr>
-        <p:style>
-          <a:lnRef idx="1">
-            <a:schemeClr val="accent1"/>
-          </a:lnRef>
-          <a:fillRef idx="3">
-            <a:schemeClr val="accent1"/>
-          </a:fillRef>
-          <a:effectRef idx="2">
-            <a:schemeClr val="accent1"/>
-          </a:effectRef>
-          <a:fontRef idx="minor">
-            <a:schemeClr val="lt1"/>
-          </a:fontRef>
-        </p:style>
-        <p:txBody>
-          <a:bodyPr rtlCol="0" anchor="ctr"/>
-          <a:lstStyle/>
-          <a:p>
-            <a:pPr algn="ctr"/>
-          </a:p>
-        </p:txBody>
-      </p:sp>
-      <p:sp>
-        <p:nvSpPr>
-          <p:cNvPr id="17424" name="TextBox 17423"/>
-          <p:cNvSpPr txBox="1"/>
-          <p:nvPr/>
-        </p:nvSpPr>
-        <p:spPr>
-          <a:xfrm>
-            <a:off x="9418320" y="3703320"/>
-            <a:ext cx="2194560" cy="502920"/>
-          </a:xfrm>
-          <a:prstGeom prst="rect">
-            <a:avLst/>
-          </a:prstGeom>
-          <a:noFill/>
-        </p:spPr>
-        <p:txBody>
-          <a:bodyPr wrap="square" lIns="36576" tIns="36576" rIns="36576" bIns="36576">
-            <a:spAutoFit/>
-          </a:bodyPr>
-          <a:lstStyle/>
-          <a:p>
-            <a:pPr algn="ctr">
-              <a:defRPr sz="850" b="1">
-                <a:solidFill>
-                  <a:srgbClr val="1F497D"/>
-                </a:solidFill>
-                <a:latin typeface="Arial"/>
-              </a:defRPr>
-            </a:pPr>
-            <a:r>
-              <a:t>REAL-TIME MAP</a:t>
-            </a:r>
-          </a:p>
-          <a:p>
-            <a:pPr algn="ctr">
-              <a:defRPr sz="700">
-                <a:solidFill>
-                  <a:srgbClr val="334155"/>
-                </a:solidFill>
-                <a:latin typeface="Arial"/>
-              </a:defRPr>
-            </a:pPr>
-            <a:r>
-              <a:t>GPS Markers + Hazard Zones</a:t>
-            </a:r>
-          </a:p>
-        </p:txBody>
-      </p:sp>
-      <p:sp>
-        <p:nvSpPr>
-          <p:cNvPr id="17425" name="Down Arrow 17424"/>
-          <p:cNvSpPr/>
-          <p:nvPr/>
-        </p:nvSpPr>
-        <p:spPr>
-          <a:xfrm>
-            <a:off x="8001000" y="4224528"/>
+            <a:off x="9372600" y="4297680"/>
             <a:ext cx="137160" cy="91440"/>
           </a:xfrm>
           <a:prstGeom prst="downArrow">
@@ -9375,13 +8698,107 @@
       </p:sp>
       <p:sp>
         <p:nvSpPr>
+          <p:cNvPr id="17424" name="Rounded Rectangle 17423"/>
+          <p:cNvSpPr/>
+          <p:nvPr/>
+        </p:nvSpPr>
+        <p:spPr>
+          <a:xfrm>
+            <a:off x="7178040" y="4434840"/>
+            <a:ext cx="4480560" cy="594360"/>
+          </a:xfrm>
+          <a:prstGeom prst="roundRect">
+            <a:avLst/>
+          </a:prstGeom>
+          <a:solidFill>
+            <a:srgbClr val="FFFFFF"/>
+          </a:solidFill>
+          <a:ln w="19050">
+            <a:solidFill>
+              <a:srgbClr val="1F497D"/>
+            </a:solidFill>
+          </a:ln>
+        </p:spPr>
+        <p:style>
+          <a:lnRef idx="1">
+            <a:schemeClr val="accent1"/>
+          </a:lnRef>
+          <a:fillRef idx="3">
+            <a:schemeClr val="accent1"/>
+          </a:fillRef>
+          <a:effectRef idx="2">
+            <a:schemeClr val="accent1"/>
+          </a:effectRef>
+          <a:fontRef idx="minor">
+            <a:schemeClr val="lt1"/>
+          </a:fontRef>
+        </p:style>
+        <p:txBody>
+          <a:bodyPr rtlCol="0" anchor="ctr"/>
+          <a:lstStyle/>
+          <a:p>
+            <a:pPr algn="ctr"/>
+          </a:p>
+        </p:txBody>
+      </p:sp>
+      <p:sp>
+        <p:nvSpPr>
+          <p:cNvPr id="17425" name="TextBox 17424"/>
+          <p:cNvSpPr txBox="1"/>
+          <p:nvPr/>
+        </p:nvSpPr>
+        <p:spPr>
+          <a:xfrm>
+            <a:off x="7178040" y="4434840"/>
+            <a:ext cx="4480560" cy="594360"/>
+          </a:xfrm>
+          <a:prstGeom prst="rect">
+            <a:avLst/>
+          </a:prstGeom>
+          <a:noFill/>
+        </p:spPr>
+        <p:txBody>
+          <a:bodyPr wrap="square" lIns="36576" tIns="36576" rIns="36576" bIns="36576">
+            <a:spAutoFit/>
+          </a:bodyPr>
+          <a:lstStyle/>
+          <a:p>
+            <a:pPr algn="ctr">
+              <a:defRPr sz="1150" b="1">
+                <a:solidFill>
+                  <a:srgbClr val="1F497D"/>
+                </a:solidFill>
+                <a:latin typeface="Arial"/>
+              </a:defRPr>
+            </a:pPr>
+            <a:r>
+              <a:t>ADMIN WEB DASHBOARD</a:t>
+            </a:r>
+          </a:p>
+          <a:p>
+            <a:pPr algn="ctr">
+              <a:defRPr sz="950">
+                <a:solidFill>
+                  <a:srgbClr val="0F172A"/>
+                </a:solidFill>
+                <a:latin typeface="Arial"/>
+              </a:defRPr>
+            </a:pPr>
+            <a:r>
+              <a:t>Tactical GIS Map  |  QRT Dispatch  |  SIH Hub</a:t>
+            </a:r>
+          </a:p>
+        </p:txBody>
+      </p:sp>
+      <p:sp>
+        <p:nvSpPr>
           <p:cNvPr id="17426" name="Down Arrow 17425"/>
           <p:cNvSpPr/>
           <p:nvPr/>
         </p:nvSpPr>
         <p:spPr>
           <a:xfrm>
-            <a:off x="10469880" y="4224528"/>
+            <a:off x="9372600" y="5029200"/>
             <a:ext cx="137160" cy="91440"/>
           </a:xfrm>
           <a:prstGeom prst="downArrow">
@@ -9424,16 +8841,16 @@
         </p:nvSpPr>
         <p:spPr>
           <a:xfrm>
-            <a:off x="7680960" y="4343400"/>
-            <a:ext cx="3200400" cy="777240"/>
+            <a:off x="7178040" y="5166360"/>
+            <a:ext cx="4480560" cy="594360"/>
           </a:xfrm>
           <a:prstGeom prst="roundRect">
             <a:avLst/>
           </a:prstGeom>
           <a:solidFill>
-            <a:srgbClr val="EEF2FF"/>
+            <a:srgbClr val="FFFFFF"/>
           </a:solidFill>
-          <a:ln w="12700">
+          <a:ln w="19050">
             <a:solidFill>
               <a:srgbClr val="1F497D"/>
             </a:solidFill>
@@ -9469,8 +8886,8 @@
         </p:nvSpPr>
         <p:spPr>
           <a:xfrm>
-            <a:off x="7680960" y="4343400"/>
-            <a:ext cx="3200400" cy="777240"/>
+            <a:off x="7178040" y="5166360"/>
+            <a:ext cx="4480560" cy="594360"/>
           </a:xfrm>
           <a:prstGeom prst="rect">
             <a:avLst/>
@@ -9484,7 +8901,7 @@
           <a:lstStyle/>
           <a:p>
             <a:pPr algn="ctr">
-              <a:defRPr sz="850" b="1">
+              <a:defRPr sz="1150" b="1">
                 <a:solidFill>
                   <a:srgbClr val="1F497D"/>
                 </a:solidFill>
@@ -9492,161 +8909,20 @@
               </a:defRPr>
             </a:pPr>
             <a:r>
-              <a:t>FASTAPI BACKEND &amp; RELATIONAL DB</a:t>
+              <a:t>MULTI-CHANNEL ALERTS</a:t>
             </a:r>
           </a:p>
           <a:p>
             <a:pPr algn="ctr">
-              <a:defRPr sz="700">
-                <a:solidFill>
-                  <a:srgbClr val="334155"/>
-                </a:solidFill>
-                <a:latin typeface="Arial"/>
-              </a:defRPr>
-            </a:pPr>
-            <a:r>
-              <a:t>REST APIs  |  SQLite Database</a:t>
-            </a:r>
-            <a:br/>
-            <a:r>
-              <a:t>Users / Incidents / Alerts / Challenges / Logs</a:t>
-            </a:r>
-          </a:p>
-        </p:txBody>
-      </p:sp>
-      <p:sp>
-        <p:nvSpPr>
-          <p:cNvPr id="17429" name="Down Arrow 17428"/>
-          <p:cNvSpPr/>
-          <p:nvPr/>
-        </p:nvSpPr>
-        <p:spPr>
-          <a:xfrm>
-            <a:off x="9189720" y="5138928"/>
-            <a:ext cx="137160" cy="91440"/>
-          </a:xfrm>
-          <a:prstGeom prst="downArrow">
-            <a:avLst/>
-          </a:prstGeom>
-          <a:solidFill>
-            <a:srgbClr val="1F497D"/>
-          </a:solidFill>
-          <a:ln>
-            <a:noFill/>
-          </a:ln>
-        </p:spPr>
-        <p:style>
-          <a:lnRef idx="1">
-            <a:schemeClr val="accent1"/>
-          </a:lnRef>
-          <a:fillRef idx="3">
-            <a:schemeClr val="accent1"/>
-          </a:fillRef>
-          <a:effectRef idx="2">
-            <a:schemeClr val="accent1"/>
-          </a:effectRef>
-          <a:fontRef idx="minor">
-            <a:schemeClr val="lt1"/>
-          </a:fontRef>
-        </p:style>
-        <p:txBody>
-          <a:bodyPr rtlCol="0" anchor="ctr"/>
-          <a:lstStyle/>
-          <a:p>
-            <a:pPr algn="ctr"/>
-          </a:p>
-        </p:txBody>
-      </p:sp>
-      <p:sp>
-        <p:nvSpPr>
-          <p:cNvPr id="17430" name="Rounded Rectangle 17429"/>
-          <p:cNvSpPr/>
-          <p:nvPr/>
-        </p:nvSpPr>
-        <p:spPr>
-          <a:xfrm>
-            <a:off x="7680960" y="5257800"/>
-            <a:ext cx="3200400" cy="594360"/>
-          </a:xfrm>
-          <a:prstGeom prst="roundRect">
-            <a:avLst/>
-          </a:prstGeom>
-          <a:solidFill>
-            <a:srgbClr val="F0FDF4"/>
-          </a:solidFill>
-          <a:ln w="12700">
-            <a:solidFill>
-              <a:srgbClr val="064E3B"/>
-            </a:solidFill>
-          </a:ln>
-        </p:spPr>
-        <p:style>
-          <a:lnRef idx="1">
-            <a:schemeClr val="accent1"/>
-          </a:lnRef>
-          <a:fillRef idx="3">
-            <a:schemeClr val="accent1"/>
-          </a:fillRef>
-          <a:effectRef idx="2">
-            <a:schemeClr val="accent1"/>
-          </a:effectRef>
-          <a:fontRef idx="minor">
-            <a:schemeClr val="lt1"/>
-          </a:fontRef>
-        </p:style>
-        <p:txBody>
-          <a:bodyPr rtlCol="0" anchor="ctr"/>
-          <a:lstStyle/>
-          <a:p>
-            <a:pPr algn="ctr"/>
-          </a:p>
-        </p:txBody>
-      </p:sp>
-      <p:sp>
-        <p:nvSpPr>
-          <p:cNvPr id="17431" name="TextBox 17430"/>
-          <p:cNvSpPr txBox="1"/>
-          <p:nvPr/>
-        </p:nvSpPr>
-        <p:spPr>
-          <a:xfrm>
-            <a:off x="7680960" y="5257800"/>
-            <a:ext cx="3200400" cy="594360"/>
-          </a:xfrm>
-          <a:prstGeom prst="rect">
-            <a:avLst/>
-          </a:prstGeom>
-          <a:noFill/>
-        </p:spPr>
-        <p:txBody>
-          <a:bodyPr wrap="square" lIns="36576" tIns="36576" rIns="36576" bIns="36576">
-            <a:spAutoFit/>
-          </a:bodyPr>
-          <a:lstStyle/>
-          <a:p>
-            <a:pPr algn="ctr">
-              <a:defRPr sz="850" b="1">
-                <a:solidFill>
-                  <a:srgbClr val="064E3B"/>
-                </a:solidFill>
-                <a:latin typeface="Arial"/>
-              </a:defRPr>
-            </a:pPr>
-            <a:r>
-              <a:t>ADMIN / FOREST DEPT WEB DASHBOARD</a:t>
-            </a:r>
-          </a:p>
-          <a:p>
-            <a:pPr algn="ctr">
-              <a:defRPr sz="700">
-                <a:solidFill>
-                  <a:srgbClr val="334155"/>
-                </a:solidFill>
-                <a:latin typeface="Arial"/>
-              </a:defRPr>
-            </a:pPr>
-            <a:r>
-              <a:t>Command GIS  |  QRT Dispatch  |  SIH Challenges</a:t>
+              <a:defRPr sz="950">
+                <a:solidFill>
+                  <a:srgbClr val="0F172A"/>
+                </a:solidFill>
+                <a:latin typeface="Arial"/>
+              </a:defRPr>
+            </a:pPr>
+            <a:r>
+              <a:t>Local Audible Siren  |  SMS  |  Push Notifications</a:t>
             </a:r>
           </a:p>
         </p:txBody>
@@ -9869,7 +9145,530 @@
       </p:pic>
       <p:sp>
         <p:nvSpPr>
-          <p:cNvPr id="17410" name="Rounded Rectangle 17409"/>
+          <p:cNvPr id="17411" name="TextBox 17410"/>
+          <p:cNvSpPr txBox="1"/>
+          <p:nvPr/>
+        </p:nvSpPr>
+        <p:spPr>
+          <a:xfrm>
+            <a:off x="502920" y="1143000"/>
+            <a:ext cx="5303520" cy="3749039"/>
+          </a:xfrm>
+          <a:prstGeom prst="rect">
+            <a:avLst/>
+          </a:prstGeom>
+          <a:noFill/>
+        </p:spPr>
+        <p:txBody>
+          <a:bodyPr wrap="square">
+            <a:spAutoFit/>
+          </a:bodyPr>
+          <a:lstStyle/>
+          <a:p>
+            <a:pPr>
+              <a:spcAft>
+                <a:spcPts val="400"/>
+              </a:spcAft>
+              <a:defRPr sz="1600" b="1">
+                <a:solidFill>
+                  <a:srgbClr val="1F497D"/>
+                </a:solidFill>
+                <a:latin typeface="Arial"/>
+              </a:defRPr>
+            </a:pPr>
+            <a:r>
+              <a:t>Feasibility-</a:t>
+            </a:r>
+          </a:p>
+          <a:p>
+            <a:pPr>
+              <a:spcBef>
+                <a:spcPts val="200"/>
+              </a:spcBef>
+              <a:defRPr sz="950" b="1">
+                <a:solidFill>
+                  <a:srgbClr val="1F497D"/>
+                </a:solidFill>
+                <a:latin typeface="Arial"/>
+              </a:defRPr>
+            </a:pPr>
+            <a:r>
+              <a:t>Technical Feasibility:</a:t>
+            </a:r>
+          </a:p>
+          <a:p>
+            <a:pPr>
+              <a:defRPr sz="800">
+                <a:solidFill>
+                  <a:srgbClr val="010000"/>
+                </a:solidFill>
+                <a:latin typeface="Arial"/>
+              </a:defRPr>
+            </a:pPr>
+            <a:r>
+              <a:t>• On-device lightweight AI reduces dependence on continuous cloud inference.</a:t>
+            </a:r>
+            <a:br/>
+            <a:r>
+              <a:t>• Smartphone camera + GPS provide the primary sensing layer.</a:t>
+            </a:r>
+            <a:br/>
+            <a:r>
+              <a:t>• FastAPI provides a lightweight central integration layer.</a:t>
+            </a:r>
+            <a:br/>
+            <a:r>
+              <a:t>• Existing camera/telecom infrastructure can complement mobile nodes.</a:t>
+            </a:r>
+          </a:p>
+          <a:p>
+            <a:pPr>
+              <a:spcBef>
+                <a:spcPts val="200"/>
+              </a:spcBef>
+              <a:defRPr sz="950" b="1">
+                <a:solidFill>
+                  <a:srgbClr val="1F497D"/>
+                </a:solidFill>
+                <a:latin typeface="Arial"/>
+              </a:defRPr>
+            </a:pPr>
+            <a:r>
+              <a:t>Operational Feasibility:</a:t>
+            </a:r>
+          </a:p>
+          <a:p>
+            <a:pPr>
+              <a:defRPr sz="800">
+                <a:solidFill>
+                  <a:srgbClr val="010000"/>
+                </a:solidFill>
+                <a:latin typeface="Arial"/>
+              </a:defRPr>
+            </a:pPr>
+            <a:r>
+              <a:t>• Designed for forest-fringe and low-connectivity environments.</a:t>
+            </a:r>
+            <a:br/>
+            <a:r>
+              <a:t>• Multi-channel warning architecture (app, siren, SMS) ensures wide reach.</a:t>
+            </a:r>
+            <a:br/>
+            <a:r>
+              <a:t>• Forest Department dashboard supports centralized monitoring.</a:t>
+            </a:r>
+            <a:br/>
+            <a:r>
+              <a:t>• Pilot deployment can begin in selected high-risk zones (Dalma NH-33).</a:t>
+            </a:r>
+          </a:p>
+          <a:p>
+            <a:pPr>
+              <a:spcBef>
+                <a:spcPts val="200"/>
+              </a:spcBef>
+              <a:defRPr sz="950" b="1">
+                <a:solidFill>
+                  <a:srgbClr val="1F497D"/>
+                </a:solidFill>
+                <a:latin typeface="Arial"/>
+              </a:defRPr>
+            </a:pPr>
+            <a:r>
+              <a:t>Economic Feasibility:</a:t>
+            </a:r>
+          </a:p>
+          <a:p>
+            <a:pPr>
+              <a:defRPr sz="800">
+                <a:solidFill>
+                  <a:srgbClr val="010000"/>
+                </a:solidFill>
+                <a:latin typeface="Arial"/>
+              </a:defRPr>
+            </a:pPr>
+            <a:r>
+              <a:t>• Built on open-source software frameworks with zero licensing fees.</a:t>
+            </a:r>
+            <a:br/>
+            <a:r>
+              <a:t>• Uses commodity smartphones instead of specialized military hardware.</a:t>
+            </a:r>
+            <a:br/>
+            <a:r>
+              <a:t>• Existing infrastructure can be reused where available.</a:t>
+            </a:r>
+            <a:br/>
+            <a:r>
+              <a:t>• Modular architecture allows phased, cost-effective rollout.</a:t>
+            </a:r>
+          </a:p>
+        </p:txBody>
+      </p:sp>
+      <p:sp>
+        <p:nvSpPr>
+          <p:cNvPr id="17413" name="TextBox 17412"/>
+          <p:cNvSpPr txBox="1"/>
+          <p:nvPr/>
+        </p:nvSpPr>
+        <p:spPr>
+          <a:xfrm>
+            <a:off x="6309360" y="1143000"/>
+            <a:ext cx="5349240" cy="3749039"/>
+          </a:xfrm>
+          <a:prstGeom prst="rect">
+            <a:avLst/>
+          </a:prstGeom>
+          <a:noFill/>
+        </p:spPr>
+        <p:txBody>
+          <a:bodyPr wrap="square">
+            <a:spAutoFit/>
+          </a:bodyPr>
+          <a:lstStyle/>
+          <a:p>
+            <a:pPr>
+              <a:spcAft>
+                <a:spcPts val="400"/>
+              </a:spcAft>
+              <a:defRPr sz="1600" b="1">
+                <a:solidFill>
+                  <a:srgbClr val="064E3B"/>
+                </a:solidFill>
+                <a:latin typeface="Arial"/>
+              </a:defRPr>
+            </a:pPr>
+            <a:r>
+              <a:t>Viability-</a:t>
+            </a:r>
+          </a:p>
+          <a:p>
+            <a:pPr>
+              <a:spcBef>
+                <a:spcPts val="400"/>
+              </a:spcBef>
+              <a:defRPr sz="1000" b="1">
+                <a:solidFill>
+                  <a:srgbClr val="064E3B"/>
+                </a:solidFill>
+                <a:latin typeface="Arial"/>
+              </a:defRPr>
+            </a:pPr>
+            <a:r>
+              <a:t>Social Viability:</a:t>
+            </a:r>
+          </a:p>
+          <a:p>
+            <a:pPr>
+              <a:defRPr sz="850">
+                <a:solidFill>
+                  <a:srgbClr val="010000"/>
+                </a:solidFill>
+                <a:latin typeface="Arial"/>
+              </a:defRPr>
+            </a:pPr>
+            <a:r>
+              <a:t>• Early warnings reduce human-elephant encounters, protecting lives and crops.</a:t>
+            </a:r>
+            <a:br/>
+            <a:r>
+              <a:t>• Connects local communities with Forest Department response teams.</a:t>
+            </a:r>
+            <a:br/>
+            <a:r>
+              <a:t>• Builds trust through transparent, shared incident data and alerts.</a:t>
+            </a:r>
+          </a:p>
+          <a:p>
+            <a:pPr>
+              <a:spcBef>
+                <a:spcPts val="400"/>
+              </a:spcBef>
+              <a:defRPr sz="1000" b="1">
+                <a:solidFill>
+                  <a:srgbClr val="064E3B"/>
+                </a:solidFill>
+                <a:latin typeface="Arial"/>
+              </a:defRPr>
+            </a:pPr>
+            <a:r>
+              <a:t>Environmental Viability:</a:t>
+            </a:r>
+          </a:p>
+          <a:p>
+            <a:pPr>
+              <a:defRPr sz="850">
+                <a:solidFill>
+                  <a:srgbClr val="010000"/>
+                </a:solidFill>
+                <a:latin typeface="Arial"/>
+              </a:defRPr>
+            </a:pPr>
+            <a:r>
+              <a:t>• Non-invasive camera monitoring does not disturb natural elephant movement.</a:t>
+            </a:r>
+            <a:br/>
+            <a:r>
+              <a:t>• Helps eliminate retaliatory killings, poisonings, and electrocutions.</a:t>
+            </a:r>
+            <a:br/>
+            <a:r>
+              <a:t>• Historical conflict data directly supports long-term conservation planning.</a:t>
+            </a:r>
+            <a:br/>
+            <a:r>
+              <a:t>• Contributes to India's national wildlife conservation commitments (Project Elephant).</a:t>
+            </a:r>
+          </a:p>
+        </p:txBody>
+      </p:sp>
+      <p:sp>
+        <p:nvSpPr>
+          <p:cNvPr id="17415" name="TextBox 17414"/>
+          <p:cNvSpPr txBox="1"/>
+          <p:nvPr/>
+        </p:nvSpPr>
+        <p:spPr>
+          <a:xfrm>
+            <a:off x="457200" y="5102352"/>
+            <a:ext cx="11247120" cy="228600"/>
+          </a:xfrm>
+          <a:prstGeom prst="rect">
+            <a:avLst/>
+          </a:prstGeom>
+          <a:noFill/>
+        </p:spPr>
+        <p:txBody>
+          <a:bodyPr wrap="none">
+            <a:spAutoFit/>
+          </a:bodyPr>
+          <a:lstStyle/>
+          <a:p>
+            <a:pPr algn="ctr">
+              <a:defRPr sz="900" b="1">
+                <a:solidFill>
+                  <a:srgbClr val="1F497D"/>
+                </a:solidFill>
+                <a:latin typeface="Arial"/>
+              </a:defRPr>
+            </a:pPr>
+            <a:r>
+              <a:t>KEY CHALLENGES &amp; ENGINEERED MITIGATION STRATEGIES</a:t>
+            </a:r>
+          </a:p>
+        </p:txBody>
+      </p:sp>
+      <p:sp>
+        <p:nvSpPr>
+          <p:cNvPr id="17417" name="TextBox 17416"/>
+          <p:cNvSpPr txBox="1"/>
+          <p:nvPr/>
+        </p:nvSpPr>
+        <p:spPr>
+          <a:xfrm>
+            <a:off x="548640" y="5376672"/>
+            <a:ext cx="2606040" cy="822960"/>
+          </a:xfrm>
+          <a:prstGeom prst="rect">
+            <a:avLst/>
+          </a:prstGeom>
+          <a:noFill/>
+        </p:spPr>
+        <p:txBody>
+          <a:bodyPr wrap="square" lIns="18288" tIns="18288" rIns="18288" bIns="18288">
+            <a:spAutoFit/>
+          </a:bodyPr>
+          <a:lstStyle/>
+          <a:p>
+            <a:pPr>
+              <a:defRPr sz="800" b="1">
+                <a:solidFill>
+                  <a:srgbClr val="C00000"/>
+                </a:solidFill>
+                <a:latin typeface="Arial"/>
+              </a:defRPr>
+            </a:pPr>
+            <a:r>
+              <a:t>⚠ Detection Uncertainty</a:t>
+            </a:r>
+          </a:p>
+          <a:p>
+            <a:pPr>
+              <a:spcBef>
+                <a:spcPts val="200"/>
+              </a:spcBef>
+              <a:defRPr sz="750">
+                <a:solidFill>
+                  <a:srgbClr val="1F497D"/>
+                </a:solidFill>
+                <a:latin typeface="Arial"/>
+              </a:defRPr>
+            </a:pPr>
+            <a:r>
+              <a:t>→ Temporal validation (3-of-5 queue) + confidence thresholding</a:t>
+            </a:r>
+          </a:p>
+        </p:txBody>
+      </p:sp>
+      <p:sp>
+        <p:nvSpPr>
+          <p:cNvPr id="17419" name="TextBox 17418"/>
+          <p:cNvSpPr txBox="1"/>
+          <p:nvPr/>
+        </p:nvSpPr>
+        <p:spPr>
+          <a:xfrm>
+            <a:off x="3337560" y="5376672"/>
+            <a:ext cx="2606040" cy="822960"/>
+          </a:xfrm>
+          <a:prstGeom prst="rect">
+            <a:avLst/>
+          </a:prstGeom>
+          <a:noFill/>
+        </p:spPr>
+        <p:txBody>
+          <a:bodyPr wrap="square" lIns="18288" tIns="18288" rIns="18288" bIns="18288">
+            <a:spAutoFit/>
+          </a:bodyPr>
+          <a:lstStyle/>
+          <a:p>
+            <a:pPr>
+              <a:defRPr sz="800" b="1">
+                <a:solidFill>
+                  <a:srgbClr val="C00000"/>
+                </a:solidFill>
+                <a:latin typeface="Arial"/>
+              </a:defRPr>
+            </a:pPr>
+            <a:r>
+              <a:t>⚠ Camera Coverage Gaps</a:t>
+            </a:r>
+          </a:p>
+          <a:p>
+            <a:pPr>
+              <a:spcBef>
+                <a:spcPts val="200"/>
+              </a:spcBef>
+              <a:defRPr sz="750">
+                <a:solidFill>
+                  <a:srgbClr val="1F497D"/>
+                </a:solidFill>
+                <a:latin typeface="Arial"/>
+              </a:defRPr>
+            </a:pPr>
+            <a:r>
+              <a:t>→ Mobile sensing units + integration with existing infrastructure</a:t>
+            </a:r>
+          </a:p>
+        </p:txBody>
+      </p:sp>
+      <p:sp>
+        <p:nvSpPr>
+          <p:cNvPr id="17421" name="TextBox 17420"/>
+          <p:cNvSpPr txBox="1"/>
+          <p:nvPr/>
+        </p:nvSpPr>
+        <p:spPr>
+          <a:xfrm>
+            <a:off x="6126479" y="5376672"/>
+            <a:ext cx="2606040" cy="822960"/>
+          </a:xfrm>
+          <a:prstGeom prst="rect">
+            <a:avLst/>
+          </a:prstGeom>
+          <a:noFill/>
+        </p:spPr>
+        <p:txBody>
+          <a:bodyPr wrap="square" lIns="18288" tIns="18288" rIns="18288" bIns="18288">
+            <a:spAutoFit/>
+          </a:bodyPr>
+          <a:lstStyle/>
+          <a:p>
+            <a:pPr>
+              <a:defRPr sz="800" b="1">
+                <a:solidFill>
+                  <a:srgbClr val="C00000"/>
+                </a:solidFill>
+                <a:latin typeface="Arial"/>
+              </a:defRPr>
+            </a:pPr>
+            <a:r>
+              <a:t>⚠ Spam / Fake Reports</a:t>
+            </a:r>
+          </a:p>
+          <a:p>
+            <a:pPr>
+              <a:spcBef>
+                <a:spcPts val="200"/>
+              </a:spcBef>
+              <a:defRPr sz="750">
+                <a:solidFill>
+                  <a:srgbClr val="1F497D"/>
+                </a:solidFill>
+                <a:latin typeface="Arial"/>
+              </a:defRPr>
+            </a:pPr>
+            <a:r>
+              <a:t>→ Incident verification + AI media checking + user trust scoring</a:t>
+            </a:r>
+          </a:p>
+        </p:txBody>
+      </p:sp>
+      <p:sp>
+        <p:nvSpPr>
+          <p:cNvPr id="17423" name="TextBox 17422"/>
+          <p:cNvSpPr txBox="1"/>
+          <p:nvPr/>
+        </p:nvSpPr>
+        <p:spPr>
+          <a:xfrm>
+            <a:off x="8915399" y="5376672"/>
+            <a:ext cx="2606040" cy="822960"/>
+          </a:xfrm>
+          <a:prstGeom prst="rect">
+            <a:avLst/>
+          </a:prstGeom>
+          <a:noFill/>
+        </p:spPr>
+        <p:txBody>
+          <a:bodyPr wrap="square" lIns="18288" tIns="18288" rIns="18288" bIns="18288">
+            <a:spAutoFit/>
+          </a:bodyPr>
+          <a:lstStyle/>
+          <a:p>
+            <a:pPr>
+              <a:defRPr sz="800" b="1">
+                <a:solidFill>
+                  <a:srgbClr val="C00000"/>
+                </a:solidFill>
+                <a:latin typeface="Arial"/>
+              </a:defRPr>
+            </a:pPr>
+            <a:r>
+              <a:t>⚠ Network Blackouts</a:t>
+            </a:r>
+          </a:p>
+          <a:p>
+            <a:pPr>
+              <a:spcBef>
+                <a:spcPts val="200"/>
+              </a:spcBef>
+              <a:defRPr sz="750">
+                <a:solidFill>
+                  <a:srgbClr val="1F497D"/>
+                </a:solidFill>
+                <a:latin typeface="Arial"/>
+              </a:defRPr>
+            </a:pPr>
+            <a:r>
+              <a:t>→ On-device edge AI inference + offline-first sync architecture</a:t>
+            </a:r>
+          </a:p>
+        </p:txBody>
+      </p:sp>
+      <p:sp>
+        <p:nvSpPr>
+          <p:cNvPr id="17424" name="Rounded Rectangle 17423"/>
           <p:cNvSpPr/>
           <p:nvPr/>
         </p:nvSpPr>
@@ -9884,7 +9683,7 @@
           <a:solidFill>
             <a:srgbClr val="F8FAFC"/>
           </a:solidFill>
-          <a:ln w="12700">
+          <a:ln w="19050">
             <a:solidFill>
               <a:srgbClr val="1F497D"/>
             </a:solidFill>
@@ -9914,14 +9713,14 @@
       </p:sp>
       <p:sp>
         <p:nvSpPr>
-          <p:cNvPr id="17411" name="TextBox 17410"/>
+          <p:cNvPr id="17425" name="TextBox 17424"/>
           <p:cNvSpPr txBox="1"/>
           <p:nvPr/>
         </p:nvSpPr>
         <p:spPr>
           <a:xfrm>
-            <a:off x="502920" y="1143000"/>
-            <a:ext cx="5303520" cy="3749039"/>
+            <a:off x="502920" y="1097280"/>
+            <a:ext cx="5303520" cy="3840480"/>
           </a:xfrm>
           <a:prstGeom prst="rect">
             <a:avLst/>
@@ -9936,9 +9735,9 @@
           <a:p>
             <a:pPr>
               <a:spcAft>
-                <a:spcPts val="400"/>
+                <a:spcPts val="600"/>
               </a:spcAft>
-              <a:defRPr sz="1600" b="1">
+              <a:defRPr sz="2200" b="1">
                 <a:solidFill>
                   <a:srgbClr val="1F497D"/>
                 </a:solidFill>
@@ -9952,9 +9751,9 @@
           <a:p>
             <a:pPr>
               <a:spcBef>
-                <a:spcPts val="200"/>
+                <a:spcPts val="300"/>
               </a:spcBef>
-              <a:defRPr sz="950" b="1">
+              <a:defRPr sz="1700" b="1">
                 <a:solidFill>
                   <a:srgbClr val="1F497D"/>
                 </a:solidFill>
@@ -9962,40 +9761,25 @@
               </a:defRPr>
             </a:pPr>
             <a:r>
-              <a:t>Technical Feasibility:</a:t>
-            </a:r>
-          </a:p>
-          <a:p>
-            <a:pPr>
-              <a:defRPr sz="800">
-                <a:solidFill>
-                  <a:srgbClr val="010000"/>
-                </a:solidFill>
-                <a:latin typeface="Arial"/>
-              </a:defRPr>
-            </a:pPr>
-            <a:r>
-              <a:t>• On-device lightweight AI reduces dependence on continuous cloud inference.</a:t>
+              <a:t>•  Technical Feasibility:</a:t>
             </a:r>
             <a:br/>
             <a:r>
-              <a:t>• Smartphone camera + GPS provide the primary sensing layer.</a:t>
-            </a:r>
-            <a:br/>
-            <a:r>
-              <a:t>• FastAPI provides a lightweight central integration layer.</a:t>
-            </a:r>
-            <a:br/>
-            <a:r>
-              <a:t>• Existing camera/telecom infrastructure can complement mobile nodes.</a:t>
+              <a:rPr sz="1600" b="0">
+                <a:solidFill>
+                  <a:srgbClr val="0F172A"/>
+                </a:solidFill>
+                <a:latin typeface="Arial"/>
+              </a:rPr>
+              <a:t>   On-device lightweight AI removes continuous cloud dependence. Phone Camera + GPS provide primary sensing.</a:t>
             </a:r>
           </a:p>
           <a:p>
             <a:pPr>
               <a:spcBef>
-                <a:spcPts val="200"/>
+                <a:spcPts val="300"/>
               </a:spcBef>
-              <a:defRPr sz="950" b="1">
+              <a:defRPr sz="1700" b="1">
                 <a:solidFill>
                   <a:srgbClr val="1F497D"/>
                 </a:solidFill>
@@ -10003,40 +9787,25 @@
               </a:defRPr>
             </a:pPr>
             <a:r>
-              <a:t>Operational Feasibility:</a:t>
-            </a:r>
-          </a:p>
-          <a:p>
-            <a:pPr>
-              <a:defRPr sz="800">
-                <a:solidFill>
-                  <a:srgbClr val="010000"/>
-                </a:solidFill>
-                <a:latin typeface="Arial"/>
-              </a:defRPr>
-            </a:pPr>
-            <a:r>
-              <a:t>• Designed for forest-fringe and low-connectivity environments.</a:t>
+              <a:t>•  Operational Feasibility:</a:t>
             </a:r>
             <a:br/>
             <a:r>
-              <a:t>• Multi-channel warning architecture (app, siren, SMS) ensures wide reach.</a:t>
-            </a:r>
-            <a:br/>
-            <a:r>
-              <a:t>• Forest Department dashboard supports centralized monitoring.</a:t>
-            </a:r>
-            <a:br/>
-            <a:r>
-              <a:t>• Pilot deployment can begin in selected high-risk zones (Dalma NH-33).</a:t>
+              <a:rPr sz="1600" b="0">
+                <a:solidFill>
+                  <a:srgbClr val="0F172A"/>
+                </a:solidFill>
+                <a:latin typeface="Arial"/>
+              </a:rPr>
+              <a:t>   Designed for low-connectivity forest fringes. Multi-channel warnings (app, siren, SMS) ensure wide reach.</a:t>
             </a:r>
           </a:p>
           <a:p>
             <a:pPr>
               <a:spcBef>
-                <a:spcPts val="200"/>
+                <a:spcPts val="300"/>
               </a:spcBef>
-              <a:defRPr sz="950" b="1">
+              <a:defRPr sz="1700" b="1">
                 <a:solidFill>
                   <a:srgbClr val="1F497D"/>
                 </a:solidFill>
@@ -10044,39 +9813,24 @@
               </a:defRPr>
             </a:pPr>
             <a:r>
-              <a:t>Economic Feasibility:</a:t>
-            </a:r>
-          </a:p>
-          <a:p>
-            <a:pPr>
-              <a:defRPr sz="800">
-                <a:solidFill>
-                  <a:srgbClr val="010000"/>
-                </a:solidFill>
-                <a:latin typeface="Arial"/>
-              </a:defRPr>
-            </a:pPr>
-            <a:r>
-              <a:t>• Built on open-source software frameworks with zero licensing fees.</a:t>
+              <a:t>•  Economic Feasibility:</a:t>
             </a:r>
             <a:br/>
             <a:r>
-              <a:t>• Uses commodity smartphones instead of specialized military hardware.</a:t>
-            </a:r>
-            <a:br/>
-            <a:r>
-              <a:t>• Existing infrastructure can be reused where available.</a:t>
-            </a:r>
-            <a:br/>
-            <a:r>
-              <a:t>• Modular architecture allows phased, cost-effective rollout.</a:t>
-            </a:r>
-          </a:p>
-        </p:txBody>
-      </p:sp>
-      <p:sp>
-        <p:nvSpPr>
-          <p:cNvPr id="17412" name="Rounded Rectangle 17411"/>
+              <a:rPr sz="1600" b="0">
+                <a:solidFill>
+                  <a:srgbClr val="0F172A"/>
+                </a:solidFill>
+                <a:latin typeface="Arial"/>
+              </a:rPr>
+              <a:t>   Built on open-source frameworks. Uses commodity smartphones rather than costly military hardware.</a:t>
+            </a:r>
+          </a:p>
+        </p:txBody>
+      </p:sp>
+      <p:sp>
+        <p:nvSpPr>
+          <p:cNvPr id="17426" name="Rounded Rectangle 17425"/>
           <p:cNvSpPr/>
           <p:nvPr/>
         </p:nvSpPr>
@@ -10091,7 +9845,7 @@
           <a:solidFill>
             <a:srgbClr val="F8FAFC"/>
           </a:solidFill>
-          <a:ln w="12700">
+          <a:ln w="19050">
             <a:solidFill>
               <a:srgbClr val="064E3B"/>
             </a:solidFill>
@@ -10121,14 +9875,14 @@
       </p:sp>
       <p:sp>
         <p:nvSpPr>
-          <p:cNvPr id="17413" name="TextBox 17412"/>
+          <p:cNvPr id="17427" name="TextBox 17426"/>
           <p:cNvSpPr txBox="1"/>
           <p:nvPr/>
         </p:nvSpPr>
         <p:spPr>
           <a:xfrm>
-            <a:off x="6309360" y="1143000"/>
-            <a:ext cx="5349240" cy="3749039"/>
+            <a:off x="6309360" y="1097280"/>
+            <a:ext cx="5349240" cy="3840480"/>
           </a:xfrm>
           <a:prstGeom prst="rect">
             <a:avLst/>
@@ -10143,9 +9897,9 @@
           <a:p>
             <a:pPr>
               <a:spcAft>
-                <a:spcPts val="400"/>
+                <a:spcPts val="600"/>
               </a:spcAft>
-              <a:defRPr sz="1600" b="1">
+              <a:defRPr sz="2200" b="1">
                 <a:solidFill>
                   <a:srgbClr val="064E3B"/>
                 </a:solidFill>
@@ -10161,7 +9915,7 @@
               <a:spcBef>
                 <a:spcPts val="400"/>
               </a:spcBef>
-              <a:defRPr sz="1000" b="1">
+              <a:defRPr sz="1700" b="1">
                 <a:solidFill>
                   <a:srgbClr val="064E3B"/>
                 </a:solidFill>
@@ -10169,28 +9923,17 @@
               </a:defRPr>
             </a:pPr>
             <a:r>
-              <a:t>Social Viability:</a:t>
-            </a:r>
-          </a:p>
-          <a:p>
-            <a:pPr>
-              <a:defRPr sz="850">
-                <a:solidFill>
-                  <a:srgbClr val="010000"/>
-                </a:solidFill>
-                <a:latin typeface="Arial"/>
-              </a:defRPr>
-            </a:pPr>
-            <a:r>
-              <a:t>• Early warnings reduce human-elephant encounters, protecting lives and crops.</a:t>
+              <a:t>•  Social Viability:</a:t>
             </a:r>
             <a:br/>
             <a:r>
-              <a:t>• Connects local communities with Forest Department response teams.</a:t>
-            </a:r>
-            <a:br/>
-            <a:r>
-              <a:t>• Builds trust through transparent, shared incident data and alerts.</a:t>
+              <a:rPr sz="1600" b="0">
+                <a:solidFill>
+                  <a:srgbClr val="0F172A"/>
+                </a:solidFill>
+                <a:latin typeface="Arial"/>
+              </a:rPr>
+              <a:t>   Early warnings reduce human encounters, protecting lives and crops. Connects communities directly with Forest Rangers.</a:t>
             </a:r>
           </a:p>
           <a:p>
@@ -10198,7 +9941,7 @@
               <a:spcBef>
                 <a:spcPts val="400"/>
               </a:spcBef>
-              <a:defRPr sz="1000" b="1">
+              <a:defRPr sz="1700" b="1">
                 <a:solidFill>
                   <a:srgbClr val="064E3B"/>
                 </a:solidFill>
@@ -10206,45 +9949,30 @@
               </a:defRPr>
             </a:pPr>
             <a:r>
-              <a:t>Environmental Viability:</a:t>
-            </a:r>
-          </a:p>
-          <a:p>
-            <a:pPr>
-              <a:defRPr sz="850">
-                <a:solidFill>
-                  <a:srgbClr val="010000"/>
-                </a:solidFill>
-                <a:latin typeface="Arial"/>
-              </a:defRPr>
-            </a:pPr>
-            <a:r>
-              <a:t>• Non-invasive camera monitoring does not disturb natural elephant movement.</a:t>
+              <a:t>•  Environmental Viability:</a:t>
             </a:r>
             <a:br/>
             <a:r>
-              <a:t>• Helps eliminate retaliatory killings, poisonings, and electrocutions.</a:t>
-            </a:r>
-            <a:br/>
-            <a:r>
-              <a:t>• Historical conflict data directly supports long-term conservation planning.</a:t>
-            </a:r>
-            <a:br/>
-            <a:r>
-              <a:t>• Contributes to India's national wildlife conservation commitments (Project Elephant).</a:t>
-            </a:r>
-          </a:p>
-        </p:txBody>
-      </p:sp>
-      <p:sp>
-        <p:nvSpPr>
-          <p:cNvPr id="17414" name="Rounded Rectangle 17413"/>
+              <a:rPr sz="1600" b="0">
+                <a:solidFill>
+                  <a:srgbClr val="0F172A"/>
+                </a:solidFill>
+                <a:latin typeface="Arial"/>
+              </a:rPr>
+              <a:t>   Non-invasive camera detection causes zero harm to wildlife. Helps eliminate retaliatory killings and supports Project Elephant.</a:t>
+            </a:r>
+          </a:p>
+        </p:txBody>
+      </p:sp>
+      <p:sp>
+        <p:nvSpPr>
+          <p:cNvPr id="17428" name="Rounded Rectangle 17427"/>
           <p:cNvSpPr/>
           <p:nvPr/>
         </p:nvSpPr>
         <p:spPr>
           <a:xfrm>
-            <a:off x="365760" y="5074920"/>
+            <a:off x="365760" y="5120640"/>
             <a:ext cx="11430000" cy="1234440"/>
           </a:xfrm>
           <a:prstGeom prst="roundRect">
@@ -10253,7 +9981,7 @@
           <a:solidFill>
             <a:srgbClr val="FFFFFF"/>
           </a:solidFill>
-          <a:ln w="12700">
+          <a:ln w="19050">
             <a:solidFill>
               <a:srgbClr val="1F497D"/>
             </a:solidFill>
@@ -10283,13 +10011,13 @@
       </p:sp>
       <p:sp>
         <p:nvSpPr>
-          <p:cNvPr id="17415" name="TextBox 17414"/>
+          <p:cNvPr id="17429" name="TextBox 17428"/>
           <p:cNvSpPr txBox="1"/>
           <p:nvPr/>
         </p:nvSpPr>
         <p:spPr>
           <a:xfrm>
-            <a:off x="457200" y="5102352"/>
+            <a:off x="457200" y="5138928"/>
             <a:ext cx="11247120" cy="228600"/>
           </a:xfrm>
           <a:prstGeom prst="rect">
@@ -10304,7 +10032,7 @@
           <a:lstStyle/>
           <a:p>
             <a:pPr algn="ctr">
-              <a:defRPr sz="900" b="1">
+              <a:defRPr sz="1100" b="1">
                 <a:solidFill>
                   <a:srgbClr val="1F497D"/>
                 </a:solidFill>
@@ -10312,20 +10040,20 @@
               </a:defRPr>
             </a:pPr>
             <a:r>
-              <a:t>KEY CHALLENGES &amp; ENGINEERED MITIGATION STRATEGIES</a:t>
-            </a:r>
-          </a:p>
-        </p:txBody>
-      </p:sp>
-      <p:sp>
-        <p:nvSpPr>
-          <p:cNvPr id="17416" name="Rounded Rectangle 17415"/>
+              <a:t>KEY CHALLENGES &amp; ENGINEERED SOLUTIONS</a:t>
+            </a:r>
+          </a:p>
+        </p:txBody>
+      </p:sp>
+      <p:sp>
+        <p:nvSpPr>
+          <p:cNvPr id="17430" name="Rounded Rectangle 17429"/>
           <p:cNvSpPr/>
           <p:nvPr/>
         </p:nvSpPr>
         <p:spPr>
           <a:xfrm>
-            <a:off x="502920" y="5349240"/>
+            <a:off x="502920" y="5394960"/>
             <a:ext cx="2697480" cy="868680"/>
           </a:xfrm>
           <a:prstGeom prst="roundRect">
@@ -10334,7 +10062,7 @@
           <a:solidFill>
             <a:srgbClr val="F8FAFC"/>
           </a:solidFill>
-          <a:ln w="12700">
+          <a:ln w="19050">
             <a:solidFill>
               <a:srgbClr val="CBD5E1"/>
             </a:solidFill>
@@ -10364,13 +10092,13 @@
       </p:sp>
       <p:sp>
         <p:nvSpPr>
-          <p:cNvPr id="17417" name="TextBox 17416"/>
+          <p:cNvPr id="17431" name="TextBox 17430"/>
           <p:cNvSpPr txBox="1"/>
           <p:nvPr/>
         </p:nvSpPr>
         <p:spPr>
           <a:xfrm>
-            <a:off x="548640" y="5376672"/>
+            <a:off x="548640" y="5413248"/>
             <a:ext cx="2606040" cy="822960"/>
           </a:xfrm>
           <a:prstGeom prst="rect">
@@ -10385,7 +10113,7 @@
           <a:lstStyle/>
           <a:p>
             <a:pPr>
-              <a:defRPr sz="800" b="1">
+              <a:defRPr sz="1000" b="1">
                 <a:solidFill>
                   <a:srgbClr val="C00000"/>
                 </a:solidFill>
@@ -10401,7 +10129,7 @@
               <a:spcBef>
                 <a:spcPts val="200"/>
               </a:spcBef>
-              <a:defRPr sz="750">
+              <a:defRPr sz="950">
                 <a:solidFill>
                   <a:srgbClr val="1F497D"/>
                 </a:solidFill>
@@ -10409,20 +10137,20 @@
               </a:defRPr>
             </a:pPr>
             <a:r>
-              <a:t>→ Temporal validation (3-of-5 queue) + confidence thresholding</a:t>
-            </a:r>
-          </a:p>
-        </p:txBody>
-      </p:sp>
-      <p:sp>
-        <p:nvSpPr>
-          <p:cNvPr id="17418" name="Rounded Rectangle 17417"/>
+              <a:t>→ Temporal validation (3-of-5 queue) + confidence filtering</a:t>
+            </a:r>
+          </a:p>
+        </p:txBody>
+      </p:sp>
+      <p:sp>
+        <p:nvSpPr>
+          <p:cNvPr id="17432" name="Rounded Rectangle 17431"/>
           <p:cNvSpPr/>
           <p:nvPr/>
         </p:nvSpPr>
         <p:spPr>
           <a:xfrm>
-            <a:off x="3291839" y="5349240"/>
+            <a:off x="3291839" y="5394960"/>
             <a:ext cx="2697480" cy="868680"/>
           </a:xfrm>
           <a:prstGeom prst="roundRect">
@@ -10431,7 +10159,7 @@
           <a:solidFill>
             <a:srgbClr val="F8FAFC"/>
           </a:solidFill>
-          <a:ln w="12700">
+          <a:ln w="19050">
             <a:solidFill>
               <a:srgbClr val="CBD5E1"/>
             </a:solidFill>
@@ -10461,13 +10189,13 @@
       </p:sp>
       <p:sp>
         <p:nvSpPr>
-          <p:cNvPr id="17419" name="TextBox 17418"/>
+          <p:cNvPr id="17433" name="TextBox 17432"/>
           <p:cNvSpPr txBox="1"/>
           <p:nvPr/>
         </p:nvSpPr>
         <p:spPr>
           <a:xfrm>
-            <a:off x="3337560" y="5376672"/>
+            <a:off x="3337560" y="5413248"/>
             <a:ext cx="2606040" cy="822960"/>
           </a:xfrm>
           <a:prstGeom prst="rect">
@@ -10482,7 +10210,7 @@
           <a:lstStyle/>
           <a:p>
             <a:pPr>
-              <a:defRPr sz="800" b="1">
+              <a:defRPr sz="1000" b="1">
                 <a:solidFill>
                   <a:srgbClr val="C00000"/>
                 </a:solidFill>
@@ -10498,7 +10226,7 @@
               <a:spcBef>
                 <a:spcPts val="200"/>
               </a:spcBef>
-              <a:defRPr sz="750">
+              <a:defRPr sz="950">
                 <a:solidFill>
                   <a:srgbClr val="1F497D"/>
                 </a:solidFill>
@@ -10506,20 +10234,20 @@
               </a:defRPr>
             </a:pPr>
             <a:r>
-              <a:t>→ Mobile sensing units + integration with existing infrastructure</a:t>
-            </a:r>
-          </a:p>
-        </p:txBody>
-      </p:sp>
-      <p:sp>
-        <p:nvSpPr>
-          <p:cNvPr id="17420" name="Rounded Rectangle 17419"/>
+              <a:t>→ Mobile sensing units + integration with public cameras</a:t>
+            </a:r>
+          </a:p>
+        </p:txBody>
+      </p:sp>
+      <p:sp>
+        <p:nvSpPr>
+          <p:cNvPr id="17434" name="Rounded Rectangle 17433"/>
           <p:cNvSpPr/>
           <p:nvPr/>
         </p:nvSpPr>
         <p:spPr>
           <a:xfrm>
-            <a:off x="6080759" y="5349240"/>
+            <a:off x="6080759" y="5394960"/>
             <a:ext cx="2697480" cy="868680"/>
           </a:xfrm>
           <a:prstGeom prst="roundRect">
@@ -10528,7 +10256,7 @@
           <a:solidFill>
             <a:srgbClr val="F8FAFC"/>
           </a:solidFill>
-          <a:ln w="12700">
+          <a:ln w="19050">
             <a:solidFill>
               <a:srgbClr val="CBD5E1"/>
             </a:solidFill>
@@ -10558,13 +10286,13 @@
       </p:sp>
       <p:sp>
         <p:nvSpPr>
-          <p:cNvPr id="17421" name="TextBox 17420"/>
+          <p:cNvPr id="17435" name="TextBox 17434"/>
           <p:cNvSpPr txBox="1"/>
           <p:nvPr/>
         </p:nvSpPr>
         <p:spPr>
           <a:xfrm>
-            <a:off x="6126479" y="5376672"/>
+            <a:off x="6126479" y="5413248"/>
             <a:ext cx="2606040" cy="822960"/>
           </a:xfrm>
           <a:prstGeom prst="rect">
@@ -10579,7 +10307,7 @@
           <a:lstStyle/>
           <a:p>
             <a:pPr>
-              <a:defRPr sz="800" b="1">
+              <a:defRPr sz="1000" b="1">
                 <a:solidFill>
                   <a:srgbClr val="C00000"/>
                 </a:solidFill>
@@ -10595,7 +10323,7 @@
               <a:spcBef>
                 <a:spcPts val="200"/>
               </a:spcBef>
-              <a:defRPr sz="750">
+              <a:defRPr sz="950">
                 <a:solidFill>
                   <a:srgbClr val="1F497D"/>
                 </a:solidFill>
@@ -10603,20 +10331,20 @@
               </a:defRPr>
             </a:pPr>
             <a:r>
-              <a:t>→ Incident verification + AI media checking + user trust scoring</a:t>
-            </a:r>
-          </a:p>
-        </p:txBody>
-      </p:sp>
-      <p:sp>
-        <p:nvSpPr>
-          <p:cNvPr id="17422" name="Rounded Rectangle 17421"/>
+              <a:t>→ Incident verification + AI media checking + trust scores</a:t>
+            </a:r>
+          </a:p>
+        </p:txBody>
+      </p:sp>
+      <p:sp>
+        <p:nvSpPr>
+          <p:cNvPr id="17436" name="Rounded Rectangle 17435"/>
           <p:cNvSpPr/>
           <p:nvPr/>
         </p:nvSpPr>
         <p:spPr>
           <a:xfrm>
-            <a:off x="8869680" y="5349240"/>
+            <a:off x="8869680" y="5394960"/>
             <a:ext cx="2697480" cy="868680"/>
           </a:xfrm>
           <a:prstGeom prst="roundRect">
@@ -10625,7 +10353,7 @@
           <a:solidFill>
             <a:srgbClr val="F8FAFC"/>
           </a:solidFill>
-          <a:ln w="12700">
+          <a:ln w="19050">
             <a:solidFill>
               <a:srgbClr val="CBD5E1"/>
             </a:solidFill>
@@ -10655,13 +10383,13 @@
       </p:sp>
       <p:sp>
         <p:nvSpPr>
-          <p:cNvPr id="17423" name="TextBox 17422"/>
+          <p:cNvPr id="17437" name="TextBox 17436"/>
           <p:cNvSpPr txBox="1"/>
           <p:nvPr/>
         </p:nvSpPr>
         <p:spPr>
           <a:xfrm>
-            <a:off x="8915399" y="5376672"/>
+            <a:off x="8915399" y="5413248"/>
             <a:ext cx="2606040" cy="822960"/>
           </a:xfrm>
           <a:prstGeom prst="rect">
@@ -10676,7 +10404,7 @@
           <a:lstStyle/>
           <a:p>
             <a:pPr>
-              <a:defRPr sz="800" b="1">
+              <a:defRPr sz="1000" b="1">
                 <a:solidFill>
                   <a:srgbClr val="C00000"/>
                 </a:solidFill>
@@ -10692,7 +10420,7 @@
               <a:spcBef>
                 <a:spcPts val="200"/>
               </a:spcBef>
-              <a:defRPr sz="750">
+              <a:defRPr sz="950">
                 <a:solidFill>
                   <a:srgbClr val="1F497D"/>
                 </a:solidFill>
@@ -10700,7 +10428,7 @@
               </a:defRPr>
             </a:pPr>
             <a:r>
-              <a:t>→ On-device edge AI inference + offline-first sync architecture</a:t>
+              <a:t>→ On-device edge AI + offline-first sync architecture</a:t>
             </a:r>
           </a:p>
         </p:txBody>
@@ -10941,7 +10669,7 @@
         <p:spPr>
           <a:xfrm>
             <a:off x="365760" y="1051560"/>
-            <a:ext cx="5852160" cy="5120640"/>
+            <a:ext cx="5852160" cy="5303520"/>
           </a:xfrm>
           <a:prstGeom prst="rect">
             <a:avLst/>
@@ -10956,11 +10684,11 @@
           <a:p>
             <a:pPr marL="342900" indent="-342900">
               <a:spcAft>
-                <a:spcPts val="400"/>
+                <a:spcPts val="800"/>
               </a:spcAft>
               <a:buFont typeface="Wingdings" panose="05000000000000000000" pitchFamily="2" charset="2"/>
               <a:buChar char="Ø"/>
-              <a:defRPr sz="2000" b="1">
+              <a:defRPr sz="2400" b="1">
                 <a:solidFill>
                   <a:srgbClr val="1F497D"/>
                 </a:solidFill>
@@ -10974,9 +10702,9 @@
           <a:p>
             <a:pPr>
               <a:spcBef>
-                <a:spcPts val="300"/>
+                <a:spcPts val="400"/>
               </a:spcBef>
-              <a:defRPr sz="1000" b="1">
+              <a:defRPr sz="1750" b="1">
                 <a:solidFill>
                   <a:srgbClr val="1F497D"/>
                 </a:solidFill>
@@ -10984,80 +10712,25 @@
               </a:defRPr>
             </a:pPr>
             <a:r>
-              <a:t>Social Benefits:</a:t>
-            </a:r>
-          </a:p>
-          <a:p>
-            <a:pPr>
-              <a:defRPr sz="800">
-                <a:solidFill>
-                  <a:srgbClr val="010000"/>
-                </a:solidFill>
-                <a:latin typeface="Arial"/>
-              </a:defRPr>
-            </a:pPr>
-            <a:r>
-              <a:t>• Faster early warning for communities in elephant-prone corridors.</a:t>
-            </a:r>
-          </a:p>
-          <a:p>
-            <a:pPr>
-              <a:defRPr sz="800">
-                <a:solidFill>
-                  <a:srgbClr val="010000"/>
-                </a:solidFill>
-                <a:latin typeface="Arial"/>
-              </a:defRPr>
-            </a:pPr>
-            <a:r>
-              <a:t>• Reduced risk of human casualties, injuries, and surprise encounters.</a:t>
-            </a:r>
-          </a:p>
-          <a:p>
-            <a:pPr>
-              <a:defRPr sz="800">
-                <a:solidFill>
-                  <a:srgbClr val="010000"/>
-                </a:solidFill>
-                <a:latin typeface="Arial"/>
-              </a:defRPr>
-            </a:pPr>
-            <a:r>
-              <a:t>• Protects crops and rural property from devastating nocturnal raids.</a:t>
-            </a:r>
-          </a:p>
-          <a:p>
-            <a:pPr>
-              <a:defRPr sz="800">
-                <a:solidFill>
-                  <a:srgbClr val="010000"/>
-                </a:solidFill>
-                <a:latin typeface="Arial"/>
-              </a:defRPr>
-            </a:pPr>
-            <a:r>
-              <a:t>• Accessible warning via multiple channels (app, audible siren, SMS).</a:t>
-            </a:r>
-          </a:p>
-          <a:p>
-            <a:pPr>
-              <a:defRPr sz="800">
-                <a:solidFill>
-                  <a:srgbClr val="010000"/>
-                </a:solidFill>
-                <a:latin typeface="Arial"/>
-              </a:defRPr>
-            </a:pPr>
-            <a:r>
-              <a:t>• Strengthened coordination between citizens and Forest Department.</a:t>
+              <a:t>•  Social Benefits:</a:t>
+            </a:r>
+            <a:br/>
+            <a:r>
+              <a:rPr sz="1650" b="0">
+                <a:solidFill>
+                  <a:srgbClr val="0F172A"/>
+                </a:solidFill>
+                <a:latin typeface="Arial"/>
+              </a:rPr>
+              <a:t>   Faster early warning reduces human injuries &amp; deaths. Protects crops and property. Multi-channel alerts (app, siren, SMS).</a:t>
             </a:r>
           </a:p>
           <a:p>
             <a:pPr>
               <a:spcBef>
-                <a:spcPts val="300"/>
+                <a:spcPts val="400"/>
               </a:spcBef>
-              <a:defRPr sz="1000" b="1">
+              <a:defRPr sz="1750" b="1">
                 <a:solidFill>
                   <a:srgbClr val="1F497D"/>
                 </a:solidFill>
@@ -11065,67 +10738,25 @@
               </a:defRPr>
             </a:pPr>
             <a:r>
-              <a:t>Technical Benefits:</a:t>
-            </a:r>
-          </a:p>
-          <a:p>
-            <a:pPr>
-              <a:defRPr sz="800">
-                <a:solidFill>
-                  <a:srgbClr val="010000"/>
-                </a:solidFill>
-                <a:latin typeface="Arial"/>
-              </a:defRPr>
-            </a:pPr>
-            <a:r>
-              <a:t>• Demonstrates practical real-world edge AI vision for wildlife safety.</a:t>
-            </a:r>
-          </a:p>
-          <a:p>
-            <a:pPr>
-              <a:defRPr sz="800">
-                <a:solidFill>
-                  <a:srgbClr val="010000"/>
-                </a:solidFill>
-                <a:latin typeface="Arial"/>
-              </a:defRPr>
-            </a:pPr>
-            <a:r>
-              <a:t>• Combines on-device AI, GPS proximity, risk scoring, and GIS mapping.</a:t>
-            </a:r>
-          </a:p>
-          <a:p>
-            <a:pPr>
-              <a:defRPr sz="800">
-                <a:solidFill>
-                  <a:srgbClr val="010000"/>
-                </a:solidFill>
-                <a:latin typeface="Arial"/>
-              </a:defRPr>
-            </a:pPr>
-            <a:r>
-              <a:t>• Centralized incident and alert management with audit logging.</a:t>
-            </a:r>
-          </a:p>
-          <a:p>
-            <a:pPr>
-              <a:defRPr sz="800">
-                <a:solidFill>
-                  <a:srgbClr val="010000"/>
-                </a:solidFill>
-                <a:latin typeface="Arial"/>
-              </a:defRPr>
-            </a:pPr>
-            <a:r>
-              <a:t>• Reusable framework adaptable to other conflicts (tigers, leopards, boars).</a:t>
+              <a:t>•  Technical Benefits:</a:t>
+            </a:r>
+            <a:br/>
+            <a:r>
+              <a:rPr sz="1650" b="0">
+                <a:solidFill>
+                  <a:srgbClr val="0F172A"/>
+                </a:solidFill>
+                <a:latin typeface="Arial"/>
+              </a:rPr>
+              <a:t>   Demonstrates practical on-device edge AI. Combines AI, GPS, DMRS risk &amp; GIS. Reusable for tigers &amp; leopards.</a:t>
             </a:r>
           </a:p>
           <a:p>
             <a:pPr>
               <a:spcBef>
-                <a:spcPts val="300"/>
+                <a:spcPts val="400"/>
               </a:spcBef>
-              <a:defRPr sz="1000" b="1">
+              <a:defRPr sz="1750" b="1">
                 <a:solidFill>
                   <a:srgbClr val="1F497D"/>
                 </a:solidFill>
@@ -11133,46 +10764,17 @@
               </a:defRPr>
             </a:pPr>
             <a:r>
-              <a:t>Environmental Benefits:</a:t>
-            </a:r>
-          </a:p>
-          <a:p>
-            <a:pPr>
-              <a:defRPr sz="800">
-                <a:solidFill>
-                  <a:srgbClr val="010000"/>
-                </a:solidFill>
-                <a:latin typeface="Arial"/>
-              </a:defRPr>
-            </a:pPr>
-            <a:r>
-              <a:t>• Supports non-invasive wildlife monitoring without disturbing natural movement.</a:t>
-            </a:r>
-          </a:p>
-          <a:p>
-            <a:pPr>
-              <a:defRPr sz="800">
-                <a:solidFill>
-                  <a:srgbClr val="010000"/>
-                </a:solidFill>
-                <a:latin typeface="Arial"/>
-              </a:defRPr>
-            </a:pPr>
-            <a:r>
-              <a:t>• Helps prevent retaliatory elephant killing, electrocution, and poisoning.</a:t>
-            </a:r>
-          </a:p>
-          <a:p>
-            <a:pPr>
-              <a:defRPr sz="800">
-                <a:solidFill>
-                  <a:srgbClr val="010000"/>
-                </a:solidFill>
-                <a:latin typeface="Arial"/>
-              </a:defRPr>
-            </a:pPr>
-            <a:r>
-              <a:t>• Provides historical data for corridor identification and conservation planning.</a:t>
+              <a:t>•  Environmental Benefits:</a:t>
+            </a:r>
+            <a:br/>
+            <a:r>
+              <a:rPr sz="1650" b="0">
+                <a:solidFill>
+                  <a:srgbClr val="0F172A"/>
+                </a:solidFill>
+                <a:latin typeface="Arial"/>
+              </a:rPr>
+              <a:t>   Non-invasive monitoring without disturbing elephants. Reduces retaliatory killing. Supports data-driven conservation.</a:t>
             </a:r>
           </a:p>
         </p:txBody>
@@ -11192,7 +10794,7 @@
         <p:spPr>
           <a:xfrm>
             <a:off x="6400800" y="1051560"/>
-            <a:ext cx="5394960" cy="5120640"/>
+            <a:ext cx="5394960" cy="5303520"/>
           </a:xfrm>
           <a:prstGeom prst="rect">
             <a:avLst/>
@@ -11207,11 +10809,11 @@
           <a:p>
             <a:pPr marL="342900" indent="-342900">
               <a:spcAft>
-                <a:spcPts val="400"/>
+                <a:spcPts val="800"/>
               </a:spcAft>
               <a:buFont typeface="Wingdings" panose="05000000000000000000" pitchFamily="2" charset="2"/>
               <a:buChar char="Ø"/>
-              <a:defRPr sz="2000" b="1">
+              <a:defRPr sz="2400" b="1">
                 <a:solidFill>
                   <a:srgbClr val="1F497D"/>
                 </a:solidFill>
@@ -11226,7 +10828,504 @@
       </p:sp>
       <p:sp>
         <p:nvSpPr>
-          <p:cNvPr id="17410" name="Rounded Rectangle 17409"/>
+          <p:cNvPr id="17411" name="TextBox 17410"/>
+          <p:cNvSpPr txBox="1"/>
+          <p:nvPr/>
+        </p:nvSpPr>
+        <p:spPr>
+          <a:xfrm>
+            <a:off x="6492240" y="1554480"/>
+            <a:ext cx="5212080" cy="274320"/>
+          </a:xfrm>
+          <a:prstGeom prst="rect">
+            <a:avLst/>
+          </a:prstGeom>
+          <a:noFill/>
+        </p:spPr>
+        <p:txBody>
+          <a:bodyPr wrap="none">
+            <a:spAutoFit/>
+          </a:bodyPr>
+          <a:lstStyle/>
+          <a:p>
+            <a:pPr>
+              <a:defRPr sz="950" b="1">
+                <a:solidFill>
+                  <a:srgbClr val="1F497D"/>
+                </a:solidFill>
+                <a:latin typeface="Arial"/>
+              </a:defRPr>
+            </a:pPr>
+            <a:r>
+              <a:t>1. IMPACT &amp; INTERVENTION PIPELINE</a:t>
+            </a:r>
+          </a:p>
+        </p:txBody>
+      </p:sp>
+      <p:sp>
+        <p:nvSpPr>
+          <p:cNvPr id="17413" name="TextBox 17412"/>
+          <p:cNvSpPr txBox="1"/>
+          <p:nvPr/>
+        </p:nvSpPr>
+        <p:spPr>
+          <a:xfrm>
+            <a:off x="6537960" y="1874519"/>
+            <a:ext cx="960120" cy="457200"/>
+          </a:xfrm>
+          <a:prstGeom prst="rect">
+            <a:avLst/>
+          </a:prstGeom>
+          <a:noFill/>
+        </p:spPr>
+        <p:txBody>
+          <a:bodyPr wrap="square" lIns="36576" tIns="36576" rIns="36576" bIns="36576">
+            <a:spAutoFit/>
+          </a:bodyPr>
+          <a:lstStyle/>
+          <a:p>
+            <a:pPr algn="ctr">
+              <a:defRPr sz="850" b="1">
+                <a:solidFill>
+                  <a:srgbClr val="064E3B"/>
+                </a:solidFill>
+                <a:latin typeface="Arial"/>
+              </a:defRPr>
+            </a:pPr>
+            <a:r>
+              <a:t>EARLY DETECTION</a:t>
+            </a:r>
+          </a:p>
+        </p:txBody>
+      </p:sp>
+      <p:sp>
+        <p:nvSpPr>
+          <p:cNvPr id="17416" name="TextBox 17415"/>
+          <p:cNvSpPr txBox="1"/>
+          <p:nvPr/>
+        </p:nvSpPr>
+        <p:spPr>
+          <a:xfrm>
+            <a:off x="7562088" y="1874519"/>
+            <a:ext cx="960120" cy="457200"/>
+          </a:xfrm>
+          <a:prstGeom prst="rect">
+            <a:avLst/>
+          </a:prstGeom>
+          <a:noFill/>
+        </p:spPr>
+        <p:txBody>
+          <a:bodyPr wrap="square" lIns="36576" tIns="36576" rIns="36576" bIns="36576">
+            <a:spAutoFit/>
+          </a:bodyPr>
+          <a:lstStyle/>
+          <a:p>
+            <a:pPr algn="ctr">
+              <a:defRPr sz="850" b="1">
+                <a:solidFill>
+                  <a:srgbClr val="064E3B"/>
+                </a:solidFill>
+                <a:latin typeface="Arial"/>
+              </a:defRPr>
+            </a:pPr>
+            <a:r>
+              <a:t>EARLY WARNING</a:t>
+            </a:r>
+          </a:p>
+        </p:txBody>
+      </p:sp>
+      <p:sp>
+        <p:nvSpPr>
+          <p:cNvPr id="17419" name="TextBox 17418"/>
+          <p:cNvSpPr txBox="1"/>
+          <p:nvPr/>
+        </p:nvSpPr>
+        <p:spPr>
+          <a:xfrm>
+            <a:off x="8586216" y="1874519"/>
+            <a:ext cx="960120" cy="457200"/>
+          </a:xfrm>
+          <a:prstGeom prst="rect">
+            <a:avLst/>
+          </a:prstGeom>
+          <a:noFill/>
+        </p:spPr>
+        <p:txBody>
+          <a:bodyPr wrap="square" lIns="36576" tIns="36576" rIns="36576" bIns="36576">
+            <a:spAutoFit/>
+          </a:bodyPr>
+          <a:lstStyle/>
+          <a:p>
+            <a:pPr algn="ctr">
+              <a:defRPr sz="850" b="1">
+                <a:solidFill>
+                  <a:srgbClr val="064E3B"/>
+                </a:solidFill>
+                <a:latin typeface="Arial"/>
+              </a:defRPr>
+            </a:pPr>
+            <a:r>
+              <a:t>FASTER RESPONSE</a:t>
+            </a:r>
+          </a:p>
+        </p:txBody>
+      </p:sp>
+      <p:sp>
+        <p:nvSpPr>
+          <p:cNvPr id="17422" name="TextBox 17421"/>
+          <p:cNvSpPr txBox="1"/>
+          <p:nvPr/>
+        </p:nvSpPr>
+        <p:spPr>
+          <a:xfrm>
+            <a:off x="9610344" y="1874519"/>
+            <a:ext cx="960120" cy="457200"/>
+          </a:xfrm>
+          <a:prstGeom prst="rect">
+            <a:avLst/>
+          </a:prstGeom>
+          <a:noFill/>
+        </p:spPr>
+        <p:txBody>
+          <a:bodyPr wrap="square" lIns="36576" tIns="36576" rIns="36576" bIns="36576">
+            <a:spAutoFit/>
+          </a:bodyPr>
+          <a:lstStyle/>
+          <a:p>
+            <a:pPr algn="ctr">
+              <a:defRPr sz="850" b="1">
+                <a:solidFill>
+                  <a:srgbClr val="064E3B"/>
+                </a:solidFill>
+                <a:latin typeface="Arial"/>
+              </a:defRPr>
+            </a:pPr>
+            <a:r>
+              <a:t>LOWER CONFLICT</a:t>
+            </a:r>
+          </a:p>
+        </p:txBody>
+      </p:sp>
+      <p:sp>
+        <p:nvSpPr>
+          <p:cNvPr id="17425" name="TextBox 17424"/>
+          <p:cNvSpPr txBox="1"/>
+          <p:nvPr/>
+        </p:nvSpPr>
+        <p:spPr>
+          <a:xfrm>
+            <a:off x="10634472" y="1874519"/>
+            <a:ext cx="960120" cy="457200"/>
+          </a:xfrm>
+          <a:prstGeom prst="rect">
+            <a:avLst/>
+          </a:prstGeom>
+          <a:noFill/>
+        </p:spPr>
+        <p:txBody>
+          <a:bodyPr wrap="square" lIns="36576" tIns="36576" rIns="36576" bIns="36576">
+            <a:spAutoFit/>
+          </a:bodyPr>
+          <a:lstStyle/>
+          <a:p>
+            <a:pPr algn="ctr">
+              <a:defRPr sz="850" b="1">
+                <a:solidFill>
+                  <a:srgbClr val="064E3B"/>
+                </a:solidFill>
+                <a:latin typeface="Arial"/>
+              </a:defRPr>
+            </a:pPr>
+            <a:r>
+              <a:t>CONSERVATION</a:t>
+            </a:r>
+          </a:p>
+        </p:txBody>
+      </p:sp>
+      <p:sp>
+        <p:nvSpPr>
+          <p:cNvPr id="17426" name="TextBox 17425"/>
+          <p:cNvSpPr txBox="1"/>
+          <p:nvPr/>
+        </p:nvSpPr>
+        <p:spPr>
+          <a:xfrm>
+            <a:off x="6492240" y="2514600"/>
+            <a:ext cx="5212080" cy="274320"/>
+          </a:xfrm>
+          <a:prstGeom prst="rect">
+            <a:avLst/>
+          </a:prstGeom>
+          <a:noFill/>
+        </p:spPr>
+        <p:txBody>
+          <a:bodyPr wrap="none">
+            <a:spAutoFit/>
+          </a:bodyPr>
+          <a:lstStyle/>
+          <a:p>
+            <a:pPr>
+              <a:defRPr sz="950" b="1">
+                <a:solidFill>
+                  <a:srgbClr val="1F497D"/>
+                </a:solidFill>
+                <a:latin typeface="Arial"/>
+              </a:defRPr>
+            </a:pPr>
+            <a:r>
+              <a:t>2. SIH COLLABORATIVE PROBLEM-SOLVING CYCLE</a:t>
+            </a:r>
+          </a:p>
+        </p:txBody>
+      </p:sp>
+      <p:sp>
+        <p:nvSpPr>
+          <p:cNvPr id="17428" name="TextBox 17427"/>
+          <p:cNvSpPr txBox="1"/>
+          <p:nvPr/>
+        </p:nvSpPr>
+        <p:spPr>
+          <a:xfrm>
+            <a:off x="6675120" y="2834640"/>
+            <a:ext cx="4846320" cy="502920"/>
+          </a:xfrm>
+          <a:prstGeom prst="rect">
+            <a:avLst/>
+          </a:prstGeom>
+          <a:noFill/>
+        </p:spPr>
+        <p:txBody>
+          <a:bodyPr wrap="square" lIns="36576" tIns="36576" rIns="36576" bIns="36576">
+            <a:spAutoFit/>
+          </a:bodyPr>
+          <a:lstStyle/>
+          <a:p>
+            <a:pPr algn="ctr">
+              <a:defRPr sz="850" b="1">
+                <a:solidFill>
+                  <a:srgbClr val="1F497D"/>
+                </a:solidFill>
+                <a:latin typeface="Arial"/>
+              </a:defRPr>
+            </a:pPr>
+            <a:r>
+              <a:t>1. CITIZEN / CAMERA REPORT</a:t>
+            </a:r>
+          </a:p>
+          <a:p>
+            <a:pPr algn="ctr">
+              <a:defRPr sz="700">
+                <a:solidFill>
+                  <a:srgbClr val="334155"/>
+                </a:solidFill>
+                <a:latin typeface="Arial"/>
+              </a:defRPr>
+            </a:pPr>
+            <a:r>
+              <a:t>Sighting detected &amp; geo-tagged</a:t>
+            </a:r>
+          </a:p>
+        </p:txBody>
+      </p:sp>
+      <p:sp>
+        <p:nvSpPr>
+          <p:cNvPr id="17431" name="TextBox 17430"/>
+          <p:cNvSpPr txBox="1"/>
+          <p:nvPr/>
+        </p:nvSpPr>
+        <p:spPr>
+          <a:xfrm>
+            <a:off x="6675120" y="3456432"/>
+            <a:ext cx="4846320" cy="502920"/>
+          </a:xfrm>
+          <a:prstGeom prst="rect">
+            <a:avLst/>
+          </a:prstGeom>
+          <a:noFill/>
+        </p:spPr>
+        <p:txBody>
+          <a:bodyPr wrap="square" lIns="36576" tIns="36576" rIns="36576" bIns="36576">
+            <a:spAutoFit/>
+          </a:bodyPr>
+          <a:lstStyle/>
+          <a:p>
+            <a:pPr algn="ctr">
+              <a:defRPr sz="850" b="1">
+                <a:solidFill>
+                  <a:srgbClr val="1F497D"/>
+                </a:solidFill>
+                <a:latin typeface="Arial"/>
+              </a:defRPr>
+            </a:pPr>
+            <a:r>
+              <a:t>2. INCIDENT VERIFICATION</a:t>
+            </a:r>
+          </a:p>
+          <a:p>
+            <a:pPr algn="ctr">
+              <a:defRPr sz="700">
+                <a:solidFill>
+                  <a:srgbClr val="334155"/>
+                </a:solidFill>
+                <a:latin typeface="Arial"/>
+              </a:defRPr>
+            </a:pPr>
+            <a:r>
+              <a:t>Forest Dept validates threat</a:t>
+            </a:r>
+          </a:p>
+        </p:txBody>
+      </p:sp>
+      <p:sp>
+        <p:nvSpPr>
+          <p:cNvPr id="17434" name="TextBox 17433"/>
+          <p:cNvSpPr txBox="1"/>
+          <p:nvPr/>
+        </p:nvSpPr>
+        <p:spPr>
+          <a:xfrm>
+            <a:off x="6675120" y="4078224"/>
+            <a:ext cx="4846320" cy="502920"/>
+          </a:xfrm>
+          <a:prstGeom prst="rect">
+            <a:avLst/>
+          </a:prstGeom>
+          <a:noFill/>
+        </p:spPr>
+        <p:txBody>
+          <a:bodyPr wrap="square" lIns="36576" tIns="36576" rIns="36576" bIns="36576">
+            <a:spAutoFit/>
+          </a:bodyPr>
+          <a:lstStyle/>
+          <a:p>
+            <a:pPr algn="ctr">
+              <a:defRPr sz="850" b="1">
+                <a:solidFill>
+                  <a:srgbClr val="1F497D"/>
+                </a:solidFill>
+                <a:latin typeface="Arial"/>
+              </a:defRPr>
+            </a:pPr>
+            <a:r>
+              <a:t>3. CROWDSOURCED CHALLENGE</a:t>
+            </a:r>
+          </a:p>
+          <a:p>
+            <a:pPr algn="ctr">
+              <a:defRPr sz="700">
+                <a:solidFill>
+                  <a:srgbClr val="334155"/>
+                </a:solidFill>
+                <a:latin typeface="Arial"/>
+              </a:defRPr>
+            </a:pPr>
+            <a:r>
+              <a:t>Recurring hotspot published</a:t>
+            </a:r>
+          </a:p>
+        </p:txBody>
+      </p:sp>
+      <p:sp>
+        <p:nvSpPr>
+          <p:cNvPr id="17437" name="TextBox 17436"/>
+          <p:cNvSpPr txBox="1"/>
+          <p:nvPr/>
+        </p:nvSpPr>
+        <p:spPr>
+          <a:xfrm>
+            <a:off x="6675120" y="4700016"/>
+            <a:ext cx="4846320" cy="502920"/>
+          </a:xfrm>
+          <a:prstGeom prst="rect">
+            <a:avLst/>
+          </a:prstGeom>
+          <a:noFill/>
+        </p:spPr>
+        <p:txBody>
+          <a:bodyPr wrap="square" lIns="36576" tIns="36576" rIns="36576" bIns="36576">
+            <a:spAutoFit/>
+          </a:bodyPr>
+          <a:lstStyle/>
+          <a:p>
+            <a:pPr algn="ctr">
+              <a:defRPr sz="850" b="1">
+                <a:solidFill>
+                  <a:srgbClr val="1F497D"/>
+                </a:solidFill>
+                <a:latin typeface="Arial"/>
+              </a:defRPr>
+            </a:pPr>
+            <a:r>
+              <a:t>4. UNIVERSITY / INDUSTRY</a:t>
+            </a:r>
+          </a:p>
+          <a:p>
+            <a:pPr algn="ctr">
+              <a:defRPr sz="700">
+                <a:solidFill>
+                  <a:srgbClr val="334155"/>
+                </a:solidFill>
+                <a:latin typeface="Arial"/>
+              </a:defRPr>
+            </a:pPr>
+            <a:r>
+              <a:t>IITs, NITs &amp; startups propose fixes</a:t>
+            </a:r>
+          </a:p>
+        </p:txBody>
+      </p:sp>
+      <p:sp>
+        <p:nvSpPr>
+          <p:cNvPr id="17440" name="TextBox 17439"/>
+          <p:cNvSpPr txBox="1"/>
+          <p:nvPr/>
+        </p:nvSpPr>
+        <p:spPr>
+          <a:xfrm>
+            <a:off x="6675120" y="5321808"/>
+            <a:ext cx="4846320" cy="502920"/>
+          </a:xfrm>
+          <a:prstGeom prst="rect">
+            <a:avLst/>
+          </a:prstGeom>
+          <a:noFill/>
+        </p:spPr>
+        <p:txBody>
+          <a:bodyPr wrap="square" lIns="36576" tIns="36576" rIns="36576" bIns="36576">
+            <a:spAutoFit/>
+          </a:bodyPr>
+          <a:lstStyle/>
+          <a:p>
+            <a:pPr algn="ctr">
+              <a:defRPr sz="850" b="1">
+                <a:solidFill>
+                  <a:srgbClr val="1F497D"/>
+                </a:solidFill>
+                <a:latin typeface="Arial"/>
+              </a:defRPr>
+            </a:pPr>
+            <a:r>
+              <a:t>5. FIELD TESTING &amp; SOLUTION</a:t>
+            </a:r>
+          </a:p>
+          <a:p>
+            <a:pPr algn="ctr">
+              <a:defRPr sz="700">
+                <a:solidFill>
+                  <a:srgbClr val="334155"/>
+                </a:solidFill>
+                <a:latin typeface="Arial"/>
+              </a:defRPr>
+            </a:pPr>
+            <a:r>
+              <a:t>Pilot deployment &amp; conflict resolution</a:t>
+            </a:r>
+          </a:p>
+        </p:txBody>
+      </p:sp>
+      <p:sp>
+        <p:nvSpPr>
+          <p:cNvPr id="17441" name="Rounded Rectangle 17440"/>
           <p:cNvSpPr/>
           <p:nvPr/>
         </p:nvSpPr>
@@ -11241,7 +11340,7 @@
           <a:solidFill>
             <a:srgbClr val="F8FAFC"/>
           </a:solidFill>
-          <a:ln w="12700">
+          <a:ln w="19050">
             <a:solidFill>
               <a:srgbClr val="1F497D"/>
             </a:solidFill>
@@ -11271,14 +11370,14 @@
       </p:sp>
       <p:sp>
         <p:nvSpPr>
-          <p:cNvPr id="17411" name="TextBox 17410"/>
+          <p:cNvPr id="17442" name="TextBox 17441"/>
           <p:cNvSpPr txBox="1"/>
           <p:nvPr/>
         </p:nvSpPr>
         <p:spPr>
           <a:xfrm>
             <a:off x="6492240" y="1554480"/>
-            <a:ext cx="5212080" cy="274320"/>
+            <a:ext cx="5212080" cy="320040"/>
           </a:xfrm>
           <a:prstGeom prst="rect">
             <a:avLst/>
@@ -11292,7 +11391,7 @@
           <a:lstStyle/>
           <a:p>
             <a:pPr>
-              <a:defRPr sz="950" b="1">
+              <a:defRPr sz="1200" b="1">
                 <a:solidFill>
                   <a:srgbClr val="1F497D"/>
                 </a:solidFill>
@@ -11307,14 +11406,14 @@
       </p:sp>
       <p:sp>
         <p:nvSpPr>
-          <p:cNvPr id="17412" name="Rounded Rectangle 17411"/>
+          <p:cNvPr id="17443" name="Rounded Rectangle 17442"/>
           <p:cNvSpPr/>
           <p:nvPr/>
         </p:nvSpPr>
         <p:spPr>
           <a:xfrm>
-            <a:off x="6537960" y="1874519"/>
-            <a:ext cx="960120" cy="457200"/>
+            <a:off x="6537960" y="1920240"/>
+            <a:ext cx="960120" cy="502920"/>
           </a:xfrm>
           <a:prstGeom prst="roundRect">
             <a:avLst/>
@@ -11322,7 +11421,7 @@
           <a:solidFill>
             <a:srgbClr val="FFFFFF"/>
           </a:solidFill>
-          <a:ln w="12700">
+          <a:ln w="19050">
             <a:solidFill>
               <a:srgbClr val="064E3B"/>
             </a:solidFill>
@@ -11352,14 +11451,14 @@
       </p:sp>
       <p:sp>
         <p:nvSpPr>
-          <p:cNvPr id="17413" name="TextBox 17412"/>
+          <p:cNvPr id="17444" name="TextBox 17443"/>
           <p:cNvSpPr txBox="1"/>
           <p:nvPr/>
         </p:nvSpPr>
         <p:spPr>
           <a:xfrm>
-            <a:off x="6537960" y="1874519"/>
-            <a:ext cx="960120" cy="457200"/>
+            <a:off x="6537960" y="1920240"/>
+            <a:ext cx="960120" cy="502920"/>
           </a:xfrm>
           <a:prstGeom prst="rect">
             <a:avLst/>
@@ -11373,7 +11472,7 @@
           <a:lstStyle/>
           <a:p>
             <a:pPr algn="ctr">
-              <a:defRPr sz="850" b="1">
+              <a:defRPr sz="900" b="1">
                 <a:solidFill>
                   <a:srgbClr val="064E3B"/>
                 </a:solidFill>
@@ -11388,14 +11487,14 @@
       </p:sp>
       <p:sp>
         <p:nvSpPr>
-          <p:cNvPr id="17414" name="Right Arrow 17413"/>
+          <p:cNvPr id="17445" name="Right Arrow 17444"/>
           <p:cNvSpPr/>
           <p:nvPr/>
         </p:nvSpPr>
         <p:spPr>
           <a:xfrm>
-            <a:off x="7516368" y="2011680"/>
-            <a:ext cx="73152" cy="137160"/>
+            <a:off x="7516368" y="2084831"/>
+            <a:ext cx="73152" cy="164592"/>
           </a:xfrm>
           <a:prstGeom prst="rightArrow">
             <a:avLst/>
@@ -11431,14 +11530,14 @@
       </p:sp>
       <p:sp>
         <p:nvSpPr>
-          <p:cNvPr id="17415" name="Rounded Rectangle 17414"/>
+          <p:cNvPr id="17446" name="Rounded Rectangle 17445"/>
           <p:cNvSpPr/>
           <p:nvPr/>
         </p:nvSpPr>
         <p:spPr>
           <a:xfrm>
-            <a:off x="7562088" y="1874519"/>
-            <a:ext cx="960120" cy="457200"/>
+            <a:off x="7562088" y="1920240"/>
+            <a:ext cx="960120" cy="502920"/>
           </a:xfrm>
           <a:prstGeom prst="roundRect">
             <a:avLst/>
@@ -11446,7 +11545,7 @@
           <a:solidFill>
             <a:srgbClr val="FFFFFF"/>
           </a:solidFill>
-          <a:ln w="12700">
+          <a:ln w="19050">
             <a:solidFill>
               <a:srgbClr val="064E3B"/>
             </a:solidFill>
@@ -11476,14 +11575,14 @@
       </p:sp>
       <p:sp>
         <p:nvSpPr>
-          <p:cNvPr id="17416" name="TextBox 17415"/>
+          <p:cNvPr id="17447" name="TextBox 17446"/>
           <p:cNvSpPr txBox="1"/>
           <p:nvPr/>
         </p:nvSpPr>
         <p:spPr>
           <a:xfrm>
-            <a:off x="7562088" y="1874519"/>
-            <a:ext cx="960120" cy="457200"/>
+            <a:off x="7562088" y="1920240"/>
+            <a:ext cx="960120" cy="502920"/>
           </a:xfrm>
           <a:prstGeom prst="rect">
             <a:avLst/>
@@ -11497,7 +11596,7 @@
           <a:lstStyle/>
           <a:p>
             <a:pPr algn="ctr">
-              <a:defRPr sz="850" b="1">
+              <a:defRPr sz="900" b="1">
                 <a:solidFill>
                   <a:srgbClr val="064E3B"/>
                 </a:solidFill>
@@ -11512,14 +11611,14 @@
       </p:sp>
       <p:sp>
         <p:nvSpPr>
-          <p:cNvPr id="17417" name="Right Arrow 17416"/>
+          <p:cNvPr id="17448" name="Right Arrow 17447"/>
           <p:cNvSpPr/>
           <p:nvPr/>
         </p:nvSpPr>
         <p:spPr>
           <a:xfrm>
-            <a:off x="8540496" y="2011680"/>
-            <a:ext cx="73152" cy="137160"/>
+            <a:off x="8540496" y="2084831"/>
+            <a:ext cx="73152" cy="164592"/>
           </a:xfrm>
           <a:prstGeom prst="rightArrow">
             <a:avLst/>
@@ -11555,14 +11654,14 @@
       </p:sp>
       <p:sp>
         <p:nvSpPr>
-          <p:cNvPr id="17418" name="Rounded Rectangle 17417"/>
+          <p:cNvPr id="17449" name="Rounded Rectangle 17448"/>
           <p:cNvSpPr/>
           <p:nvPr/>
         </p:nvSpPr>
         <p:spPr>
           <a:xfrm>
-            <a:off x="8586216" y="1874519"/>
-            <a:ext cx="960120" cy="457200"/>
+            <a:off x="8586216" y="1920240"/>
+            <a:ext cx="960120" cy="502920"/>
           </a:xfrm>
           <a:prstGeom prst="roundRect">
             <a:avLst/>
@@ -11570,7 +11669,7 @@
           <a:solidFill>
             <a:srgbClr val="FFFFFF"/>
           </a:solidFill>
-          <a:ln w="12700">
+          <a:ln w="19050">
             <a:solidFill>
               <a:srgbClr val="064E3B"/>
             </a:solidFill>
@@ -11600,14 +11699,14 @@
       </p:sp>
       <p:sp>
         <p:nvSpPr>
-          <p:cNvPr id="17419" name="TextBox 17418"/>
+          <p:cNvPr id="17450" name="TextBox 17449"/>
           <p:cNvSpPr txBox="1"/>
           <p:nvPr/>
         </p:nvSpPr>
         <p:spPr>
           <a:xfrm>
-            <a:off x="8586216" y="1874519"/>
-            <a:ext cx="960120" cy="457200"/>
+            <a:off x="8586216" y="1920240"/>
+            <a:ext cx="960120" cy="502920"/>
           </a:xfrm>
           <a:prstGeom prst="rect">
             <a:avLst/>
@@ -11621,7 +11720,7 @@
           <a:lstStyle/>
           <a:p>
             <a:pPr algn="ctr">
-              <a:defRPr sz="850" b="1">
+              <a:defRPr sz="900" b="1">
                 <a:solidFill>
                   <a:srgbClr val="064E3B"/>
                 </a:solidFill>
@@ -11636,14 +11735,14 @@
       </p:sp>
       <p:sp>
         <p:nvSpPr>
-          <p:cNvPr id="17420" name="Right Arrow 17419"/>
+          <p:cNvPr id="17451" name="Right Arrow 17450"/>
           <p:cNvSpPr/>
           <p:nvPr/>
         </p:nvSpPr>
         <p:spPr>
           <a:xfrm>
-            <a:off x="9564624" y="2011680"/>
-            <a:ext cx="73152" cy="137160"/>
+            <a:off x="9564624" y="2084831"/>
+            <a:ext cx="73152" cy="164592"/>
           </a:xfrm>
           <a:prstGeom prst="rightArrow">
             <a:avLst/>
@@ -11679,14 +11778,14 @@
       </p:sp>
       <p:sp>
         <p:nvSpPr>
-          <p:cNvPr id="17421" name="Rounded Rectangle 17420"/>
+          <p:cNvPr id="17452" name="Rounded Rectangle 17451"/>
           <p:cNvSpPr/>
           <p:nvPr/>
         </p:nvSpPr>
         <p:spPr>
           <a:xfrm>
-            <a:off x="9610344" y="1874519"/>
-            <a:ext cx="960120" cy="457200"/>
+            <a:off x="9610344" y="1920240"/>
+            <a:ext cx="960120" cy="502920"/>
           </a:xfrm>
           <a:prstGeom prst="roundRect">
             <a:avLst/>
@@ -11694,7 +11793,7 @@
           <a:solidFill>
             <a:srgbClr val="FFFFFF"/>
           </a:solidFill>
-          <a:ln w="12700">
+          <a:ln w="19050">
             <a:solidFill>
               <a:srgbClr val="064E3B"/>
             </a:solidFill>
@@ -11724,14 +11823,14 @@
       </p:sp>
       <p:sp>
         <p:nvSpPr>
-          <p:cNvPr id="17422" name="TextBox 17421"/>
+          <p:cNvPr id="17453" name="TextBox 17452"/>
           <p:cNvSpPr txBox="1"/>
           <p:nvPr/>
         </p:nvSpPr>
         <p:spPr>
           <a:xfrm>
-            <a:off x="9610344" y="1874519"/>
-            <a:ext cx="960120" cy="457200"/>
+            <a:off x="9610344" y="1920240"/>
+            <a:ext cx="960120" cy="502920"/>
           </a:xfrm>
           <a:prstGeom prst="rect">
             <a:avLst/>
@@ -11745,7 +11844,7 @@
           <a:lstStyle/>
           <a:p>
             <a:pPr algn="ctr">
-              <a:defRPr sz="850" b="1">
+              <a:defRPr sz="900" b="1">
                 <a:solidFill>
                   <a:srgbClr val="064E3B"/>
                 </a:solidFill>
@@ -11760,14 +11859,14 @@
       </p:sp>
       <p:sp>
         <p:nvSpPr>
-          <p:cNvPr id="17423" name="Right Arrow 17422"/>
+          <p:cNvPr id="17454" name="Right Arrow 17453"/>
           <p:cNvSpPr/>
           <p:nvPr/>
         </p:nvSpPr>
         <p:spPr>
           <a:xfrm>
-            <a:off x="10588752" y="2011680"/>
-            <a:ext cx="73152" cy="137160"/>
+            <a:off x="10588752" y="2084831"/>
+            <a:ext cx="73152" cy="164592"/>
           </a:xfrm>
           <a:prstGeom prst="rightArrow">
             <a:avLst/>
@@ -11803,14 +11902,14 @@
       </p:sp>
       <p:sp>
         <p:nvSpPr>
-          <p:cNvPr id="17424" name="Rounded Rectangle 17423"/>
+          <p:cNvPr id="17455" name="Rounded Rectangle 17454"/>
           <p:cNvSpPr/>
           <p:nvPr/>
         </p:nvSpPr>
         <p:spPr>
           <a:xfrm>
-            <a:off x="10634472" y="1874519"/>
-            <a:ext cx="960120" cy="457200"/>
+            <a:off x="10634472" y="1920240"/>
+            <a:ext cx="960120" cy="502920"/>
           </a:xfrm>
           <a:prstGeom prst="roundRect">
             <a:avLst/>
@@ -11818,7 +11917,7 @@
           <a:solidFill>
             <a:srgbClr val="FFFFFF"/>
           </a:solidFill>
-          <a:ln w="12700">
+          <a:ln w="19050">
             <a:solidFill>
               <a:srgbClr val="064E3B"/>
             </a:solidFill>
@@ -11848,14 +11947,14 @@
       </p:sp>
       <p:sp>
         <p:nvSpPr>
-          <p:cNvPr id="17425" name="TextBox 17424"/>
+          <p:cNvPr id="17456" name="TextBox 17455"/>
           <p:cNvSpPr txBox="1"/>
           <p:nvPr/>
         </p:nvSpPr>
         <p:spPr>
           <a:xfrm>
-            <a:off x="10634472" y="1874519"/>
-            <a:ext cx="960120" cy="457200"/>
+            <a:off x="10634472" y="1920240"/>
+            <a:ext cx="960120" cy="502920"/>
           </a:xfrm>
           <a:prstGeom prst="rect">
             <a:avLst/>
@@ -11869,7 +11968,7 @@
           <a:lstStyle/>
           <a:p>
             <a:pPr algn="ctr">
-              <a:defRPr sz="850" b="1">
+              <a:defRPr sz="900" b="1">
                 <a:solidFill>
                   <a:srgbClr val="064E3B"/>
                 </a:solidFill>
@@ -11884,14 +11983,14 @@
       </p:sp>
       <p:sp>
         <p:nvSpPr>
-          <p:cNvPr id="17426" name="TextBox 17425"/>
+          <p:cNvPr id="17457" name="TextBox 17456"/>
           <p:cNvSpPr txBox="1"/>
           <p:nvPr/>
         </p:nvSpPr>
         <p:spPr>
           <a:xfrm>
-            <a:off x="6492240" y="2514600"/>
-            <a:ext cx="5212080" cy="274320"/>
+            <a:off x="6492240" y="2560320"/>
+            <a:ext cx="5212080" cy="320040"/>
           </a:xfrm>
           <a:prstGeom prst="rect">
             <a:avLst/>
@@ -11905,7 +12004,7 @@
           <a:lstStyle/>
           <a:p>
             <a:pPr>
-              <a:defRPr sz="950" b="1">
+              <a:defRPr sz="1200" b="1">
                 <a:solidFill>
                   <a:srgbClr val="1F497D"/>
                 </a:solidFill>
@@ -11920,13 +12019,13 @@
       </p:sp>
       <p:sp>
         <p:nvSpPr>
-          <p:cNvPr id="17427" name="Rounded Rectangle 17426"/>
+          <p:cNvPr id="17458" name="Rounded Rectangle 17457"/>
           <p:cNvSpPr/>
           <p:nvPr/>
         </p:nvSpPr>
         <p:spPr>
           <a:xfrm>
-            <a:off x="6675120" y="2834640"/>
+            <a:off x="6675120" y="2926080"/>
             <a:ext cx="4846320" cy="502920"/>
           </a:xfrm>
           <a:prstGeom prst="roundRect">
@@ -11935,7 +12034,7 @@
           <a:solidFill>
             <a:srgbClr val="FFFFFF"/>
           </a:solidFill>
-          <a:ln w="12700">
+          <a:ln w="19050">
             <a:solidFill>
               <a:srgbClr val="1F497D"/>
             </a:solidFill>
@@ -11965,13 +12064,13 @@
       </p:sp>
       <p:sp>
         <p:nvSpPr>
-          <p:cNvPr id="17428" name="TextBox 17427"/>
+          <p:cNvPr id="17459" name="TextBox 17458"/>
           <p:cNvSpPr txBox="1"/>
           <p:nvPr/>
         </p:nvSpPr>
         <p:spPr>
           <a:xfrm>
-            <a:off x="6675120" y="2834640"/>
+            <a:off x="6675120" y="2926080"/>
             <a:ext cx="4846320" cy="502920"/>
           </a:xfrm>
           <a:prstGeom prst="rect">
@@ -11986,7 +12085,7 @@
           <a:lstStyle/>
           <a:p>
             <a:pPr algn="ctr">
-              <a:defRPr sz="850" b="1">
+              <a:defRPr sz="1100" b="1">
                 <a:solidFill>
                   <a:srgbClr val="1F497D"/>
                 </a:solidFill>
@@ -11999,9 +12098,9 @@
           </a:p>
           <a:p>
             <a:pPr algn="ctr">
-              <a:defRPr sz="700">
-                <a:solidFill>
-                  <a:srgbClr val="334155"/>
+              <a:defRPr sz="950">
+                <a:solidFill>
+                  <a:srgbClr val="0F172A"/>
                 </a:solidFill>
                 <a:latin typeface="Arial"/>
               </a:defRPr>
@@ -12014,13 +12113,13 @@
       </p:sp>
       <p:sp>
         <p:nvSpPr>
-          <p:cNvPr id="17429" name="Down Arrow 17428"/>
+          <p:cNvPr id="17460" name="Down Arrow 17459"/>
           <p:cNvSpPr/>
           <p:nvPr/>
         </p:nvSpPr>
         <p:spPr>
           <a:xfrm>
-            <a:off x="9006840" y="3337560"/>
+            <a:off x="9006840" y="3429000"/>
             <a:ext cx="109728" cy="91440"/>
           </a:xfrm>
           <a:prstGeom prst="downArrow">
@@ -12057,13 +12156,13 @@
       </p:sp>
       <p:sp>
         <p:nvSpPr>
-          <p:cNvPr id="17430" name="Rounded Rectangle 17429"/>
+          <p:cNvPr id="17461" name="Rounded Rectangle 17460"/>
           <p:cNvSpPr/>
           <p:nvPr/>
         </p:nvSpPr>
         <p:spPr>
           <a:xfrm>
-            <a:off x="6675120" y="3456432"/>
+            <a:off x="6675120" y="3529584"/>
             <a:ext cx="4846320" cy="502920"/>
           </a:xfrm>
           <a:prstGeom prst="roundRect">
@@ -12072,7 +12171,7 @@
           <a:solidFill>
             <a:srgbClr val="FFFFFF"/>
           </a:solidFill>
-          <a:ln w="12700">
+          <a:ln w="19050">
             <a:solidFill>
               <a:srgbClr val="1F497D"/>
             </a:solidFill>
@@ -12102,13 +12201,13 @@
       </p:sp>
       <p:sp>
         <p:nvSpPr>
-          <p:cNvPr id="17431" name="TextBox 17430"/>
+          <p:cNvPr id="17462" name="TextBox 17461"/>
           <p:cNvSpPr txBox="1"/>
           <p:nvPr/>
         </p:nvSpPr>
         <p:spPr>
           <a:xfrm>
-            <a:off x="6675120" y="3456432"/>
+            <a:off x="6675120" y="3529584"/>
             <a:ext cx="4846320" cy="502920"/>
           </a:xfrm>
           <a:prstGeom prst="rect">
@@ -12123,7 +12222,7 @@
           <a:lstStyle/>
           <a:p>
             <a:pPr algn="ctr">
-              <a:defRPr sz="850" b="1">
+              <a:defRPr sz="1100" b="1">
                 <a:solidFill>
                   <a:srgbClr val="1F497D"/>
                 </a:solidFill>
@@ -12136,9 +12235,9 @@
           </a:p>
           <a:p>
             <a:pPr algn="ctr">
-              <a:defRPr sz="700">
-                <a:solidFill>
-                  <a:srgbClr val="334155"/>
+              <a:defRPr sz="950">
+                <a:solidFill>
+                  <a:srgbClr val="0F172A"/>
                 </a:solidFill>
                 <a:latin typeface="Arial"/>
               </a:defRPr>
@@ -12151,13 +12250,13 @@
       </p:sp>
       <p:sp>
         <p:nvSpPr>
-          <p:cNvPr id="17432" name="Down Arrow 17431"/>
+          <p:cNvPr id="17463" name="Down Arrow 17462"/>
           <p:cNvSpPr/>
           <p:nvPr/>
         </p:nvSpPr>
         <p:spPr>
           <a:xfrm>
-            <a:off x="9006840" y="3959352"/>
+            <a:off x="9006840" y="4032504"/>
             <a:ext cx="109728" cy="91440"/>
           </a:xfrm>
           <a:prstGeom prst="downArrow">
@@ -12194,13 +12293,13 @@
       </p:sp>
       <p:sp>
         <p:nvSpPr>
-          <p:cNvPr id="17433" name="Rounded Rectangle 17432"/>
+          <p:cNvPr id="17464" name="Rounded Rectangle 17463"/>
           <p:cNvSpPr/>
           <p:nvPr/>
         </p:nvSpPr>
         <p:spPr>
           <a:xfrm>
-            <a:off x="6675120" y="4078224"/>
+            <a:off x="6675120" y="4133088"/>
             <a:ext cx="4846320" cy="502920"/>
           </a:xfrm>
           <a:prstGeom prst="roundRect">
@@ -12209,7 +12308,7 @@
           <a:solidFill>
             <a:srgbClr val="FFFFFF"/>
           </a:solidFill>
-          <a:ln w="12700">
+          <a:ln w="19050">
             <a:solidFill>
               <a:srgbClr val="1F497D"/>
             </a:solidFill>
@@ -12239,13 +12338,13 @@
       </p:sp>
       <p:sp>
         <p:nvSpPr>
-          <p:cNvPr id="17434" name="TextBox 17433"/>
+          <p:cNvPr id="17465" name="TextBox 17464"/>
           <p:cNvSpPr txBox="1"/>
           <p:nvPr/>
         </p:nvSpPr>
         <p:spPr>
           <a:xfrm>
-            <a:off x="6675120" y="4078224"/>
+            <a:off x="6675120" y="4133088"/>
             <a:ext cx="4846320" cy="502920"/>
           </a:xfrm>
           <a:prstGeom prst="rect">
@@ -12260,7 +12359,7 @@
           <a:lstStyle/>
           <a:p>
             <a:pPr algn="ctr">
-              <a:defRPr sz="850" b="1">
+              <a:defRPr sz="1100" b="1">
                 <a:solidFill>
                   <a:srgbClr val="1F497D"/>
                 </a:solidFill>
@@ -12273,9 +12372,9 @@
           </a:p>
           <a:p>
             <a:pPr algn="ctr">
-              <a:defRPr sz="700">
-                <a:solidFill>
-                  <a:srgbClr val="334155"/>
+              <a:defRPr sz="950">
+                <a:solidFill>
+                  <a:srgbClr val="0F172A"/>
                 </a:solidFill>
                 <a:latin typeface="Arial"/>
               </a:defRPr>
@@ -12288,13 +12387,13 @@
       </p:sp>
       <p:sp>
         <p:nvSpPr>
-          <p:cNvPr id="17435" name="Down Arrow 17434"/>
+          <p:cNvPr id="17466" name="Down Arrow 17465"/>
           <p:cNvSpPr/>
           <p:nvPr/>
         </p:nvSpPr>
         <p:spPr>
           <a:xfrm>
-            <a:off x="9006840" y="4581144"/>
+            <a:off x="9006840" y="4636008"/>
             <a:ext cx="109728" cy="91440"/>
           </a:xfrm>
           <a:prstGeom prst="downArrow">
@@ -12331,13 +12430,13 @@
       </p:sp>
       <p:sp>
         <p:nvSpPr>
-          <p:cNvPr id="17436" name="Rounded Rectangle 17435"/>
+          <p:cNvPr id="17467" name="Rounded Rectangle 17466"/>
           <p:cNvSpPr/>
           <p:nvPr/>
         </p:nvSpPr>
         <p:spPr>
           <a:xfrm>
-            <a:off x="6675120" y="4700016"/>
+            <a:off x="6675120" y="4736592"/>
             <a:ext cx="4846320" cy="502920"/>
           </a:xfrm>
           <a:prstGeom prst="roundRect">
@@ -12346,7 +12445,7 @@
           <a:solidFill>
             <a:srgbClr val="FFFFFF"/>
           </a:solidFill>
-          <a:ln w="12700">
+          <a:ln w="19050">
             <a:solidFill>
               <a:srgbClr val="1F497D"/>
             </a:solidFill>
@@ -12376,13 +12475,13 @@
       </p:sp>
       <p:sp>
         <p:nvSpPr>
-          <p:cNvPr id="17437" name="TextBox 17436"/>
+          <p:cNvPr id="17468" name="TextBox 17467"/>
           <p:cNvSpPr txBox="1"/>
           <p:nvPr/>
         </p:nvSpPr>
         <p:spPr>
           <a:xfrm>
-            <a:off x="6675120" y="4700016"/>
+            <a:off x="6675120" y="4736592"/>
             <a:ext cx="4846320" cy="502920"/>
           </a:xfrm>
           <a:prstGeom prst="rect">
@@ -12397,7 +12496,7 @@
           <a:lstStyle/>
           <a:p>
             <a:pPr algn="ctr">
-              <a:defRPr sz="850" b="1">
+              <a:defRPr sz="1100" b="1">
                 <a:solidFill>
                   <a:srgbClr val="1F497D"/>
                 </a:solidFill>
@@ -12410,9 +12509,9 @@
           </a:p>
           <a:p>
             <a:pPr algn="ctr">
-              <a:defRPr sz="700">
-                <a:solidFill>
-                  <a:srgbClr val="334155"/>
+              <a:defRPr sz="950">
+                <a:solidFill>
+                  <a:srgbClr val="0F172A"/>
                 </a:solidFill>
                 <a:latin typeface="Arial"/>
               </a:defRPr>
@@ -12425,13 +12524,13 @@
       </p:sp>
       <p:sp>
         <p:nvSpPr>
-          <p:cNvPr id="17438" name="Down Arrow 17437"/>
+          <p:cNvPr id="17469" name="Down Arrow 17468"/>
           <p:cNvSpPr/>
           <p:nvPr/>
         </p:nvSpPr>
         <p:spPr>
           <a:xfrm>
-            <a:off x="9006840" y="5202936"/>
+            <a:off x="9006840" y="5239512"/>
             <a:ext cx="109728" cy="91440"/>
           </a:xfrm>
           <a:prstGeom prst="downArrow">
@@ -12468,13 +12567,13 @@
       </p:sp>
       <p:sp>
         <p:nvSpPr>
-          <p:cNvPr id="17439" name="Rounded Rectangle 17438"/>
+          <p:cNvPr id="17470" name="Rounded Rectangle 17469"/>
           <p:cNvSpPr/>
           <p:nvPr/>
         </p:nvSpPr>
         <p:spPr>
           <a:xfrm>
-            <a:off x="6675120" y="5321808"/>
+            <a:off x="6675120" y="5340096"/>
             <a:ext cx="4846320" cy="502920"/>
           </a:xfrm>
           <a:prstGeom prst="roundRect">
@@ -12483,7 +12582,7 @@
           <a:solidFill>
             <a:srgbClr val="FFFFFF"/>
           </a:solidFill>
-          <a:ln w="12700">
+          <a:ln w="19050">
             <a:solidFill>
               <a:srgbClr val="1F497D"/>
             </a:solidFill>
@@ -12513,13 +12612,13 @@
       </p:sp>
       <p:sp>
         <p:nvSpPr>
-          <p:cNvPr id="17440" name="TextBox 17439"/>
+          <p:cNvPr id="17471" name="TextBox 17470"/>
           <p:cNvSpPr txBox="1"/>
           <p:nvPr/>
         </p:nvSpPr>
         <p:spPr>
           <a:xfrm>
-            <a:off x="6675120" y="5321808"/>
+            <a:off x="6675120" y="5340096"/>
             <a:ext cx="4846320" cy="502920"/>
           </a:xfrm>
           <a:prstGeom prst="rect">
@@ -12534,7 +12633,7 @@
           <a:lstStyle/>
           <a:p>
             <a:pPr algn="ctr">
-              <a:defRPr sz="850" b="1">
+              <a:defRPr sz="1100" b="1">
                 <a:solidFill>
                   <a:srgbClr val="1F497D"/>
                 </a:solidFill>
@@ -12547,9 +12646,9 @@
           </a:p>
           <a:p>
             <a:pPr algn="ctr">
-              <a:defRPr sz="700">
-                <a:solidFill>
-                  <a:srgbClr val="334155"/>
+              <a:defRPr sz="950">
+                <a:solidFill>
+                  <a:srgbClr val="0F172A"/>
                 </a:solidFill>
                 <a:latin typeface="Arial"/>
               </a:defRPr>
@@ -12796,7 +12895,7 @@
         <p:spPr>
           <a:xfrm>
             <a:off x="365760" y="1051560"/>
-            <a:ext cx="4389120" cy="5120640"/>
+            <a:ext cx="4937760" cy="5303520"/>
           </a:xfrm>
           <a:prstGeom prst="rect">
             <a:avLst/>
@@ -12811,11 +12910,11 @@
           <a:p>
             <a:pPr marL="285750" indent="-285750">
               <a:spcAft>
-                <a:spcPts val="400"/>
+                <a:spcPts val="600"/>
               </a:spcAft>
               <a:buFont typeface="Wingdings" panose="05000000000000000000" pitchFamily="2" charset="2"/>
               <a:buChar char="q"/>
-              <a:defRPr sz="1800" b="1">
+              <a:defRPr sz="2200" b="1">
                 <a:solidFill>
                   <a:srgbClr val="1F497D"/>
                 </a:solidFill>
@@ -12835,7 +12934,7 @@
               <a:spcBef>
                 <a:spcPts val="200"/>
               </a:spcBef>
-              <a:defRPr sz="850" b="1">
+              <a:defRPr sz="1550" b="1">
                 <a:solidFill>
                   <a:srgbClr val="1F497D"/>
                 </a:solidFill>
@@ -12843,16 +12942,16 @@
               </a:defRPr>
             </a:pPr>
             <a:r>
-              <a:t>• Down To Earth: </a:t>
-            </a:r>
-            <a:r>
-              <a:rPr sz="800" b="0">
-                <a:solidFill>
-                  <a:srgbClr val="010000"/>
+              <a:t>•  Down To Earth: </a:t>
+            </a:r>
+            <a:r>
+              <a:rPr sz="1500" b="0">
+                <a:solidFill>
+                  <a:srgbClr val="0F172A"/>
                 </a:solidFill>
                 <a:latin typeface="Arial"/>
               </a:rPr>
-              <a:t>State of India's Environment (human-wildlife conflict trends)</a:t>
+              <a:t>State of India's Environment 2025 (conflict data &amp; trends).</a:t>
             </a:r>
           </a:p>
           <a:p>
@@ -12860,7 +12959,7 @@
               <a:spcBef>
                 <a:spcPts val="200"/>
               </a:spcBef>
-              <a:defRPr sz="850" b="1">
+              <a:defRPr sz="1550" b="1">
                 <a:solidFill>
                   <a:srgbClr val="1F497D"/>
                 </a:solidFill>
@@ -12868,16 +12967,16 @@
               </a:defRPr>
             </a:pPr>
             <a:r>
-              <a:t>• PMC / PubMed Central: </a:t>
-            </a:r>
-            <a:r>
-              <a:rPr sz="800" b="0">
-                <a:solidFill>
-                  <a:srgbClr val="010000"/>
+              <a:t>•  PMC / PubMed: </a:t>
+            </a:r>
+            <a:r>
+              <a:rPr sz="1500" b="0">
+                <a:solidFill>
+                  <a:srgbClr val="0F172A"/>
                 </a:solidFill>
                 <a:latin typeface="Arial"/>
               </a:rPr>
-              <a:t>Human-elephant conflict studies (Jharkhand &amp; Chhattisgarh)</a:t>
+              <a:t>Human-elephant conflict studies (Jharkhand &amp; Chhattisgarh).</a:t>
             </a:r>
           </a:p>
           <a:p>
@@ -12885,7 +12984,7 @@
               <a:spcBef>
                 <a:spcPts val="200"/>
               </a:spcBef>
-              <a:defRPr sz="850" b="1">
+              <a:defRPr sz="1550" b="1">
                 <a:solidFill>
                   <a:srgbClr val="1F497D"/>
                 </a:solidFill>
@@ -12893,16 +12992,16 @@
               </a:defRPr>
             </a:pPr>
             <a:r>
-              <a:t>• Nature (Scientific Reports): </a:t>
-            </a:r>
-            <a:r>
-              <a:rPr sz="800" b="0">
-                <a:solidFill>
-                  <a:srgbClr val="010000"/>
+              <a:t>•  Nature (Reports): </a:t>
+            </a:r>
+            <a:r>
+              <a:rPr sz="1500" b="0">
+                <a:solidFill>
+                  <a:srgbClr val="0F172A"/>
                 </a:solidFill>
                 <a:latin typeface="Arial"/>
               </a:rPr>
-              <a:t>Fatality trends &amp; mitigation strategies in corridor belts</a:t>
+              <a:t>Scientific research on HEC fatality trends &amp; mitigation.</a:t>
             </a:r>
           </a:p>
           <a:p>
@@ -12910,7 +13009,7 @@
               <a:spcBef>
                 <a:spcPts val="200"/>
               </a:spcBef>
-              <a:defRPr sz="850" b="1">
+              <a:defRPr sz="1550" b="1">
                 <a:solidFill>
                   <a:srgbClr val="1F497D"/>
                 </a:solidFill>
@@ -12918,24 +13017,24 @@
               </a:defRPr>
             </a:pPr>
             <a:r>
-              <a:t>• LILA BC: </a:t>
-            </a:r>
-            <a:r>
-              <a:rPr sz="800" b="0">
-                <a:solidFill>
-                  <a:srgbClr val="010000"/>
+              <a:t>•  LILA BC: </a:t>
+            </a:r>
+            <a:r>
+              <a:rPr sz="1500" b="0">
+                <a:solidFill>
+                  <a:srgbClr val="0F172A"/>
                 </a:solidFill>
                 <a:latin typeface="Arial"/>
               </a:rPr>
-              <a:t>Open wildlife camera-trap image &amp; benchmark datasets</a:t>
+              <a:t>Open wildlife camera-trap datasets.</a:t>
             </a:r>
           </a:p>
           <a:p>
             <a:pPr>
               <a:spcBef>
-                <a:spcPts val="600"/>
+                <a:spcPts val="800"/>
               </a:spcBef>
-              <a:defRPr sz="1050" b="1">
+              <a:defRPr sz="1750" b="1">
                 <a:solidFill>
                   <a:srgbClr val="1F497D"/>
                 </a:solidFill>
@@ -12951,7 +13050,7 @@
               <a:spcBef>
                 <a:spcPts val="200"/>
               </a:spcBef>
-              <a:defRPr sz="850" b="1">
+              <a:defRPr sz="1550" b="1">
                 <a:solidFill>
                   <a:srgbClr val="064E3B"/>
                 </a:solidFill>
@@ -12959,16 +13058,16 @@
               </a:defRPr>
             </a:pPr>
             <a:r>
-              <a:t>• ElephantWatch (Amrita Univ): </a:t>
-            </a:r>
-            <a:r>
-              <a:rPr sz="800" b="0">
-                <a:solidFill>
-                  <a:srgbClr val="010000"/>
+              <a:t>•  ElephantWatch: </a:t>
+            </a:r>
+            <a:r>
+              <a:rPr sz="1500" b="0">
+                <a:solidFill>
+                  <a:srgbClr val="0F172A"/>
                 </a:solidFill>
                 <a:latin typeface="Arial"/>
               </a:rPr>
-              <a:t>AI-enhanced elephant detection system</a:t>
+              <a:t>Amrita University (AI-enhanced detection).</a:t>
             </a:r>
           </a:p>
           <a:p>
@@ -12976,7 +13075,7 @@
               <a:spcBef>
                 <a:spcPts val="200"/>
               </a:spcBef>
-              <a:defRPr sz="850" b="1">
+              <a:defRPr sz="1550" b="1">
                 <a:solidFill>
                   <a:srgbClr val="064E3B"/>
                 </a:solidFill>
@@ -12984,16 +13083,16 @@
               </a:defRPr>
             </a:pPr>
             <a:r>
-              <a:t>• EleSense (VFAES): </a:t>
-            </a:r>
-            <a:r>
-              <a:rPr sz="800" b="0">
-                <a:solidFill>
-                  <a:srgbClr val="010000"/>
+              <a:t>•  EleSense: </a:t>
+            </a:r>
+            <a:r>
+              <a:rPr sz="1500" b="0">
+                <a:solidFill>
+                  <a:srgbClr val="0F172A"/>
                 </a:solidFill>
                 <a:latin typeface="Arial"/>
               </a:rPr>
-              <a:t>Sensor-based elephant corridor warning system</a:t>
+              <a:t>Voice for Asian Elephants (Sensor corridor alert).</a:t>
             </a:r>
           </a:p>
           <a:p>
@@ -13001,7 +13100,7 @@
               <a:spcBef>
                 <a:spcPts val="200"/>
               </a:spcBef>
-              <a:defRPr sz="850" b="1">
+              <a:defRPr sz="1550" b="1">
                 <a:solidFill>
                   <a:srgbClr val="064E3B"/>
                 </a:solidFill>
@@ -13009,16 +13108,16 @@
               </a:defRPr>
             </a:pPr>
             <a:r>
-              <a:t>• MegaDetector (Microsoft AI for Earth): </a:t>
-            </a:r>
-            <a:r>
-              <a:rPr sz="800" b="0">
-                <a:solidFill>
-                  <a:srgbClr val="010000"/>
+              <a:t>•  MegaDetector: </a:t>
+            </a:r>
+            <a:r>
+              <a:rPr sz="1500" b="0">
+                <a:solidFill>
+                  <a:srgbClr val="0F172A"/>
                 </a:solidFill>
                 <a:latin typeface="Arial"/>
               </a:rPr>
-              <a:t>Open-source wildlife detection model</a:t>
+              <a:t>Microsoft AI for Earth (Open-source wildlife model).</a:t>
             </a:r>
           </a:p>
         </p:txBody>
@@ -13059,17 +13158,53 @@
           </a:p>
         </p:txBody>
       </p:sp>
+      <p:sp>
+        <p:nvSpPr>
+          <p:cNvPr id="17411" name="TextBox 17410"/>
+          <p:cNvSpPr txBox="1"/>
+          <p:nvPr/>
+        </p:nvSpPr>
+        <p:spPr>
+          <a:xfrm>
+            <a:off x="5486400" y="1051560"/>
+            <a:ext cx="6309360" cy="320040"/>
+          </a:xfrm>
+          <a:prstGeom prst="rect">
+            <a:avLst/>
+          </a:prstGeom>
+          <a:noFill/>
+        </p:spPr>
+        <p:txBody>
+          <a:bodyPr wrap="none">
+            <a:spAutoFit/>
+          </a:bodyPr>
+          <a:lstStyle/>
+          <a:p>
+            <a:pPr>
+              <a:defRPr sz="2200" b="1">
+                <a:solidFill>
+                  <a:srgbClr val="1F497D"/>
+                </a:solidFill>
+                <a:latin typeface="Arial"/>
+              </a:defRPr>
+            </a:pPr>
+            <a:r>
+              <a:t>Competitive Analysis</a:t>
+            </a:r>
+          </a:p>
+        </p:txBody>
+      </p:sp>
       <p:graphicFrame>
         <p:nvGraphicFramePr>
-          <p:cNvPr id="17411" name="Table 17410"/>
+          <p:cNvPr id="17412" name="Table 17411"/>
           <p:cNvGraphicFramePr>
             <a:graphicFrameLocks noGrp="1"/>
           </p:cNvGraphicFramePr>
           <p:nvPr/>
         </p:nvGraphicFramePr>
         <p:xfrm>
-          <a:off x="4937760" y="1417320"/>
-          <a:ext cx="6858000" cy="4754880"/>
+          <a:off x="5486400" y="1463040"/>
+          <a:ext cx="6309360" cy="4754880"/>
         </p:xfrm>
         <a:graphic>
           <a:graphicData uri="http://schemas.openxmlformats.org/drawingml/2006/table">
@@ -13079,10 +13214,10 @@
               </a:tblPr>
               <a:tblGrid>
                 <a:gridCol w="2103120"/>
-                <a:gridCol w="1143000"/>
-                <a:gridCol w="1143000"/>
-                <a:gridCol w="1143000"/>
-                <a:gridCol w="1325880"/>
+                <a:gridCol w="1005840"/>
+                <a:gridCol w="1005840"/>
+                <a:gridCol w="1005840"/>
+                <a:gridCol w="1188720"/>
               </a:tblGrid>
               <a:tr h="528320">
                 <a:tc>
@@ -13091,7 +13226,7 @@
                     <a:lstStyle/>
                     <a:p>
                       <a:pPr algn="ctr">
-                        <a:defRPr sz="850" b="1">
+                        <a:defRPr sz="1000" b="1">
                           <a:solidFill>
                             <a:srgbClr val="FFFFFF"/>
                           </a:solidFill>
@@ -13115,7 +13250,7 @@
                     <a:lstStyle/>
                     <a:p>
                       <a:pPr algn="ctr">
-                        <a:defRPr sz="850" b="1">
+                        <a:defRPr sz="1000" b="1">
                           <a:solidFill>
                             <a:srgbClr val="FFFFFF"/>
                           </a:solidFill>
@@ -13139,7 +13274,7 @@
                     <a:lstStyle/>
                     <a:p>
                       <a:pPr algn="ctr">
-                        <a:defRPr sz="850" b="1">
+                        <a:defRPr sz="1000" b="1">
                           <a:solidFill>
                             <a:srgbClr val="FFFFFF"/>
                           </a:solidFill>
@@ -13163,7 +13298,7 @@
                     <a:lstStyle/>
                     <a:p>
                       <a:pPr algn="ctr">
-                        <a:defRPr sz="850" b="1">
+                        <a:defRPr sz="1000" b="1">
                           <a:solidFill>
                             <a:srgbClr val="FFFFFF"/>
                           </a:solidFill>
@@ -13171,7 +13306,7 @@
                         </a:defRPr>
                       </a:pPr>
                       <a:r>
-                        <a:t>Public Cameras</a:t>
+                        <a:t>Public Cams</a:t>
                       </a:r>
                     </a:p>
                   </a:txBody>
@@ -13187,7 +13322,7 @@
                     <a:lstStyle/>
                     <a:p>
                       <a:pPr algn="ctr">
-                        <a:defRPr sz="850" b="1">
+                        <a:defRPr sz="1000" b="1">
                           <a:solidFill>
                             <a:srgbClr val="FFFFFF"/>
                           </a:solidFill>
@@ -13213,9 +13348,9 @@
                     <a:lstStyle/>
                     <a:p>
                       <a:pPr algn="l">
-                        <a:defRPr sz="750" b="1">
+                        <a:defRPr sz="950" b="1">
                           <a:solidFill>
-                            <a:srgbClr val="010000"/>
+                            <a:srgbClr val="0F172A"/>
                           </a:solidFill>
                           <a:latin typeface="Arial"/>
                         </a:defRPr>
@@ -13237,9 +13372,9 @@
                     <a:lstStyle/>
                     <a:p>
                       <a:pPr algn="ctr">
-                        <a:defRPr sz="750">
+                        <a:defRPr sz="950">
                           <a:solidFill>
-                            <a:srgbClr val="010000"/>
+                            <a:srgbClr val="0F172A"/>
                           </a:solidFill>
                           <a:latin typeface="Arial"/>
                         </a:defRPr>
@@ -13261,9 +13396,9 @@
                     <a:lstStyle/>
                     <a:p>
                       <a:pPr algn="ctr">
-                        <a:defRPr sz="750">
+                        <a:defRPr sz="950">
                           <a:solidFill>
-                            <a:srgbClr val="010000"/>
+                            <a:srgbClr val="0F172A"/>
                           </a:solidFill>
                           <a:latin typeface="Arial"/>
                         </a:defRPr>
@@ -13285,9 +13420,9 @@
                     <a:lstStyle/>
                     <a:p>
                       <a:pPr algn="ctr">
-                        <a:defRPr sz="750">
+                        <a:defRPr sz="950">
                           <a:solidFill>
-                            <a:srgbClr val="010000"/>
+                            <a:srgbClr val="0F172A"/>
                           </a:solidFill>
                           <a:latin typeface="Arial"/>
                         </a:defRPr>
@@ -13309,7 +13444,7 @@
                     <a:lstStyle/>
                     <a:p>
                       <a:pPr algn="ctr">
-                        <a:defRPr sz="750" b="1">
+                        <a:defRPr sz="950" b="1">
                           <a:solidFill>
                             <a:srgbClr val="064E3B"/>
                           </a:solidFill>
@@ -13335,9 +13470,9 @@
                     <a:lstStyle/>
                     <a:p>
                       <a:pPr algn="l">
-                        <a:defRPr sz="750" b="1">
+                        <a:defRPr sz="950" b="1">
                           <a:solidFill>
-                            <a:srgbClr val="010000"/>
+                            <a:srgbClr val="0F172A"/>
                           </a:solidFill>
                           <a:latin typeface="Arial"/>
                         </a:defRPr>
@@ -13359,9 +13494,9 @@
                     <a:lstStyle/>
                     <a:p>
                       <a:pPr algn="ctr">
-                        <a:defRPr sz="750">
+                        <a:defRPr sz="950">
                           <a:solidFill>
-                            <a:srgbClr val="010000"/>
+                            <a:srgbClr val="0F172A"/>
                           </a:solidFill>
                           <a:latin typeface="Arial"/>
                         </a:defRPr>
@@ -13383,9 +13518,9 @@
                     <a:lstStyle/>
                     <a:p>
                       <a:pPr algn="ctr">
-                        <a:defRPr sz="750">
+                        <a:defRPr sz="950">
                           <a:solidFill>
-                            <a:srgbClr val="010000"/>
+                            <a:srgbClr val="0F172A"/>
                           </a:solidFill>
                           <a:latin typeface="Arial"/>
                         </a:defRPr>
@@ -13407,9 +13542,9 @@
                     <a:lstStyle/>
                     <a:p>
                       <a:pPr algn="ctr">
-                        <a:defRPr sz="750">
+                        <a:defRPr sz="950">
                           <a:solidFill>
-                            <a:srgbClr val="010000"/>
+                            <a:srgbClr val="0F172A"/>
                           </a:solidFill>
                           <a:latin typeface="Arial"/>
                         </a:defRPr>
@@ -13431,7 +13566,7 @@
                     <a:lstStyle/>
                     <a:p>
                       <a:pPr algn="ctr">
-                        <a:defRPr sz="750" b="1">
+                        <a:defRPr sz="950" b="1">
                           <a:solidFill>
                             <a:srgbClr val="064E3B"/>
                           </a:solidFill>
@@ -13457,9 +13592,9 @@
                     <a:lstStyle/>
                     <a:p>
                       <a:pPr algn="l">
-                        <a:defRPr sz="750" b="1">
+                        <a:defRPr sz="950" b="1">
                           <a:solidFill>
-                            <a:srgbClr val="010000"/>
+                            <a:srgbClr val="0F172A"/>
                           </a:solidFill>
                           <a:latin typeface="Arial"/>
                         </a:defRPr>
@@ -13481,9 +13616,9 @@
                     <a:lstStyle/>
                     <a:p>
                       <a:pPr algn="ctr">
-                        <a:defRPr sz="750">
+                        <a:defRPr sz="950">
                           <a:solidFill>
-                            <a:srgbClr val="010000"/>
+                            <a:srgbClr val="0F172A"/>
                           </a:solidFill>
                           <a:latin typeface="Arial"/>
                         </a:defRPr>
@@ -13505,9 +13640,9 @@
                     <a:lstStyle/>
                     <a:p>
                       <a:pPr algn="ctr">
-                        <a:defRPr sz="750">
+                        <a:defRPr sz="950">
                           <a:solidFill>
-                            <a:srgbClr val="010000"/>
+                            <a:srgbClr val="0F172A"/>
                           </a:solidFill>
                           <a:latin typeface="Arial"/>
                         </a:defRPr>
@@ -13529,9 +13664,9 @@
                     <a:lstStyle/>
                     <a:p>
                       <a:pPr algn="ctr">
-                        <a:defRPr sz="750">
+                        <a:defRPr sz="950">
                           <a:solidFill>
-                            <a:srgbClr val="010000"/>
+                            <a:srgbClr val="0F172A"/>
                           </a:solidFill>
                           <a:latin typeface="Arial"/>
                         </a:defRPr>
@@ -13553,7 +13688,7 @@
                     <a:lstStyle/>
                     <a:p>
                       <a:pPr algn="ctr">
-                        <a:defRPr sz="750" b="1">
+                        <a:defRPr sz="950" b="1">
                           <a:solidFill>
                             <a:srgbClr val="064E3B"/>
                           </a:solidFill>
@@ -13579,9 +13714,9 @@
                     <a:lstStyle/>
                     <a:p>
                       <a:pPr algn="l">
-                        <a:defRPr sz="750" b="1">
+                        <a:defRPr sz="950" b="1">
                           <a:solidFill>
-                            <a:srgbClr val="010000"/>
+                            <a:srgbClr val="0F172A"/>
                           </a:solidFill>
                           <a:latin typeface="Arial"/>
                         </a:defRPr>
@@ -13603,9 +13738,9 @@
                     <a:lstStyle/>
                     <a:p>
                       <a:pPr algn="ctr">
-                        <a:defRPr sz="750">
+                        <a:defRPr sz="950">
                           <a:solidFill>
-                            <a:srgbClr val="010000"/>
+                            <a:srgbClr val="0F172A"/>
                           </a:solidFill>
                           <a:latin typeface="Arial"/>
                         </a:defRPr>
@@ -13627,9 +13762,9 @@
                     <a:lstStyle/>
                     <a:p>
                       <a:pPr algn="ctr">
-                        <a:defRPr sz="750">
+                        <a:defRPr sz="950">
                           <a:solidFill>
-                            <a:srgbClr val="010000"/>
+                            <a:srgbClr val="0F172A"/>
                           </a:solidFill>
                           <a:latin typeface="Arial"/>
                         </a:defRPr>
@@ -13651,9 +13786,9 @@
                     <a:lstStyle/>
                     <a:p>
                       <a:pPr algn="ctr">
-                        <a:defRPr sz="750">
+                        <a:defRPr sz="950">
                           <a:solidFill>
-                            <a:srgbClr val="010000"/>
+                            <a:srgbClr val="0F172A"/>
                           </a:solidFill>
                           <a:latin typeface="Arial"/>
                         </a:defRPr>
@@ -13675,7 +13810,7 @@
                     <a:lstStyle/>
                     <a:p>
                       <a:pPr algn="ctr">
-                        <a:defRPr sz="750" b="1">
+                        <a:defRPr sz="950" b="1">
                           <a:solidFill>
                             <a:srgbClr val="064E3B"/>
                           </a:solidFill>
@@ -13701,9 +13836,9 @@
                     <a:lstStyle/>
                     <a:p>
                       <a:pPr algn="l">
-                        <a:defRPr sz="750" b="1">
+                        <a:defRPr sz="950" b="1">
                           <a:solidFill>
-                            <a:srgbClr val="010000"/>
+                            <a:srgbClr val="0F172A"/>
                           </a:solidFill>
                           <a:latin typeface="Arial"/>
                         </a:defRPr>
@@ -13725,9 +13860,9 @@
                     <a:lstStyle/>
                     <a:p>
                       <a:pPr algn="ctr">
-                        <a:defRPr sz="750">
+                        <a:defRPr sz="950">
                           <a:solidFill>
-                            <a:srgbClr val="010000"/>
+                            <a:srgbClr val="0F172A"/>
                           </a:solidFill>
                           <a:latin typeface="Arial"/>
                         </a:defRPr>
@@ -13749,9 +13884,9 @@
                     <a:lstStyle/>
                     <a:p>
                       <a:pPr algn="ctr">
-                        <a:defRPr sz="750">
+                        <a:defRPr sz="950">
                           <a:solidFill>
-                            <a:srgbClr val="010000"/>
+                            <a:srgbClr val="0F172A"/>
                           </a:solidFill>
                           <a:latin typeface="Arial"/>
                         </a:defRPr>
@@ -13773,9 +13908,9 @@
                     <a:lstStyle/>
                     <a:p>
                       <a:pPr algn="ctr">
-                        <a:defRPr sz="750">
+                        <a:defRPr sz="950">
                           <a:solidFill>
-                            <a:srgbClr val="010000"/>
+                            <a:srgbClr val="0F172A"/>
                           </a:solidFill>
                           <a:latin typeface="Arial"/>
                         </a:defRPr>
@@ -13797,7 +13932,7 @@
                     <a:lstStyle/>
                     <a:p>
                       <a:pPr algn="ctr">
-                        <a:defRPr sz="750" b="1">
+                        <a:defRPr sz="950" b="1">
                           <a:solidFill>
                             <a:srgbClr val="064E3B"/>
                           </a:solidFill>
@@ -13823,9 +13958,9 @@
                     <a:lstStyle/>
                     <a:p>
                       <a:pPr algn="l">
-                        <a:defRPr sz="750" b="1">
+                        <a:defRPr sz="950" b="1">
                           <a:solidFill>
-                            <a:srgbClr val="010000"/>
+                            <a:srgbClr val="0F172A"/>
                           </a:solidFill>
                           <a:latin typeface="Arial"/>
                         </a:defRPr>
@@ -13847,9 +13982,9 @@
                     <a:lstStyle/>
                     <a:p>
                       <a:pPr algn="ctr">
-                        <a:defRPr sz="750">
+                        <a:defRPr sz="950">
                           <a:solidFill>
-                            <a:srgbClr val="010000"/>
+                            <a:srgbClr val="0F172A"/>
                           </a:solidFill>
                           <a:latin typeface="Arial"/>
                         </a:defRPr>
@@ -13871,9 +14006,9 @@
                     <a:lstStyle/>
                     <a:p>
                       <a:pPr algn="ctr">
-                        <a:defRPr sz="750">
+                        <a:defRPr sz="950">
                           <a:solidFill>
-                            <a:srgbClr val="010000"/>
+                            <a:srgbClr val="0F172A"/>
                           </a:solidFill>
                           <a:latin typeface="Arial"/>
                         </a:defRPr>
@@ -13895,9 +14030,9 @@
                     <a:lstStyle/>
                     <a:p>
                       <a:pPr algn="ctr">
-                        <a:defRPr sz="750">
+                        <a:defRPr sz="950">
                           <a:solidFill>
-                            <a:srgbClr val="010000"/>
+                            <a:srgbClr val="0F172A"/>
                           </a:solidFill>
                           <a:latin typeface="Arial"/>
                         </a:defRPr>
@@ -13919,7 +14054,7 @@
                     <a:lstStyle/>
                     <a:p>
                       <a:pPr algn="ctr">
-                        <a:defRPr sz="750" b="1">
+                        <a:defRPr sz="950" b="1">
                           <a:solidFill>
                             <a:srgbClr val="064E3B"/>
                           </a:solidFill>
@@ -13945,9 +14080,9 @@
                     <a:lstStyle/>
                     <a:p>
                       <a:pPr algn="l">
-                        <a:defRPr sz="750" b="1">
+                        <a:defRPr sz="950" b="1">
                           <a:solidFill>
-                            <a:srgbClr val="010000"/>
+                            <a:srgbClr val="0F172A"/>
                           </a:solidFill>
                           <a:latin typeface="Arial"/>
                         </a:defRPr>
@@ -13969,9 +14104,9 @@
                     <a:lstStyle/>
                     <a:p>
                       <a:pPr algn="ctr">
-                        <a:defRPr sz="750">
+                        <a:defRPr sz="950">
                           <a:solidFill>
-                            <a:srgbClr val="010000"/>
+                            <a:srgbClr val="0F172A"/>
                           </a:solidFill>
                           <a:latin typeface="Arial"/>
                         </a:defRPr>
@@ -13993,9 +14128,9 @@
                     <a:lstStyle/>
                     <a:p>
                       <a:pPr algn="ctr">
-                        <a:defRPr sz="750">
+                        <a:defRPr sz="950">
                           <a:solidFill>
-                            <a:srgbClr val="010000"/>
+                            <a:srgbClr val="0F172A"/>
                           </a:solidFill>
                           <a:latin typeface="Arial"/>
                         </a:defRPr>
@@ -14017,9 +14152,9 @@
                     <a:lstStyle/>
                     <a:p>
                       <a:pPr algn="ctr">
-                        <a:defRPr sz="750">
+                        <a:defRPr sz="950">
                           <a:solidFill>
-                            <a:srgbClr val="010000"/>
+                            <a:srgbClr val="0F172A"/>
                           </a:solidFill>
                           <a:latin typeface="Arial"/>
                         </a:defRPr>
@@ -14041,7 +14176,7 @@
                     <a:lstStyle/>
                     <a:p>
                       <a:pPr algn="ctr">
-                        <a:defRPr sz="750" b="1">
+                        <a:defRPr sz="950" b="1">
                           <a:solidFill>
                             <a:srgbClr val="064E3B"/>
                           </a:solidFill>
@@ -14067,9 +14202,9 @@
                     <a:lstStyle/>
                     <a:p>
                       <a:pPr algn="l">
-                        <a:defRPr sz="750" b="1">
+                        <a:defRPr sz="950" b="1">
                           <a:solidFill>
-                            <a:srgbClr val="010000"/>
+                            <a:srgbClr val="0F172A"/>
                           </a:solidFill>
                           <a:latin typeface="Arial"/>
                         </a:defRPr>
@@ -14091,9 +14226,9 @@
                     <a:lstStyle/>
                     <a:p>
                       <a:pPr algn="ctr">
-                        <a:defRPr sz="750">
+                        <a:defRPr sz="950">
                           <a:solidFill>
-                            <a:srgbClr val="010000"/>
+                            <a:srgbClr val="0F172A"/>
                           </a:solidFill>
                           <a:latin typeface="Arial"/>
                         </a:defRPr>
@@ -14115,9 +14250,9 @@
                     <a:lstStyle/>
                     <a:p>
                       <a:pPr algn="ctr">
-                        <a:defRPr sz="750">
+                        <a:defRPr sz="950">
                           <a:solidFill>
-                            <a:srgbClr val="010000"/>
+                            <a:srgbClr val="0F172A"/>
                           </a:solidFill>
                           <a:latin typeface="Arial"/>
                         </a:defRPr>
@@ -14139,9 +14274,9 @@
                     <a:lstStyle/>
                     <a:p>
                       <a:pPr algn="ctr">
-                        <a:defRPr sz="750">
+                        <a:defRPr sz="950">
                           <a:solidFill>
-                            <a:srgbClr val="010000"/>
+                            <a:srgbClr val="0F172A"/>
                           </a:solidFill>
                           <a:latin typeface="Arial"/>
                         </a:defRPr>
@@ -14163,7 +14298,7 @@
                     <a:lstStyle/>
                     <a:p>
                       <a:pPr algn="ctr">
-                        <a:defRPr sz="750" b="1">
+                        <a:defRPr sz="950" b="1">
                           <a:solidFill>
                             <a:srgbClr val="064E3B"/>
                           </a:solidFill>
